--- a/content/05-teaching-resources/slides/digital-support/03-devices-operating-systems-and-applications.pptx
+++ b/content/05-teaching-resources/slides/digital-support/03-devices-operating-systems-and-applications.pptx
@@ -15,6 +15,12 @@
     <p:sldId id="263" r:id="rId15"/>
     <p:sldId id="264" r:id="rId16"/>
     <p:sldId id="265" r:id="rId17"/>
+    <p:sldId id="266" r:id="rId18"/>
+    <p:sldId id="267" r:id="rId19"/>
+    <p:sldId id="268" r:id="rId20"/>
+    <p:sldId id="269" r:id="rId21"/>
+    <p:sldId id="270" r:id="rId22"/>
+    <p:sldId id="271" r:id="rId23"/>
   </p:sldIdLst>
   <p:sldSz cx="12191695" cy="6858000" type="screen4x3"/>
   <p:notesSz cx="6858000" cy="9144000"/>
@@ -511,7 +517,22 @@
           <a:lstStyle/>
           <a:p>
             <a:r>
-              <a:t>Also check RAM, processor, OS compatibility and network card. Consider permissions (least privilege) and the security impact on the device, network and data.</a:t>
+              <a:t>Answers:</a:t>
+            </a:r>
+          </a:p>
+          <a:p>
+            <a:r>
+              <a:t>1. A device that relies on a server for processing.</a:t>
+            </a:r>
+          </a:p>
+          <a:p>
+            <a:r>
+              <a:t>2. E.g. smart alarms, meters, lighting.</a:t>
+            </a:r>
+          </a:p>
+          <a:p>
+            <a:r>
+              <a:t>3. A desktop provided over the internet.</a:t>
             </a:r>
           </a:p>
         </p:txBody>
@@ -581,7 +602,7 @@
           <a:lstStyle/>
           <a:p>
             <a:r>
-              <a:t>Give students a few minutes to answer on mini whiteboards or paper, then reveal the answers on the next slide.</a:t>
+              <a:t>Also check RAM, processor, OS compatibility and network card. Consider permissions (least privilege) and the security impact on the device, network and data.</a:t>
             </a:r>
           </a:p>
         </p:txBody>
@@ -651,7 +672,22 @@
           <a:lstStyle/>
           <a:p>
             <a:r>
-              <a:t>Talk through any answers the class found difficult.</a:t>
+              <a:t>Answers:</a:t>
+            </a:r>
+          </a:p>
+          <a:p>
+            <a:r>
+              <a:t>1. Any three: storage, RAM, processor, OS compatibility.</a:t>
+            </a:r>
+          </a:p>
+          <a:p>
+            <a:r>
+              <a:t>2. E.g. faster, no moving parts, compact.</a:t>
+            </a:r>
+          </a:p>
+          <a:p>
+            <a:r>
+              <a:t>3. Giving users only the access they need.</a:t>
             </a:r>
           </a:p>
         </p:txBody>
@@ -677,6 +713,231 @@
 </file>
 
 <file path=ppt/notesSlides/notesSlide4.xml><?xml version="1.0" encoding="utf-8"?>
+<p:notes xmlns:a="http://schemas.openxmlformats.org/drawingml/2006/main" xmlns:p="http://schemas.openxmlformats.org/presentationml/2006/main" xmlns:r="http://schemas.openxmlformats.org/officeDocument/2006/relationships">
+  <p:cSld>
+    <p:spTree>
+      <p:nvGrpSpPr>
+        <p:cNvPr id="1" name=""/>
+        <p:cNvGrpSpPr/>
+        <p:nvPr/>
+      </p:nvGrpSpPr>
+      <p:grpSpPr>
+        <a:xfrm>
+          <a:off x="0" y="0"/>
+          <a:ext cx="0" cy="0"/>
+          <a:chOff x="0" y="0"/>
+          <a:chExt cx="0" cy="0"/>
+        </a:xfrm>
+      </p:grpSpPr>
+      <p:sp>
+        <p:nvSpPr>
+          <p:cNvPr id="2" name="Slide Image Placeholder 1"/>
+          <p:cNvSpPr>
+            <a:spLocks noGrp="1"/>
+          </p:cNvSpPr>
+          <p:nvPr>
+            <p:ph type="sldImg" idx="2"/>
+          </p:nvPr>
+        </p:nvSpPr>
+        <p:spPr/>
+      </p:sp>
+      <p:sp>
+        <p:nvSpPr>
+          <p:cNvPr id="3" name="Notes Placeholder 2"/>
+          <p:cNvSpPr>
+            <a:spLocks noGrp="1"/>
+          </p:cNvSpPr>
+          <p:nvPr>
+            <p:ph type="body" idx="3" sz="quarter"/>
+          </p:nvPr>
+        </p:nvSpPr>
+        <p:spPr/>
+        <p:txBody>
+          <a:bodyPr/>
+          <a:lstStyle/>
+          <a:p>
+            <a:r>
+              <a:t>Answers:</a:t>
+            </a:r>
+          </a:p>
+          <a:p>
+            <a:r>
+              <a:t>1. Back up and migrate their data.</a:t>
+            </a:r>
+          </a:p>
+          <a:p>
+            <a:r>
+              <a:t>2. So the hardware works properly.</a:t>
+            </a:r>
+          </a:p>
+          <a:p>
+            <a:r>
+              <a:t>3. So it's managed centrally.</a:t>
+            </a:r>
+          </a:p>
+        </p:txBody>
+      </p:sp>
+      <p:sp>
+        <p:nvSpPr>
+          <p:cNvPr id="4" name="Slide Number Placeholder 3"/>
+          <p:cNvSpPr>
+            <a:spLocks noGrp="1"/>
+          </p:cNvSpPr>
+          <p:nvPr>
+            <p:ph type="sldNum" idx="5" sz="quarter"/>
+          </p:nvPr>
+        </p:nvSpPr>
+        <p:spPr/>
+      </p:sp>
+    </p:spTree>
+  </p:cSld>
+  <p:clrMapOvr>
+    <a:masterClrMapping/>
+  </p:clrMapOvr>
+</p:notes>
+</file>
+
+<file path=ppt/notesSlides/notesSlide5.xml><?xml version="1.0" encoding="utf-8"?>
+<p:notes xmlns:a="http://schemas.openxmlformats.org/drawingml/2006/main" xmlns:p="http://schemas.openxmlformats.org/presentationml/2006/main" xmlns:r="http://schemas.openxmlformats.org/officeDocument/2006/relationships">
+  <p:cSld>
+    <p:spTree>
+      <p:nvGrpSpPr>
+        <p:cNvPr id="1" name=""/>
+        <p:cNvGrpSpPr/>
+        <p:nvPr/>
+      </p:nvGrpSpPr>
+      <p:grpSpPr>
+        <a:xfrm>
+          <a:off x="0" y="0"/>
+          <a:ext cx="0" cy="0"/>
+          <a:chOff x="0" y="0"/>
+          <a:chExt cx="0" cy="0"/>
+        </a:xfrm>
+      </p:grpSpPr>
+      <p:sp>
+        <p:nvSpPr>
+          <p:cNvPr id="2" name="Slide Image Placeholder 1"/>
+          <p:cNvSpPr>
+            <a:spLocks noGrp="1"/>
+          </p:cNvSpPr>
+          <p:nvPr>
+            <p:ph type="sldImg" idx="2"/>
+          </p:nvPr>
+        </p:nvSpPr>
+        <p:spPr/>
+      </p:sp>
+      <p:sp>
+        <p:nvSpPr>
+          <p:cNvPr id="3" name="Notes Placeholder 2"/>
+          <p:cNvSpPr>
+            <a:spLocks noGrp="1"/>
+          </p:cNvSpPr>
+          <p:nvPr>
+            <p:ph type="body" idx="3" sz="quarter"/>
+          </p:nvPr>
+        </p:nvSpPr>
+        <p:spPr/>
+        <p:txBody>
+          <a:bodyPr/>
+          <a:lstStyle/>
+          <a:p>
+            <a:r>
+              <a:t>Give students a few minutes to answer on mini whiteboards or paper, then reveal the answers on the next slide.</a:t>
+            </a:r>
+          </a:p>
+        </p:txBody>
+      </p:sp>
+      <p:sp>
+        <p:nvSpPr>
+          <p:cNvPr id="4" name="Slide Number Placeholder 3"/>
+          <p:cNvSpPr>
+            <a:spLocks noGrp="1"/>
+          </p:cNvSpPr>
+          <p:nvPr>
+            <p:ph type="sldNum" idx="5" sz="quarter"/>
+          </p:nvPr>
+        </p:nvSpPr>
+        <p:spPr/>
+      </p:sp>
+    </p:spTree>
+  </p:cSld>
+  <p:clrMapOvr>
+    <a:masterClrMapping/>
+  </p:clrMapOvr>
+</p:notes>
+</file>
+
+<file path=ppt/notesSlides/notesSlide6.xml><?xml version="1.0" encoding="utf-8"?>
+<p:notes xmlns:a="http://schemas.openxmlformats.org/drawingml/2006/main" xmlns:p="http://schemas.openxmlformats.org/presentationml/2006/main" xmlns:r="http://schemas.openxmlformats.org/officeDocument/2006/relationships">
+  <p:cSld>
+    <p:spTree>
+      <p:nvGrpSpPr>
+        <p:cNvPr id="1" name=""/>
+        <p:cNvGrpSpPr/>
+        <p:nvPr/>
+      </p:nvGrpSpPr>
+      <p:grpSpPr>
+        <a:xfrm>
+          <a:off x="0" y="0"/>
+          <a:ext cx="0" cy="0"/>
+          <a:chOff x="0" y="0"/>
+          <a:chExt cx="0" cy="0"/>
+        </a:xfrm>
+      </p:grpSpPr>
+      <p:sp>
+        <p:nvSpPr>
+          <p:cNvPr id="2" name="Slide Image Placeholder 1"/>
+          <p:cNvSpPr>
+            <a:spLocks noGrp="1"/>
+          </p:cNvSpPr>
+          <p:nvPr>
+            <p:ph type="sldImg" idx="2"/>
+          </p:nvPr>
+        </p:nvSpPr>
+        <p:spPr/>
+      </p:sp>
+      <p:sp>
+        <p:nvSpPr>
+          <p:cNvPr id="3" name="Notes Placeholder 2"/>
+          <p:cNvSpPr>
+            <a:spLocks noGrp="1"/>
+          </p:cNvSpPr>
+          <p:nvPr>
+            <p:ph type="body" idx="3" sz="quarter"/>
+          </p:nvPr>
+        </p:nvSpPr>
+        <p:spPr/>
+        <p:txBody>
+          <a:bodyPr/>
+          <a:lstStyle/>
+          <a:p>
+            <a:r>
+              <a:t>Talk through any answers the class found difficult.</a:t>
+            </a:r>
+          </a:p>
+        </p:txBody>
+      </p:sp>
+      <p:sp>
+        <p:nvSpPr>
+          <p:cNvPr id="4" name="Slide Number Placeholder 3"/>
+          <p:cNvSpPr>
+            <a:spLocks noGrp="1"/>
+          </p:cNvSpPr>
+          <p:nvPr>
+            <p:ph type="sldNum" idx="5" sz="quarter"/>
+          </p:nvPr>
+        </p:nvSpPr>
+        <p:spPr/>
+      </p:sp>
+    </p:spTree>
+  </p:cSld>
+  <p:clrMapOvr>
+    <a:masterClrMapping/>
+  </p:clrMapOvr>
+</p:notes>
+</file>
+
+<file path=ppt/notesSlides/notesSlide7.xml><?xml version="1.0" encoding="utf-8"?>
 <p:notes xmlns:a="http://schemas.openxmlformats.org/drawingml/2006/main" xmlns:p="http://schemas.openxmlformats.org/presentationml/2006/main" xmlns:r="http://schemas.openxmlformats.org/officeDocument/2006/relationships">
   <p:cSld>
     <p:spTree>
@@ -4052,6 +4313,3848 @@
     <p:bg>
       <p:bgPr>
         <a:solidFill>
+          <a:srgbClr val="FFFFFF"/>
+        </a:solidFill>
+        <a:effectLst/>
+      </p:bgPr>
+    </p:bg>
+    <p:spTree>
+      <p:nvGrpSpPr>
+        <p:cNvPr id="1" name=""/>
+        <p:cNvGrpSpPr/>
+        <p:nvPr/>
+      </p:nvGrpSpPr>
+      <p:grpSpPr/>
+      <p:sp>
+        <p:nvSpPr>
+          <p:cNvPr id="2" name="TextBox 1"/>
+          <p:cNvSpPr txBox="1"/>
+          <p:nvPr/>
+        </p:nvSpPr>
+        <p:spPr>
+          <a:xfrm>
+            <a:off x="548640" y="320040"/>
+            <a:ext cx="11094415" cy="274320"/>
+          </a:xfrm>
+          <a:prstGeom prst="rect">
+            <a:avLst/>
+          </a:prstGeom>
+          <a:noFill/>
+        </p:spPr>
+        <p:txBody>
+          <a:bodyPr wrap="square" anchor="t" lIns="0" rIns="0" tIns="0" bIns="0"/>
+          <a:lstStyle/>
+          <a:p>
+            <a:pPr algn="l"/>
+            <a:r>
+              <a:rPr sz="1100" b="1" i="0">
+                <a:solidFill>
+                  <a:srgbClr val="54595D"/>
+                </a:solidFill>
+                <a:latin typeface="Calibri"/>
+              </a:rPr>
+              <a:t>DIGITAL SUPPORT  ·  Digital Support Content Area 2</a:t>
+            </a:r>
+          </a:p>
+        </p:txBody>
+      </p:sp>
+      <p:sp>
+        <p:nvSpPr>
+          <p:cNvPr id="3" name="TextBox 2"/>
+          <p:cNvSpPr txBox="1"/>
+          <p:nvPr/>
+        </p:nvSpPr>
+        <p:spPr>
+          <a:xfrm>
+            <a:off x="548640" y="566928"/>
+            <a:ext cx="11094415" cy="822960"/>
+          </a:xfrm>
+          <a:prstGeom prst="rect">
+            <a:avLst/>
+          </a:prstGeom>
+          <a:noFill/>
+        </p:spPr>
+        <p:txBody>
+          <a:bodyPr wrap="square" anchor="ctr" lIns="0" rIns="0" tIns="0" bIns="0"/>
+          <a:lstStyle/>
+          <a:p>
+            <a:pPr algn="l"/>
+            <a:r>
+              <a:rPr sz="3200" b="1" i="0">
+                <a:solidFill>
+                  <a:srgbClr val="03306E"/>
+                </a:solidFill>
+                <a:latin typeface="Cambria"/>
+              </a:rPr>
+              <a:t>Installing an operating system</a:t>
+            </a:r>
+          </a:p>
+        </p:txBody>
+      </p:sp>
+      <p:sp>
+        <p:nvSpPr>
+          <p:cNvPr id="4" name="TextBox 3"/>
+          <p:cNvSpPr txBox="1"/>
+          <p:nvPr/>
+        </p:nvSpPr>
+        <p:spPr>
+          <a:xfrm>
+            <a:off x="548640" y="6446520"/>
+            <a:ext cx="8229600" cy="274320"/>
+          </a:xfrm>
+          <a:prstGeom prst="rect">
+            <a:avLst/>
+          </a:prstGeom>
+          <a:noFill/>
+        </p:spPr>
+        <p:txBody>
+          <a:bodyPr wrap="square" anchor="t" lIns="0" rIns="0" tIns="0" bIns="0"/>
+          <a:lstStyle/>
+          <a:p>
+            <a:pPr algn="l"/>
+            <a:r>
+              <a:rPr sz="1000" b="0" i="0">
+                <a:solidFill>
+                  <a:srgbClr val="54595D"/>
+                </a:solidFill>
+                <a:latin typeface="Calibri"/>
+              </a:rPr>
+              <a:t>Digital Support and Security T Level  ·  Devices, Operating Systems and Applications</a:t>
+            </a:r>
+          </a:p>
+        </p:txBody>
+      </p:sp>
+      <p:sp>
+        <p:nvSpPr>
+          <p:cNvPr id="5" name="TextBox 4"/>
+          <p:cNvSpPr txBox="1"/>
+          <p:nvPr/>
+        </p:nvSpPr>
+        <p:spPr>
+          <a:xfrm>
+            <a:off x="10728655" y="6446520"/>
+            <a:ext cx="914400" cy="274320"/>
+          </a:xfrm>
+          <a:prstGeom prst="rect">
+            <a:avLst/>
+          </a:prstGeom>
+          <a:noFill/>
+        </p:spPr>
+        <p:txBody>
+          <a:bodyPr wrap="square" anchor="t" lIns="0" rIns="0" tIns="0" bIns="0"/>
+          <a:lstStyle/>
+          <a:p>
+            <a:pPr algn="r"/>
+            <a:r>
+              <a:rPr sz="1000" b="0" i="0">
+                <a:solidFill>
+                  <a:srgbClr val="54595D"/>
+                </a:solidFill>
+                <a:latin typeface="Calibri"/>
+              </a:rPr>
+              <a:t>10</a:t>
+            </a:r>
+          </a:p>
+        </p:txBody>
+      </p:sp>
+      <p:sp>
+        <p:nvSpPr>
+          <p:cNvPr id="6" name="TextBox 5"/>
+          <p:cNvSpPr txBox="1"/>
+          <p:nvPr/>
+        </p:nvSpPr>
+        <p:spPr>
+          <a:xfrm>
+            <a:off x="548640" y="1554480"/>
+            <a:ext cx="6720840" cy="4617720"/>
+          </a:xfrm>
+          <a:prstGeom prst="rect">
+            <a:avLst/>
+          </a:prstGeom>
+          <a:noFill/>
+        </p:spPr>
+        <p:txBody>
+          <a:bodyPr wrap="square" lIns="0" rIns="0" tIns="0" bIns="0">
+            <a:spAutoFit/>
+          </a:bodyPr>
+          <a:lstStyle/>
+          <a:p>
+            <a:pPr>
+              <a:spcAft>
+                <a:spcPts val="1320"/>
+              </a:spcAft>
+            </a:pPr>
+            <a:r>
+              <a:rPr sz="2200" b="0">
+                <a:solidFill>
+                  <a:srgbClr val="202122"/>
+                </a:solidFill>
+                <a:latin typeface="Calibri"/>
+              </a:rPr>
+              <a:t>Installing an OS follows a clear sequence.</a:t>
+            </a:r>
+          </a:p>
+          <a:p>
+            <a:pPr>
+              <a:spcAft>
+                <a:spcPts val="1320"/>
+              </a:spcAft>
+            </a:pPr>
+            <a:r>
+              <a:rPr sz="2200" b="0">
+                <a:solidFill>
+                  <a:srgbClr val="202122"/>
+                </a:solidFill>
+                <a:latin typeface="Calibri"/>
+              </a:rPr>
+              <a:t>Choose the boot drive, then partition and format it. Join the device to the domain so it's managed centrally. Set the time, date, region and language. Install drivers so the hardware works properly. Apply updates, including over the network. Finally, install the applications the user needs.</a:t>
+            </a:r>
+          </a:p>
+          <a:p>
+            <a:pPr>
+              <a:spcAft>
+                <a:spcPts val="1320"/>
+              </a:spcAft>
+            </a:pPr>
+            <a:r>
+              <a:rPr sz="2200" b="0">
+                <a:solidFill>
+                  <a:srgbClr val="202122"/>
+                </a:solidFill>
+                <a:latin typeface="Calibri"/>
+              </a:rPr>
+              <a:t>When upgrading an existing OS, back up and migrate the user's data first so nothing is lost.</a:t>
+            </a:r>
+          </a:p>
+        </p:txBody>
+      </p:sp>
+      <p:sp>
+        <p:nvSpPr>
+          <p:cNvPr id="7" name="Rounded Rectangle 6"/>
+          <p:cNvSpPr/>
+          <p:nvPr/>
+        </p:nvSpPr>
+        <p:spPr>
+          <a:xfrm>
+            <a:off x="7772400" y="1554480"/>
+            <a:ext cx="3867912" cy="4526280"/>
+          </a:xfrm>
+          <a:prstGeom prst="roundRect">
+            <a:avLst>
+              <a:gd name="adj" fmla="val 8000"/>
+            </a:avLst>
+          </a:prstGeom>
+          <a:solidFill>
+            <a:srgbClr val="03306E"/>
+          </a:solidFill>
+          <a:ln>
+            <a:noFill/>
+          </a:ln>
+          <a:effectLst/>
+        </p:spPr>
+        <p:style>
+          <a:lnRef idx="1">
+            <a:schemeClr val="accent1"/>
+          </a:lnRef>
+          <a:fillRef idx="3">
+            <a:schemeClr val="accent1"/>
+          </a:fillRef>
+          <a:effectRef idx="2">
+            <a:schemeClr val="accent1"/>
+          </a:effectRef>
+          <a:fontRef idx="minor">
+            <a:schemeClr val="lt1"/>
+          </a:fontRef>
+        </p:style>
+        <p:txBody>
+          <a:bodyPr rtlCol="0" anchor="ctr"/>
+          <a:lstStyle/>
+          <a:p/>
+        </p:txBody>
+      </p:sp>
+      <p:sp>
+        <p:nvSpPr>
+          <p:cNvPr id="8" name="Oval 7"/>
+          <p:cNvSpPr/>
+          <p:nvPr/>
+        </p:nvSpPr>
+        <p:spPr>
+          <a:xfrm>
+            <a:off x="8046720" y="1828800"/>
+            <a:ext cx="548640" cy="548640"/>
+          </a:xfrm>
+          <a:prstGeom prst="ellipse">
+            <a:avLst/>
+          </a:prstGeom>
+          <a:solidFill>
+            <a:srgbClr val="4EA1FF"/>
+          </a:solidFill>
+          <a:ln>
+            <a:noFill/>
+          </a:ln>
+          <a:effectLst/>
+        </p:spPr>
+        <p:style>
+          <a:lnRef idx="1">
+            <a:schemeClr val="accent1"/>
+          </a:lnRef>
+          <a:fillRef idx="3">
+            <a:schemeClr val="accent1"/>
+          </a:fillRef>
+          <a:effectRef idx="2">
+            <a:schemeClr val="accent1"/>
+          </a:effectRef>
+          <a:fontRef idx="minor">
+            <a:schemeClr val="lt1"/>
+          </a:fontRef>
+        </p:style>
+        <p:txBody>
+          <a:bodyPr rtlCol="0" anchor="ctr" lIns="0" rIns="0" tIns="0" bIns="0"/>
+          <a:lstStyle/>
+          <a:p>
+            <a:pPr algn="ctr"/>
+            <a:r>
+              <a:rPr sz="1300" b="1">
+                <a:solidFill>
+                  <a:srgbClr val="202122"/>
+                </a:solidFill>
+                <a:latin typeface="Calibri"/>
+              </a:rPr>
+              <a:t>e.g.</a:t>
+            </a:r>
+          </a:p>
+        </p:txBody>
+      </p:sp>
+      <p:sp>
+        <p:nvSpPr>
+          <p:cNvPr id="9" name="TextBox 8"/>
+          <p:cNvSpPr txBox="1"/>
+          <p:nvPr/>
+        </p:nvSpPr>
+        <p:spPr>
+          <a:xfrm>
+            <a:off x="8046720" y="2560320"/>
+            <a:ext cx="3291840" cy="365760"/>
+          </a:xfrm>
+          <a:prstGeom prst="rect">
+            <a:avLst/>
+          </a:prstGeom>
+          <a:noFill/>
+        </p:spPr>
+        <p:txBody>
+          <a:bodyPr wrap="square" anchor="t" lIns="0" rIns="0" tIns="0" bIns="0"/>
+          <a:lstStyle/>
+          <a:p>
+            <a:pPr algn="l"/>
+            <a:r>
+              <a:rPr sz="1300" b="1" i="0">
+                <a:solidFill>
+                  <a:srgbClr val="A9C8F0"/>
+                </a:solidFill>
+                <a:latin typeface="Calibri"/>
+              </a:rPr>
+              <a:t>EXAMPLE</a:t>
+            </a:r>
+          </a:p>
+        </p:txBody>
+      </p:sp>
+      <p:sp>
+        <p:nvSpPr>
+          <p:cNvPr id="10" name="TextBox 9"/>
+          <p:cNvSpPr txBox="1"/>
+          <p:nvPr/>
+        </p:nvSpPr>
+        <p:spPr>
+          <a:xfrm>
+            <a:off x="8046720" y="2971800"/>
+            <a:ext cx="3291840" cy="2971800"/>
+          </a:xfrm>
+          <a:prstGeom prst="rect">
+            <a:avLst/>
+          </a:prstGeom>
+          <a:noFill/>
+        </p:spPr>
+        <p:txBody>
+          <a:bodyPr wrap="square" anchor="t" lIns="0" rIns="0" tIns="0" bIns="0"/>
+          <a:lstStyle/>
+          <a:p>
+            <a:pPr algn="l"/>
+            <a:r>
+              <a:rPr sz="1900" b="0" i="0">
+                <a:solidFill>
+                  <a:srgbClr val="FFFFFF"/>
+                </a:solidFill>
+                <a:latin typeface="Cambria"/>
+              </a:rPr>
+              <a:t>After a fresh install, the Wi-Fi doesn't work: the network driver hasn't been installed yet. Installing it from the manufacturer's site fixes it.</a:t>
+            </a:r>
+          </a:p>
+        </p:txBody>
+      </p:sp>
+    </p:spTree>
+  </p:cSld>
+  <p:clrMapOvr>
+    <a:masterClrMapping/>
+  </p:clrMapOvr>
+</p:sld>
+</file>
+
+<file path=ppt/slides/slide11.xml><?xml version="1.0" encoding="utf-8"?>
+<p:sld xmlns:a="http://schemas.openxmlformats.org/drawingml/2006/main" xmlns:p="http://schemas.openxmlformats.org/presentationml/2006/main" xmlns:r="http://schemas.openxmlformats.org/officeDocument/2006/relationships">
+  <p:cSld>
+    <p:bg>
+      <p:bgPr>
+        <a:solidFill>
+          <a:srgbClr val="FFFFFF"/>
+        </a:solidFill>
+        <a:effectLst/>
+      </p:bgPr>
+    </p:bg>
+    <p:spTree>
+      <p:nvGrpSpPr>
+        <p:cNvPr id="1" name=""/>
+        <p:cNvGrpSpPr/>
+        <p:nvPr/>
+      </p:nvGrpSpPr>
+      <p:grpSpPr/>
+      <p:sp>
+        <p:nvSpPr>
+          <p:cNvPr id="2" name="TextBox 1"/>
+          <p:cNvSpPr txBox="1"/>
+          <p:nvPr/>
+        </p:nvSpPr>
+        <p:spPr>
+          <a:xfrm>
+            <a:off x="548640" y="320040"/>
+            <a:ext cx="11094415" cy="274320"/>
+          </a:xfrm>
+          <a:prstGeom prst="rect">
+            <a:avLst/>
+          </a:prstGeom>
+          <a:noFill/>
+        </p:spPr>
+        <p:txBody>
+          <a:bodyPr wrap="square" anchor="t" lIns="0" rIns="0" tIns="0" bIns="0"/>
+          <a:lstStyle/>
+          <a:p>
+            <a:pPr algn="l"/>
+            <a:r>
+              <a:rPr sz="1100" b="1" i="0">
+                <a:solidFill>
+                  <a:srgbClr val="54595D"/>
+                </a:solidFill>
+                <a:latin typeface="Calibri"/>
+              </a:rPr>
+              <a:t>DIGITAL SUPPORT  ·  Digital Support Content Area 2</a:t>
+            </a:r>
+          </a:p>
+        </p:txBody>
+      </p:sp>
+      <p:sp>
+        <p:nvSpPr>
+          <p:cNvPr id="3" name="TextBox 2"/>
+          <p:cNvSpPr txBox="1"/>
+          <p:nvPr/>
+        </p:nvSpPr>
+        <p:spPr>
+          <a:xfrm>
+            <a:off x="548640" y="566928"/>
+            <a:ext cx="11094415" cy="822960"/>
+          </a:xfrm>
+          <a:prstGeom prst="rect">
+            <a:avLst/>
+          </a:prstGeom>
+          <a:noFill/>
+        </p:spPr>
+        <p:txBody>
+          <a:bodyPr wrap="square" anchor="ctr" lIns="0" rIns="0" tIns="0" bIns="0"/>
+          <a:lstStyle/>
+          <a:p>
+            <a:pPr algn="l"/>
+            <a:r>
+              <a:rPr sz="3200" b="1" i="0">
+                <a:solidFill>
+                  <a:srgbClr val="03306E"/>
+                </a:solidFill>
+                <a:latin typeface="Cambria"/>
+              </a:rPr>
+              <a:t>Installing an operating system</a:t>
+            </a:r>
+          </a:p>
+        </p:txBody>
+      </p:sp>
+      <p:sp>
+        <p:nvSpPr>
+          <p:cNvPr id="4" name="TextBox 3"/>
+          <p:cNvSpPr txBox="1"/>
+          <p:nvPr/>
+        </p:nvSpPr>
+        <p:spPr>
+          <a:xfrm>
+            <a:off x="548640" y="6446520"/>
+            <a:ext cx="8229600" cy="274320"/>
+          </a:xfrm>
+          <a:prstGeom prst="rect">
+            <a:avLst/>
+          </a:prstGeom>
+          <a:noFill/>
+        </p:spPr>
+        <p:txBody>
+          <a:bodyPr wrap="square" anchor="t" lIns="0" rIns="0" tIns="0" bIns="0"/>
+          <a:lstStyle/>
+          <a:p>
+            <a:pPr algn="l"/>
+            <a:r>
+              <a:rPr sz="1000" b="0" i="0">
+                <a:solidFill>
+                  <a:srgbClr val="54595D"/>
+                </a:solidFill>
+                <a:latin typeface="Calibri"/>
+              </a:rPr>
+              <a:t>Digital Support and Security T Level  ·  Devices, Operating Systems and Applications</a:t>
+            </a:r>
+          </a:p>
+        </p:txBody>
+      </p:sp>
+      <p:sp>
+        <p:nvSpPr>
+          <p:cNvPr id="5" name="TextBox 4"/>
+          <p:cNvSpPr txBox="1"/>
+          <p:nvPr/>
+        </p:nvSpPr>
+        <p:spPr>
+          <a:xfrm>
+            <a:off x="10728655" y="6446520"/>
+            <a:ext cx="914400" cy="274320"/>
+          </a:xfrm>
+          <a:prstGeom prst="rect">
+            <a:avLst/>
+          </a:prstGeom>
+          <a:noFill/>
+        </p:spPr>
+        <p:txBody>
+          <a:bodyPr wrap="square" anchor="t" lIns="0" rIns="0" tIns="0" bIns="0"/>
+          <a:lstStyle/>
+          <a:p>
+            <a:pPr algn="r"/>
+            <a:r>
+              <a:rPr sz="1000" b="0" i="0">
+                <a:solidFill>
+                  <a:srgbClr val="54595D"/>
+                </a:solidFill>
+                <a:latin typeface="Calibri"/>
+              </a:rPr>
+              <a:t>11</a:t>
+            </a:r>
+          </a:p>
+        </p:txBody>
+      </p:sp>
+      <p:sp>
+        <p:nvSpPr>
+          <p:cNvPr id="6" name="Rectangle 5"/>
+          <p:cNvSpPr/>
+          <p:nvPr/>
+        </p:nvSpPr>
+        <p:spPr>
+          <a:xfrm>
+            <a:off x="1416024" y="2557272"/>
+            <a:ext cx="9359646" cy="36576"/>
+          </a:xfrm>
+          <a:prstGeom prst="rect">
+            <a:avLst/>
+          </a:prstGeom>
+          <a:solidFill>
+            <a:srgbClr val="A9C8F0"/>
+          </a:solidFill>
+          <a:ln>
+            <a:noFill/>
+          </a:ln>
+          <a:effectLst/>
+        </p:spPr>
+        <p:style>
+          <a:lnRef idx="1">
+            <a:schemeClr val="accent1"/>
+          </a:lnRef>
+          <a:fillRef idx="3">
+            <a:schemeClr val="accent1"/>
+          </a:fillRef>
+          <a:effectRef idx="2">
+            <a:schemeClr val="accent1"/>
+          </a:effectRef>
+          <a:fontRef idx="minor">
+            <a:schemeClr val="lt1"/>
+          </a:fontRef>
+        </p:style>
+        <p:txBody>
+          <a:bodyPr rtlCol="0" anchor="ctr"/>
+          <a:lstStyle/>
+          <a:p/>
+        </p:txBody>
+      </p:sp>
+      <p:sp>
+        <p:nvSpPr>
+          <p:cNvPr id="7" name="Oval 6"/>
+          <p:cNvSpPr/>
+          <p:nvPr/>
+        </p:nvSpPr>
+        <p:spPr>
+          <a:xfrm>
+            <a:off x="1095984" y="2255520"/>
+            <a:ext cx="640080" cy="640080"/>
+          </a:xfrm>
+          <a:prstGeom prst="ellipse">
+            <a:avLst/>
+          </a:prstGeom>
+          <a:solidFill>
+            <a:srgbClr val="4EA1FF"/>
+          </a:solidFill>
+          <a:ln>
+            <a:noFill/>
+          </a:ln>
+          <a:effectLst/>
+        </p:spPr>
+        <p:style>
+          <a:lnRef idx="1">
+            <a:schemeClr val="accent1"/>
+          </a:lnRef>
+          <a:fillRef idx="3">
+            <a:schemeClr val="accent1"/>
+          </a:fillRef>
+          <a:effectRef idx="2">
+            <a:schemeClr val="accent1"/>
+          </a:effectRef>
+          <a:fontRef idx="minor">
+            <a:schemeClr val="lt1"/>
+          </a:fontRef>
+        </p:style>
+        <p:txBody>
+          <a:bodyPr rtlCol="0" anchor="ctr" lIns="0" rIns="0" tIns="0" bIns="0"/>
+          <a:lstStyle/>
+          <a:p>
+            <a:pPr algn="ctr"/>
+            <a:r>
+              <a:rPr sz="2000" b="1">
+                <a:solidFill>
+                  <a:srgbClr val="202122"/>
+                </a:solidFill>
+                <a:latin typeface="Calibri"/>
+              </a:rPr>
+              <a:t>1</a:t>
+            </a:r>
+          </a:p>
+        </p:txBody>
+      </p:sp>
+      <p:sp>
+        <p:nvSpPr>
+          <p:cNvPr id="8" name="TextBox 7"/>
+          <p:cNvSpPr txBox="1"/>
+          <p:nvPr/>
+        </p:nvSpPr>
+        <p:spPr>
+          <a:xfrm>
+            <a:off x="548640" y="3032760"/>
+            <a:ext cx="1734769" cy="731520"/>
+          </a:xfrm>
+          <a:prstGeom prst="rect">
+            <a:avLst/>
+          </a:prstGeom>
+          <a:noFill/>
+        </p:spPr>
+        <p:txBody>
+          <a:bodyPr wrap="square" anchor="t" lIns="0" rIns="0" tIns="0" bIns="0"/>
+          <a:lstStyle/>
+          <a:p>
+            <a:pPr algn="ctr"/>
+            <a:r>
+              <a:rPr sz="1700" b="1" i="0">
+                <a:solidFill>
+                  <a:srgbClr val="03306E"/>
+                </a:solidFill>
+                <a:latin typeface="Calibri"/>
+              </a:rPr>
+              <a:t>Boot and partition</a:t>
+            </a:r>
+          </a:p>
+        </p:txBody>
+      </p:sp>
+      <p:sp>
+        <p:nvSpPr>
+          <p:cNvPr id="9" name="Rounded Rectangle 8"/>
+          <p:cNvSpPr/>
+          <p:nvPr/>
+        </p:nvSpPr>
+        <p:spPr>
+          <a:xfrm>
+            <a:off x="548640" y="3810000"/>
+            <a:ext cx="1734769" cy="1706880"/>
+          </a:xfrm>
+          <a:prstGeom prst="roundRect">
+            <a:avLst>
+              <a:gd name="adj" fmla="val 6000"/>
+            </a:avLst>
+          </a:prstGeom>
+          <a:solidFill>
+            <a:srgbClr val="EAF3FF"/>
+          </a:solidFill>
+          <a:ln>
+            <a:noFill/>
+          </a:ln>
+          <a:effectLst/>
+        </p:spPr>
+        <p:style>
+          <a:lnRef idx="1">
+            <a:schemeClr val="accent1"/>
+          </a:lnRef>
+          <a:fillRef idx="3">
+            <a:schemeClr val="accent1"/>
+          </a:fillRef>
+          <a:effectRef idx="2">
+            <a:schemeClr val="accent1"/>
+          </a:effectRef>
+          <a:fontRef idx="minor">
+            <a:schemeClr val="lt1"/>
+          </a:fontRef>
+        </p:style>
+        <p:txBody>
+          <a:bodyPr rtlCol="0" anchor="ctr"/>
+          <a:lstStyle/>
+          <a:p/>
+        </p:txBody>
+      </p:sp>
+      <p:sp>
+        <p:nvSpPr>
+          <p:cNvPr id="10" name="TextBox 9"/>
+          <p:cNvSpPr txBox="1"/>
+          <p:nvPr/>
+        </p:nvSpPr>
+        <p:spPr>
+          <a:xfrm>
+            <a:off x="685800" y="3947160"/>
+            <a:ext cx="1460449" cy="1432560"/>
+          </a:xfrm>
+          <a:prstGeom prst="rect">
+            <a:avLst/>
+          </a:prstGeom>
+          <a:noFill/>
+        </p:spPr>
+        <p:txBody>
+          <a:bodyPr wrap="square" anchor="t" lIns="0" rIns="0" tIns="0" bIns="0"/>
+          <a:lstStyle/>
+          <a:p>
+            <a:pPr algn="l"/>
+            <a:r>
+              <a:rPr sz="1700" b="0" i="0">
+                <a:solidFill>
+                  <a:srgbClr val="202122"/>
+                </a:solidFill>
+                <a:latin typeface="Calibri"/>
+              </a:rPr>
+              <a:t>Choose the boot drive; partition and format.</a:t>
+            </a:r>
+          </a:p>
+        </p:txBody>
+      </p:sp>
+      <p:sp>
+        <p:nvSpPr>
+          <p:cNvPr id="11" name="Oval 10"/>
+          <p:cNvSpPr/>
+          <p:nvPr/>
+        </p:nvSpPr>
+        <p:spPr>
+          <a:xfrm>
+            <a:off x="2967913" y="2255520"/>
+            <a:ext cx="640080" cy="640080"/>
+          </a:xfrm>
+          <a:prstGeom prst="ellipse">
+            <a:avLst/>
+          </a:prstGeom>
+          <a:solidFill>
+            <a:srgbClr val="4EA1FF"/>
+          </a:solidFill>
+          <a:ln>
+            <a:noFill/>
+          </a:ln>
+          <a:effectLst/>
+        </p:spPr>
+        <p:style>
+          <a:lnRef idx="1">
+            <a:schemeClr val="accent1"/>
+          </a:lnRef>
+          <a:fillRef idx="3">
+            <a:schemeClr val="accent1"/>
+          </a:fillRef>
+          <a:effectRef idx="2">
+            <a:schemeClr val="accent1"/>
+          </a:effectRef>
+          <a:fontRef idx="minor">
+            <a:schemeClr val="lt1"/>
+          </a:fontRef>
+        </p:style>
+        <p:txBody>
+          <a:bodyPr rtlCol="0" anchor="ctr" lIns="0" rIns="0" tIns="0" bIns="0"/>
+          <a:lstStyle/>
+          <a:p>
+            <a:pPr algn="ctr"/>
+            <a:r>
+              <a:rPr sz="2000" b="1">
+                <a:solidFill>
+                  <a:srgbClr val="202122"/>
+                </a:solidFill>
+                <a:latin typeface="Calibri"/>
+              </a:rPr>
+              <a:t>2</a:t>
+            </a:r>
+          </a:p>
+        </p:txBody>
+      </p:sp>
+      <p:sp>
+        <p:nvSpPr>
+          <p:cNvPr id="12" name="TextBox 11"/>
+          <p:cNvSpPr txBox="1"/>
+          <p:nvPr/>
+        </p:nvSpPr>
+        <p:spPr>
+          <a:xfrm>
+            <a:off x="2420569" y="3032760"/>
+            <a:ext cx="1734769" cy="731520"/>
+          </a:xfrm>
+          <a:prstGeom prst="rect">
+            <a:avLst/>
+          </a:prstGeom>
+          <a:noFill/>
+        </p:spPr>
+        <p:txBody>
+          <a:bodyPr wrap="square" anchor="t" lIns="0" rIns="0" tIns="0" bIns="0"/>
+          <a:lstStyle/>
+          <a:p>
+            <a:pPr algn="ctr"/>
+            <a:r>
+              <a:rPr sz="1700" b="1" i="0">
+                <a:solidFill>
+                  <a:srgbClr val="03306E"/>
+                </a:solidFill>
+                <a:latin typeface="Calibri"/>
+              </a:rPr>
+              <a:t>Domain</a:t>
+            </a:r>
+          </a:p>
+        </p:txBody>
+      </p:sp>
+      <p:sp>
+        <p:nvSpPr>
+          <p:cNvPr id="13" name="Rounded Rectangle 12"/>
+          <p:cNvSpPr/>
+          <p:nvPr/>
+        </p:nvSpPr>
+        <p:spPr>
+          <a:xfrm>
+            <a:off x="2420569" y="3810000"/>
+            <a:ext cx="1734769" cy="1706880"/>
+          </a:xfrm>
+          <a:prstGeom prst="roundRect">
+            <a:avLst>
+              <a:gd name="adj" fmla="val 6000"/>
+            </a:avLst>
+          </a:prstGeom>
+          <a:solidFill>
+            <a:srgbClr val="EAF3FF"/>
+          </a:solidFill>
+          <a:ln>
+            <a:noFill/>
+          </a:ln>
+          <a:effectLst/>
+        </p:spPr>
+        <p:style>
+          <a:lnRef idx="1">
+            <a:schemeClr val="accent1"/>
+          </a:lnRef>
+          <a:fillRef idx="3">
+            <a:schemeClr val="accent1"/>
+          </a:fillRef>
+          <a:effectRef idx="2">
+            <a:schemeClr val="accent1"/>
+          </a:effectRef>
+          <a:fontRef idx="minor">
+            <a:schemeClr val="lt1"/>
+          </a:fontRef>
+        </p:style>
+        <p:txBody>
+          <a:bodyPr rtlCol="0" anchor="ctr"/>
+          <a:lstStyle/>
+          <a:p/>
+        </p:txBody>
+      </p:sp>
+      <p:sp>
+        <p:nvSpPr>
+          <p:cNvPr id="14" name="TextBox 13"/>
+          <p:cNvSpPr txBox="1"/>
+          <p:nvPr/>
+        </p:nvSpPr>
+        <p:spPr>
+          <a:xfrm>
+            <a:off x="2557729" y="3947160"/>
+            <a:ext cx="1460449" cy="1432560"/>
+          </a:xfrm>
+          <a:prstGeom prst="rect">
+            <a:avLst/>
+          </a:prstGeom>
+          <a:noFill/>
+        </p:spPr>
+        <p:txBody>
+          <a:bodyPr wrap="square" anchor="t" lIns="0" rIns="0" tIns="0" bIns="0"/>
+          <a:lstStyle/>
+          <a:p>
+            <a:pPr algn="l"/>
+            <a:r>
+              <a:rPr sz="1700" b="0" i="0">
+                <a:solidFill>
+                  <a:srgbClr val="202122"/>
+                </a:solidFill>
+                <a:latin typeface="Calibri"/>
+              </a:rPr>
+              <a:t>Join the domain.</a:t>
+            </a:r>
+          </a:p>
+        </p:txBody>
+      </p:sp>
+      <p:sp>
+        <p:nvSpPr>
+          <p:cNvPr id="15" name="Oval 14"/>
+          <p:cNvSpPr/>
+          <p:nvPr/>
+        </p:nvSpPr>
+        <p:spPr>
+          <a:xfrm>
+            <a:off x="4839843" y="2255520"/>
+            <a:ext cx="640080" cy="640080"/>
+          </a:xfrm>
+          <a:prstGeom prst="ellipse">
+            <a:avLst/>
+          </a:prstGeom>
+          <a:solidFill>
+            <a:srgbClr val="4EA1FF"/>
+          </a:solidFill>
+          <a:ln>
+            <a:noFill/>
+          </a:ln>
+          <a:effectLst/>
+        </p:spPr>
+        <p:style>
+          <a:lnRef idx="1">
+            <a:schemeClr val="accent1"/>
+          </a:lnRef>
+          <a:fillRef idx="3">
+            <a:schemeClr val="accent1"/>
+          </a:fillRef>
+          <a:effectRef idx="2">
+            <a:schemeClr val="accent1"/>
+          </a:effectRef>
+          <a:fontRef idx="minor">
+            <a:schemeClr val="lt1"/>
+          </a:fontRef>
+        </p:style>
+        <p:txBody>
+          <a:bodyPr rtlCol="0" anchor="ctr" lIns="0" rIns="0" tIns="0" bIns="0"/>
+          <a:lstStyle/>
+          <a:p>
+            <a:pPr algn="ctr"/>
+            <a:r>
+              <a:rPr sz="2000" b="1">
+                <a:solidFill>
+                  <a:srgbClr val="202122"/>
+                </a:solidFill>
+                <a:latin typeface="Calibri"/>
+              </a:rPr>
+              <a:t>3</a:t>
+            </a:r>
+          </a:p>
+        </p:txBody>
+      </p:sp>
+      <p:sp>
+        <p:nvSpPr>
+          <p:cNvPr id="16" name="TextBox 15"/>
+          <p:cNvSpPr txBox="1"/>
+          <p:nvPr/>
+        </p:nvSpPr>
+        <p:spPr>
+          <a:xfrm>
+            <a:off x="4292498" y="3032760"/>
+            <a:ext cx="1734769" cy="731520"/>
+          </a:xfrm>
+          <a:prstGeom prst="rect">
+            <a:avLst/>
+          </a:prstGeom>
+          <a:noFill/>
+        </p:spPr>
+        <p:txBody>
+          <a:bodyPr wrap="square" anchor="t" lIns="0" rIns="0" tIns="0" bIns="0"/>
+          <a:lstStyle/>
+          <a:p>
+            <a:pPr algn="ctr"/>
+            <a:r>
+              <a:rPr sz="1700" b="1" i="0">
+                <a:solidFill>
+                  <a:srgbClr val="03306E"/>
+                </a:solidFill>
+                <a:latin typeface="Calibri"/>
+              </a:rPr>
+              <a:t>Region</a:t>
+            </a:r>
+          </a:p>
+        </p:txBody>
+      </p:sp>
+      <p:sp>
+        <p:nvSpPr>
+          <p:cNvPr id="17" name="Rounded Rectangle 16"/>
+          <p:cNvSpPr/>
+          <p:nvPr/>
+        </p:nvSpPr>
+        <p:spPr>
+          <a:xfrm>
+            <a:off x="4292498" y="3810000"/>
+            <a:ext cx="1734769" cy="1706880"/>
+          </a:xfrm>
+          <a:prstGeom prst="roundRect">
+            <a:avLst>
+              <a:gd name="adj" fmla="val 6000"/>
+            </a:avLst>
+          </a:prstGeom>
+          <a:solidFill>
+            <a:srgbClr val="EAF3FF"/>
+          </a:solidFill>
+          <a:ln>
+            <a:noFill/>
+          </a:ln>
+          <a:effectLst/>
+        </p:spPr>
+        <p:style>
+          <a:lnRef idx="1">
+            <a:schemeClr val="accent1"/>
+          </a:lnRef>
+          <a:fillRef idx="3">
+            <a:schemeClr val="accent1"/>
+          </a:fillRef>
+          <a:effectRef idx="2">
+            <a:schemeClr val="accent1"/>
+          </a:effectRef>
+          <a:fontRef idx="minor">
+            <a:schemeClr val="lt1"/>
+          </a:fontRef>
+        </p:style>
+        <p:txBody>
+          <a:bodyPr rtlCol="0" anchor="ctr"/>
+          <a:lstStyle/>
+          <a:p/>
+        </p:txBody>
+      </p:sp>
+      <p:sp>
+        <p:nvSpPr>
+          <p:cNvPr id="18" name="TextBox 17"/>
+          <p:cNvSpPr txBox="1"/>
+          <p:nvPr/>
+        </p:nvSpPr>
+        <p:spPr>
+          <a:xfrm>
+            <a:off x="4429658" y="3947160"/>
+            <a:ext cx="1460449" cy="1432560"/>
+          </a:xfrm>
+          <a:prstGeom prst="rect">
+            <a:avLst/>
+          </a:prstGeom>
+          <a:noFill/>
+        </p:spPr>
+        <p:txBody>
+          <a:bodyPr wrap="square" anchor="t" lIns="0" rIns="0" tIns="0" bIns="0"/>
+          <a:lstStyle/>
+          <a:p>
+            <a:pPr algn="l"/>
+            <a:r>
+              <a:rPr sz="1700" b="0" i="0">
+                <a:solidFill>
+                  <a:srgbClr val="202122"/>
+                </a:solidFill>
+                <a:latin typeface="Calibri"/>
+              </a:rPr>
+              <a:t>Set time, date, region and language.</a:t>
+            </a:r>
+          </a:p>
+        </p:txBody>
+      </p:sp>
+      <p:sp>
+        <p:nvSpPr>
+          <p:cNvPr id="19" name="Oval 18"/>
+          <p:cNvSpPr/>
+          <p:nvPr/>
+        </p:nvSpPr>
+        <p:spPr>
+          <a:xfrm>
+            <a:off x="6711772" y="2255520"/>
+            <a:ext cx="640080" cy="640080"/>
+          </a:xfrm>
+          <a:prstGeom prst="ellipse">
+            <a:avLst/>
+          </a:prstGeom>
+          <a:solidFill>
+            <a:srgbClr val="4EA1FF"/>
+          </a:solidFill>
+          <a:ln>
+            <a:noFill/>
+          </a:ln>
+          <a:effectLst/>
+        </p:spPr>
+        <p:style>
+          <a:lnRef idx="1">
+            <a:schemeClr val="accent1"/>
+          </a:lnRef>
+          <a:fillRef idx="3">
+            <a:schemeClr val="accent1"/>
+          </a:fillRef>
+          <a:effectRef idx="2">
+            <a:schemeClr val="accent1"/>
+          </a:effectRef>
+          <a:fontRef idx="minor">
+            <a:schemeClr val="lt1"/>
+          </a:fontRef>
+        </p:style>
+        <p:txBody>
+          <a:bodyPr rtlCol="0" anchor="ctr" lIns="0" rIns="0" tIns="0" bIns="0"/>
+          <a:lstStyle/>
+          <a:p>
+            <a:pPr algn="ctr"/>
+            <a:r>
+              <a:rPr sz="2000" b="1">
+                <a:solidFill>
+                  <a:srgbClr val="202122"/>
+                </a:solidFill>
+                <a:latin typeface="Calibri"/>
+              </a:rPr>
+              <a:t>4</a:t>
+            </a:r>
+          </a:p>
+        </p:txBody>
+      </p:sp>
+      <p:sp>
+        <p:nvSpPr>
+          <p:cNvPr id="20" name="TextBox 19"/>
+          <p:cNvSpPr txBox="1"/>
+          <p:nvPr/>
+        </p:nvSpPr>
+        <p:spPr>
+          <a:xfrm>
+            <a:off x="6164427" y="3032760"/>
+            <a:ext cx="1734769" cy="731520"/>
+          </a:xfrm>
+          <a:prstGeom prst="rect">
+            <a:avLst/>
+          </a:prstGeom>
+          <a:noFill/>
+        </p:spPr>
+        <p:txBody>
+          <a:bodyPr wrap="square" anchor="t" lIns="0" rIns="0" tIns="0" bIns="0"/>
+          <a:lstStyle/>
+          <a:p>
+            <a:pPr algn="ctr"/>
+            <a:r>
+              <a:rPr sz="1700" b="1" i="0">
+                <a:solidFill>
+                  <a:srgbClr val="03306E"/>
+                </a:solidFill>
+                <a:latin typeface="Calibri"/>
+              </a:rPr>
+              <a:t>Drivers</a:t>
+            </a:r>
+          </a:p>
+        </p:txBody>
+      </p:sp>
+      <p:sp>
+        <p:nvSpPr>
+          <p:cNvPr id="21" name="Rounded Rectangle 20"/>
+          <p:cNvSpPr/>
+          <p:nvPr/>
+        </p:nvSpPr>
+        <p:spPr>
+          <a:xfrm>
+            <a:off x="6164427" y="3810000"/>
+            <a:ext cx="1734769" cy="1706880"/>
+          </a:xfrm>
+          <a:prstGeom prst="roundRect">
+            <a:avLst>
+              <a:gd name="adj" fmla="val 6000"/>
+            </a:avLst>
+          </a:prstGeom>
+          <a:solidFill>
+            <a:srgbClr val="EAF3FF"/>
+          </a:solidFill>
+          <a:ln>
+            <a:noFill/>
+          </a:ln>
+          <a:effectLst/>
+        </p:spPr>
+        <p:style>
+          <a:lnRef idx="1">
+            <a:schemeClr val="accent1"/>
+          </a:lnRef>
+          <a:fillRef idx="3">
+            <a:schemeClr val="accent1"/>
+          </a:fillRef>
+          <a:effectRef idx="2">
+            <a:schemeClr val="accent1"/>
+          </a:effectRef>
+          <a:fontRef idx="minor">
+            <a:schemeClr val="lt1"/>
+          </a:fontRef>
+        </p:style>
+        <p:txBody>
+          <a:bodyPr rtlCol="0" anchor="ctr"/>
+          <a:lstStyle/>
+          <a:p/>
+        </p:txBody>
+      </p:sp>
+      <p:sp>
+        <p:nvSpPr>
+          <p:cNvPr id="22" name="TextBox 21"/>
+          <p:cNvSpPr txBox="1"/>
+          <p:nvPr/>
+        </p:nvSpPr>
+        <p:spPr>
+          <a:xfrm>
+            <a:off x="6301587" y="3947160"/>
+            <a:ext cx="1460449" cy="1432560"/>
+          </a:xfrm>
+          <a:prstGeom prst="rect">
+            <a:avLst/>
+          </a:prstGeom>
+          <a:noFill/>
+        </p:spPr>
+        <p:txBody>
+          <a:bodyPr wrap="square" anchor="t" lIns="0" rIns="0" tIns="0" bIns="0"/>
+          <a:lstStyle/>
+          <a:p>
+            <a:pPr algn="l"/>
+            <a:r>
+              <a:rPr sz="1700" b="0" i="0">
+                <a:solidFill>
+                  <a:srgbClr val="202122"/>
+                </a:solidFill>
+                <a:latin typeface="Calibri"/>
+              </a:rPr>
+              <a:t>Install drivers.</a:t>
+            </a:r>
+          </a:p>
+        </p:txBody>
+      </p:sp>
+      <p:sp>
+        <p:nvSpPr>
+          <p:cNvPr id="23" name="Oval 22"/>
+          <p:cNvSpPr/>
+          <p:nvPr/>
+        </p:nvSpPr>
+        <p:spPr>
+          <a:xfrm>
+            <a:off x="8583701" y="2255520"/>
+            <a:ext cx="640080" cy="640080"/>
+          </a:xfrm>
+          <a:prstGeom prst="ellipse">
+            <a:avLst/>
+          </a:prstGeom>
+          <a:solidFill>
+            <a:srgbClr val="4EA1FF"/>
+          </a:solidFill>
+          <a:ln>
+            <a:noFill/>
+          </a:ln>
+          <a:effectLst/>
+        </p:spPr>
+        <p:style>
+          <a:lnRef idx="1">
+            <a:schemeClr val="accent1"/>
+          </a:lnRef>
+          <a:fillRef idx="3">
+            <a:schemeClr val="accent1"/>
+          </a:fillRef>
+          <a:effectRef idx="2">
+            <a:schemeClr val="accent1"/>
+          </a:effectRef>
+          <a:fontRef idx="minor">
+            <a:schemeClr val="lt1"/>
+          </a:fontRef>
+        </p:style>
+        <p:txBody>
+          <a:bodyPr rtlCol="0" anchor="ctr" lIns="0" rIns="0" tIns="0" bIns="0"/>
+          <a:lstStyle/>
+          <a:p>
+            <a:pPr algn="ctr"/>
+            <a:r>
+              <a:rPr sz="2000" b="1">
+                <a:solidFill>
+                  <a:srgbClr val="202122"/>
+                </a:solidFill>
+                <a:latin typeface="Calibri"/>
+              </a:rPr>
+              <a:t>5</a:t>
+            </a:r>
+          </a:p>
+        </p:txBody>
+      </p:sp>
+      <p:sp>
+        <p:nvSpPr>
+          <p:cNvPr id="24" name="TextBox 23"/>
+          <p:cNvSpPr txBox="1"/>
+          <p:nvPr/>
+        </p:nvSpPr>
+        <p:spPr>
+          <a:xfrm>
+            <a:off x="8036356" y="3032760"/>
+            <a:ext cx="1734769" cy="731520"/>
+          </a:xfrm>
+          <a:prstGeom prst="rect">
+            <a:avLst/>
+          </a:prstGeom>
+          <a:noFill/>
+        </p:spPr>
+        <p:txBody>
+          <a:bodyPr wrap="square" anchor="t" lIns="0" rIns="0" tIns="0" bIns="0"/>
+          <a:lstStyle/>
+          <a:p>
+            <a:pPr algn="ctr"/>
+            <a:r>
+              <a:rPr sz="1700" b="1" i="0">
+                <a:solidFill>
+                  <a:srgbClr val="03306E"/>
+                </a:solidFill>
+                <a:latin typeface="Calibri"/>
+              </a:rPr>
+              <a:t>Update</a:t>
+            </a:r>
+          </a:p>
+        </p:txBody>
+      </p:sp>
+      <p:sp>
+        <p:nvSpPr>
+          <p:cNvPr id="25" name="Rounded Rectangle 24"/>
+          <p:cNvSpPr/>
+          <p:nvPr/>
+        </p:nvSpPr>
+        <p:spPr>
+          <a:xfrm>
+            <a:off x="8036356" y="3810000"/>
+            <a:ext cx="1734769" cy="1706880"/>
+          </a:xfrm>
+          <a:prstGeom prst="roundRect">
+            <a:avLst>
+              <a:gd name="adj" fmla="val 6000"/>
+            </a:avLst>
+          </a:prstGeom>
+          <a:solidFill>
+            <a:srgbClr val="EAF3FF"/>
+          </a:solidFill>
+          <a:ln>
+            <a:noFill/>
+          </a:ln>
+          <a:effectLst/>
+        </p:spPr>
+        <p:style>
+          <a:lnRef idx="1">
+            <a:schemeClr val="accent1"/>
+          </a:lnRef>
+          <a:fillRef idx="3">
+            <a:schemeClr val="accent1"/>
+          </a:fillRef>
+          <a:effectRef idx="2">
+            <a:schemeClr val="accent1"/>
+          </a:effectRef>
+          <a:fontRef idx="minor">
+            <a:schemeClr val="lt1"/>
+          </a:fontRef>
+        </p:style>
+        <p:txBody>
+          <a:bodyPr rtlCol="0" anchor="ctr"/>
+          <a:lstStyle/>
+          <a:p/>
+        </p:txBody>
+      </p:sp>
+      <p:sp>
+        <p:nvSpPr>
+          <p:cNvPr id="26" name="TextBox 25"/>
+          <p:cNvSpPr txBox="1"/>
+          <p:nvPr/>
+        </p:nvSpPr>
+        <p:spPr>
+          <a:xfrm>
+            <a:off x="8173516" y="3947160"/>
+            <a:ext cx="1460449" cy="1432560"/>
+          </a:xfrm>
+          <a:prstGeom prst="rect">
+            <a:avLst/>
+          </a:prstGeom>
+          <a:noFill/>
+        </p:spPr>
+        <p:txBody>
+          <a:bodyPr wrap="square" anchor="t" lIns="0" rIns="0" tIns="0" bIns="0"/>
+          <a:lstStyle/>
+          <a:p>
+            <a:pPr algn="l"/>
+            <a:r>
+              <a:rPr sz="1700" b="0" i="0">
+                <a:solidFill>
+                  <a:srgbClr val="202122"/>
+                </a:solidFill>
+                <a:latin typeface="Calibri"/>
+              </a:rPr>
+              <a:t>Apply updates, including over the network.</a:t>
+            </a:r>
+          </a:p>
+        </p:txBody>
+      </p:sp>
+      <p:sp>
+        <p:nvSpPr>
+          <p:cNvPr id="27" name="Oval 26"/>
+          <p:cNvSpPr/>
+          <p:nvPr/>
+        </p:nvSpPr>
+        <p:spPr>
+          <a:xfrm>
+            <a:off x="10455630" y="2255520"/>
+            <a:ext cx="640080" cy="640080"/>
+          </a:xfrm>
+          <a:prstGeom prst="ellipse">
+            <a:avLst/>
+          </a:prstGeom>
+          <a:solidFill>
+            <a:srgbClr val="4EA1FF"/>
+          </a:solidFill>
+          <a:ln>
+            <a:noFill/>
+          </a:ln>
+          <a:effectLst/>
+        </p:spPr>
+        <p:style>
+          <a:lnRef idx="1">
+            <a:schemeClr val="accent1"/>
+          </a:lnRef>
+          <a:fillRef idx="3">
+            <a:schemeClr val="accent1"/>
+          </a:fillRef>
+          <a:effectRef idx="2">
+            <a:schemeClr val="accent1"/>
+          </a:effectRef>
+          <a:fontRef idx="minor">
+            <a:schemeClr val="lt1"/>
+          </a:fontRef>
+        </p:style>
+        <p:txBody>
+          <a:bodyPr rtlCol="0" anchor="ctr" lIns="0" rIns="0" tIns="0" bIns="0"/>
+          <a:lstStyle/>
+          <a:p>
+            <a:pPr algn="ctr"/>
+            <a:r>
+              <a:rPr sz="2000" b="1">
+                <a:solidFill>
+                  <a:srgbClr val="202122"/>
+                </a:solidFill>
+                <a:latin typeface="Calibri"/>
+              </a:rPr>
+              <a:t>6</a:t>
+            </a:r>
+          </a:p>
+        </p:txBody>
+      </p:sp>
+      <p:sp>
+        <p:nvSpPr>
+          <p:cNvPr id="28" name="TextBox 27"/>
+          <p:cNvSpPr txBox="1"/>
+          <p:nvPr/>
+        </p:nvSpPr>
+        <p:spPr>
+          <a:xfrm>
+            <a:off x="9908286" y="3032760"/>
+            <a:ext cx="1734769" cy="731520"/>
+          </a:xfrm>
+          <a:prstGeom prst="rect">
+            <a:avLst/>
+          </a:prstGeom>
+          <a:noFill/>
+        </p:spPr>
+        <p:txBody>
+          <a:bodyPr wrap="square" anchor="t" lIns="0" rIns="0" tIns="0" bIns="0"/>
+          <a:lstStyle/>
+          <a:p>
+            <a:pPr algn="ctr"/>
+            <a:r>
+              <a:rPr sz="1700" b="1" i="0">
+                <a:solidFill>
+                  <a:srgbClr val="03306E"/>
+                </a:solidFill>
+                <a:latin typeface="Calibri"/>
+              </a:rPr>
+              <a:t>Apps</a:t>
+            </a:r>
+          </a:p>
+        </p:txBody>
+      </p:sp>
+      <p:sp>
+        <p:nvSpPr>
+          <p:cNvPr id="29" name="Rounded Rectangle 28"/>
+          <p:cNvSpPr/>
+          <p:nvPr/>
+        </p:nvSpPr>
+        <p:spPr>
+          <a:xfrm>
+            <a:off x="9908286" y="3810000"/>
+            <a:ext cx="1734769" cy="1706880"/>
+          </a:xfrm>
+          <a:prstGeom prst="roundRect">
+            <a:avLst>
+              <a:gd name="adj" fmla="val 6000"/>
+            </a:avLst>
+          </a:prstGeom>
+          <a:solidFill>
+            <a:srgbClr val="EAF3FF"/>
+          </a:solidFill>
+          <a:ln>
+            <a:noFill/>
+          </a:ln>
+          <a:effectLst/>
+        </p:spPr>
+        <p:style>
+          <a:lnRef idx="1">
+            <a:schemeClr val="accent1"/>
+          </a:lnRef>
+          <a:fillRef idx="3">
+            <a:schemeClr val="accent1"/>
+          </a:fillRef>
+          <a:effectRef idx="2">
+            <a:schemeClr val="accent1"/>
+          </a:effectRef>
+          <a:fontRef idx="minor">
+            <a:schemeClr val="lt1"/>
+          </a:fontRef>
+        </p:style>
+        <p:txBody>
+          <a:bodyPr rtlCol="0" anchor="ctr"/>
+          <a:lstStyle/>
+          <a:p/>
+        </p:txBody>
+      </p:sp>
+      <p:sp>
+        <p:nvSpPr>
+          <p:cNvPr id="30" name="TextBox 29"/>
+          <p:cNvSpPr txBox="1"/>
+          <p:nvPr/>
+        </p:nvSpPr>
+        <p:spPr>
+          <a:xfrm>
+            <a:off x="10045446" y="3947160"/>
+            <a:ext cx="1460449" cy="1432560"/>
+          </a:xfrm>
+          <a:prstGeom prst="rect">
+            <a:avLst/>
+          </a:prstGeom>
+          <a:noFill/>
+        </p:spPr>
+        <p:txBody>
+          <a:bodyPr wrap="square" anchor="t" lIns="0" rIns="0" tIns="0" bIns="0"/>
+          <a:lstStyle/>
+          <a:p>
+            <a:pPr algn="l"/>
+            <a:r>
+              <a:rPr sz="1700" b="0" i="0">
+                <a:solidFill>
+                  <a:srgbClr val="202122"/>
+                </a:solidFill>
+                <a:latin typeface="Calibri"/>
+              </a:rPr>
+              <a:t>Install productivity software; migrate user data if upgrading.</a:t>
+            </a:r>
+          </a:p>
+        </p:txBody>
+      </p:sp>
+    </p:spTree>
+  </p:cSld>
+  <p:clrMapOvr>
+    <a:masterClrMapping/>
+  </p:clrMapOvr>
+</p:sld>
+</file>
+
+<file path=ppt/slides/slide12.xml><?xml version="1.0" encoding="utf-8"?>
+<p:sld xmlns:a="http://schemas.openxmlformats.org/drawingml/2006/main" xmlns:p="http://schemas.openxmlformats.org/presentationml/2006/main" xmlns:r="http://schemas.openxmlformats.org/officeDocument/2006/relationships">
+  <p:cSld>
+    <p:bg>
+      <p:bgPr>
+        <a:solidFill>
+          <a:srgbClr val="FFFFFF"/>
+        </a:solidFill>
+        <a:effectLst/>
+      </p:bgPr>
+    </p:bg>
+    <p:spTree>
+      <p:nvGrpSpPr>
+        <p:cNvPr id="1" name=""/>
+        <p:cNvGrpSpPr/>
+        <p:nvPr/>
+      </p:nvGrpSpPr>
+      <p:grpSpPr/>
+      <p:sp>
+        <p:nvSpPr>
+          <p:cNvPr id="2" name="TextBox 1"/>
+          <p:cNvSpPr txBox="1"/>
+          <p:nvPr/>
+        </p:nvSpPr>
+        <p:spPr>
+          <a:xfrm>
+            <a:off x="548640" y="320040"/>
+            <a:ext cx="11094415" cy="274320"/>
+          </a:xfrm>
+          <a:prstGeom prst="rect">
+            <a:avLst/>
+          </a:prstGeom>
+          <a:noFill/>
+        </p:spPr>
+        <p:txBody>
+          <a:bodyPr wrap="square" anchor="t" lIns="0" rIns="0" tIns="0" bIns="0"/>
+          <a:lstStyle/>
+          <a:p>
+            <a:pPr algn="l"/>
+            <a:r>
+              <a:rPr sz="1100" b="1" i="0">
+                <a:solidFill>
+                  <a:srgbClr val="54595D"/>
+                </a:solidFill>
+                <a:latin typeface="Calibri"/>
+              </a:rPr>
+              <a:t>DIGITAL SUPPORT  ·  Digital Support Content Area 2</a:t>
+            </a:r>
+          </a:p>
+        </p:txBody>
+      </p:sp>
+      <p:sp>
+        <p:nvSpPr>
+          <p:cNvPr id="3" name="TextBox 2"/>
+          <p:cNvSpPr txBox="1"/>
+          <p:nvPr/>
+        </p:nvSpPr>
+        <p:spPr>
+          <a:xfrm>
+            <a:off x="548640" y="566928"/>
+            <a:ext cx="11094415" cy="822960"/>
+          </a:xfrm>
+          <a:prstGeom prst="rect">
+            <a:avLst/>
+          </a:prstGeom>
+          <a:noFill/>
+        </p:spPr>
+        <p:txBody>
+          <a:bodyPr wrap="square" anchor="ctr" lIns="0" rIns="0" tIns="0" bIns="0"/>
+          <a:lstStyle/>
+          <a:p>
+            <a:pPr algn="l"/>
+            <a:r>
+              <a:rPr sz="3200" b="1" i="0">
+                <a:solidFill>
+                  <a:srgbClr val="03306E"/>
+                </a:solidFill>
+                <a:latin typeface="Cambria"/>
+              </a:rPr>
+              <a:t>Quick check: Installing an operating system</a:t>
+            </a:r>
+          </a:p>
+        </p:txBody>
+      </p:sp>
+      <p:sp>
+        <p:nvSpPr>
+          <p:cNvPr id="4" name="TextBox 3"/>
+          <p:cNvSpPr txBox="1"/>
+          <p:nvPr/>
+        </p:nvSpPr>
+        <p:spPr>
+          <a:xfrm>
+            <a:off x="548640" y="6446520"/>
+            <a:ext cx="8229600" cy="274320"/>
+          </a:xfrm>
+          <a:prstGeom prst="rect">
+            <a:avLst/>
+          </a:prstGeom>
+          <a:noFill/>
+        </p:spPr>
+        <p:txBody>
+          <a:bodyPr wrap="square" anchor="t" lIns="0" rIns="0" tIns="0" bIns="0"/>
+          <a:lstStyle/>
+          <a:p>
+            <a:pPr algn="l"/>
+            <a:r>
+              <a:rPr sz="1000" b="0" i="0">
+                <a:solidFill>
+                  <a:srgbClr val="54595D"/>
+                </a:solidFill>
+                <a:latin typeface="Calibri"/>
+              </a:rPr>
+              <a:t>Digital Support and Security T Level  ·  Devices, Operating Systems and Applications</a:t>
+            </a:r>
+          </a:p>
+        </p:txBody>
+      </p:sp>
+      <p:sp>
+        <p:nvSpPr>
+          <p:cNvPr id="5" name="TextBox 4"/>
+          <p:cNvSpPr txBox="1"/>
+          <p:nvPr/>
+        </p:nvSpPr>
+        <p:spPr>
+          <a:xfrm>
+            <a:off x="10728655" y="6446520"/>
+            <a:ext cx="914400" cy="274320"/>
+          </a:xfrm>
+          <a:prstGeom prst="rect">
+            <a:avLst/>
+          </a:prstGeom>
+          <a:noFill/>
+        </p:spPr>
+        <p:txBody>
+          <a:bodyPr wrap="square" anchor="t" lIns="0" rIns="0" tIns="0" bIns="0"/>
+          <a:lstStyle/>
+          <a:p>
+            <a:pPr algn="r"/>
+            <a:r>
+              <a:rPr sz="1000" b="0" i="0">
+                <a:solidFill>
+                  <a:srgbClr val="54595D"/>
+                </a:solidFill>
+                <a:latin typeface="Calibri"/>
+              </a:rPr>
+              <a:t>12</a:t>
+            </a:r>
+          </a:p>
+        </p:txBody>
+      </p:sp>
+      <p:sp>
+        <p:nvSpPr>
+          <p:cNvPr id="6" name="Oval 5"/>
+          <p:cNvSpPr/>
+          <p:nvPr/>
+        </p:nvSpPr>
+        <p:spPr>
+          <a:xfrm>
+            <a:off x="548640" y="1691640"/>
+            <a:ext cx="502920" cy="502920"/>
+          </a:xfrm>
+          <a:prstGeom prst="ellipse">
+            <a:avLst/>
+          </a:prstGeom>
+          <a:solidFill>
+            <a:srgbClr val="4EA1FF"/>
+          </a:solidFill>
+          <a:ln>
+            <a:noFill/>
+          </a:ln>
+          <a:effectLst/>
+        </p:spPr>
+        <p:style>
+          <a:lnRef idx="1">
+            <a:schemeClr val="accent1"/>
+          </a:lnRef>
+          <a:fillRef idx="3">
+            <a:schemeClr val="accent1"/>
+          </a:fillRef>
+          <a:effectRef idx="2">
+            <a:schemeClr val="accent1"/>
+          </a:effectRef>
+          <a:fontRef idx="minor">
+            <a:schemeClr val="lt1"/>
+          </a:fontRef>
+        </p:style>
+        <p:txBody>
+          <a:bodyPr rtlCol="0" anchor="ctr" lIns="0" rIns="0" tIns="0" bIns="0"/>
+          <a:lstStyle/>
+          <a:p>
+            <a:pPr algn="ctr"/>
+            <a:r>
+              <a:rPr sz="1600" b="1">
+                <a:solidFill>
+                  <a:srgbClr val="202122"/>
+                </a:solidFill>
+                <a:latin typeface="Calibri"/>
+              </a:rPr>
+              <a:t>1</a:t>
+            </a:r>
+          </a:p>
+        </p:txBody>
+      </p:sp>
+      <p:sp>
+        <p:nvSpPr>
+          <p:cNvPr id="7" name="TextBox 6"/>
+          <p:cNvSpPr txBox="1"/>
+          <p:nvPr/>
+        </p:nvSpPr>
+        <p:spPr>
+          <a:xfrm>
+            <a:off x="1371600" y="1645920"/>
+            <a:ext cx="10271455" cy="1188720"/>
+          </a:xfrm>
+          <a:prstGeom prst="rect">
+            <a:avLst/>
+          </a:prstGeom>
+          <a:noFill/>
+        </p:spPr>
+        <p:txBody>
+          <a:bodyPr wrap="square" anchor="t" lIns="0" rIns="0" tIns="0" bIns="0"/>
+          <a:lstStyle/>
+          <a:p>
+            <a:pPr algn="l"/>
+            <a:r>
+              <a:rPr sz="2400" b="0" i="0">
+                <a:solidFill>
+                  <a:srgbClr val="202122"/>
+                </a:solidFill>
+                <a:latin typeface="Calibri"/>
+              </a:rPr>
+              <a:t>What must you do before upgrading a user's OS?</a:t>
+            </a:r>
+          </a:p>
+        </p:txBody>
+      </p:sp>
+      <p:sp>
+        <p:nvSpPr>
+          <p:cNvPr id="8" name="Oval 7"/>
+          <p:cNvSpPr/>
+          <p:nvPr/>
+        </p:nvSpPr>
+        <p:spPr>
+          <a:xfrm>
+            <a:off x="548640" y="3108960"/>
+            <a:ext cx="502920" cy="502920"/>
+          </a:xfrm>
+          <a:prstGeom prst="ellipse">
+            <a:avLst/>
+          </a:prstGeom>
+          <a:solidFill>
+            <a:srgbClr val="4EA1FF"/>
+          </a:solidFill>
+          <a:ln>
+            <a:noFill/>
+          </a:ln>
+          <a:effectLst/>
+        </p:spPr>
+        <p:style>
+          <a:lnRef idx="1">
+            <a:schemeClr val="accent1"/>
+          </a:lnRef>
+          <a:fillRef idx="3">
+            <a:schemeClr val="accent1"/>
+          </a:fillRef>
+          <a:effectRef idx="2">
+            <a:schemeClr val="accent1"/>
+          </a:effectRef>
+          <a:fontRef idx="minor">
+            <a:schemeClr val="lt1"/>
+          </a:fontRef>
+        </p:style>
+        <p:txBody>
+          <a:bodyPr rtlCol="0" anchor="ctr" lIns="0" rIns="0" tIns="0" bIns="0"/>
+          <a:lstStyle/>
+          <a:p>
+            <a:pPr algn="ctr"/>
+            <a:r>
+              <a:rPr sz="1600" b="1">
+                <a:solidFill>
+                  <a:srgbClr val="202122"/>
+                </a:solidFill>
+                <a:latin typeface="Calibri"/>
+              </a:rPr>
+              <a:t>2</a:t>
+            </a:r>
+          </a:p>
+        </p:txBody>
+      </p:sp>
+      <p:sp>
+        <p:nvSpPr>
+          <p:cNvPr id="9" name="TextBox 8"/>
+          <p:cNvSpPr txBox="1"/>
+          <p:nvPr/>
+        </p:nvSpPr>
+        <p:spPr>
+          <a:xfrm>
+            <a:off x="1371600" y="3063240"/>
+            <a:ext cx="10271455" cy="1188720"/>
+          </a:xfrm>
+          <a:prstGeom prst="rect">
+            <a:avLst/>
+          </a:prstGeom>
+          <a:noFill/>
+        </p:spPr>
+        <p:txBody>
+          <a:bodyPr wrap="square" anchor="t" lIns="0" rIns="0" tIns="0" bIns="0"/>
+          <a:lstStyle/>
+          <a:p>
+            <a:pPr algn="l"/>
+            <a:r>
+              <a:rPr sz="2400" b="0" i="0">
+                <a:solidFill>
+                  <a:srgbClr val="202122"/>
+                </a:solidFill>
+                <a:latin typeface="Calibri"/>
+              </a:rPr>
+              <a:t>Why install drivers?</a:t>
+            </a:r>
+          </a:p>
+        </p:txBody>
+      </p:sp>
+      <p:sp>
+        <p:nvSpPr>
+          <p:cNvPr id="10" name="Oval 9"/>
+          <p:cNvSpPr/>
+          <p:nvPr/>
+        </p:nvSpPr>
+        <p:spPr>
+          <a:xfrm>
+            <a:off x="548640" y="4526280"/>
+            <a:ext cx="502920" cy="502920"/>
+          </a:xfrm>
+          <a:prstGeom prst="ellipse">
+            <a:avLst/>
+          </a:prstGeom>
+          <a:solidFill>
+            <a:srgbClr val="4EA1FF"/>
+          </a:solidFill>
+          <a:ln>
+            <a:noFill/>
+          </a:ln>
+          <a:effectLst/>
+        </p:spPr>
+        <p:style>
+          <a:lnRef idx="1">
+            <a:schemeClr val="accent1"/>
+          </a:lnRef>
+          <a:fillRef idx="3">
+            <a:schemeClr val="accent1"/>
+          </a:fillRef>
+          <a:effectRef idx="2">
+            <a:schemeClr val="accent1"/>
+          </a:effectRef>
+          <a:fontRef idx="minor">
+            <a:schemeClr val="lt1"/>
+          </a:fontRef>
+        </p:style>
+        <p:txBody>
+          <a:bodyPr rtlCol="0" anchor="ctr" lIns="0" rIns="0" tIns="0" bIns="0"/>
+          <a:lstStyle/>
+          <a:p>
+            <a:pPr algn="ctr"/>
+            <a:r>
+              <a:rPr sz="1600" b="1">
+                <a:solidFill>
+                  <a:srgbClr val="202122"/>
+                </a:solidFill>
+                <a:latin typeface="Calibri"/>
+              </a:rPr>
+              <a:t>3</a:t>
+            </a:r>
+          </a:p>
+        </p:txBody>
+      </p:sp>
+      <p:sp>
+        <p:nvSpPr>
+          <p:cNvPr id="11" name="TextBox 10"/>
+          <p:cNvSpPr txBox="1"/>
+          <p:nvPr/>
+        </p:nvSpPr>
+        <p:spPr>
+          <a:xfrm>
+            <a:off x="1371600" y="4480560"/>
+            <a:ext cx="10271455" cy="1188720"/>
+          </a:xfrm>
+          <a:prstGeom prst="rect">
+            <a:avLst/>
+          </a:prstGeom>
+          <a:noFill/>
+        </p:spPr>
+        <p:txBody>
+          <a:bodyPr wrap="square" anchor="t" lIns="0" rIns="0" tIns="0" bIns="0"/>
+          <a:lstStyle/>
+          <a:p>
+            <a:pPr algn="l"/>
+            <a:r>
+              <a:rPr sz="2400" b="0" i="0">
+                <a:solidFill>
+                  <a:srgbClr val="202122"/>
+                </a:solidFill>
+                <a:latin typeface="Calibri"/>
+              </a:rPr>
+              <a:t>Why join the device to the domain?</a:t>
+            </a:r>
+          </a:p>
+        </p:txBody>
+      </p:sp>
+      <p:sp>
+        <p:nvSpPr>
+          <p:cNvPr id="12" name="TextBox 11"/>
+          <p:cNvSpPr txBox="1"/>
+          <p:nvPr/>
+        </p:nvSpPr>
+        <p:spPr>
+          <a:xfrm>
+            <a:off x="548640" y="5852160"/>
+            <a:ext cx="11094415" cy="365760"/>
+          </a:xfrm>
+          <a:prstGeom prst="rect">
+            <a:avLst/>
+          </a:prstGeom>
+          <a:noFill/>
+        </p:spPr>
+        <p:txBody>
+          <a:bodyPr wrap="square" anchor="t" lIns="0" rIns="0" tIns="0" bIns="0"/>
+          <a:lstStyle/>
+          <a:p>
+            <a:pPr algn="l"/>
+            <a:r>
+              <a:rPr sz="1300" b="0" i="1">
+                <a:solidFill>
+                  <a:srgbClr val="54595D"/>
+                </a:solidFill>
+                <a:latin typeface="Calibri"/>
+              </a:rPr>
+              <a:t>Answer on mini whiteboards or in your book. Answers are in the speaker notes.</a:t>
+            </a:r>
+          </a:p>
+        </p:txBody>
+      </p:sp>
+    </p:spTree>
+  </p:cSld>
+  <p:clrMapOvr>
+    <a:masterClrMapping/>
+  </p:clrMapOvr>
+</p:sld>
+</file>
+
+<file path=ppt/slides/slide13.xml><?xml version="1.0" encoding="utf-8"?>
+<p:sld xmlns:a="http://schemas.openxmlformats.org/drawingml/2006/main" xmlns:p="http://schemas.openxmlformats.org/presentationml/2006/main" xmlns:r="http://schemas.openxmlformats.org/officeDocument/2006/relationships">
+  <p:cSld>
+    <p:bg>
+      <p:bgPr>
+        <a:solidFill>
+          <a:srgbClr val="FFFFFF"/>
+        </a:solidFill>
+        <a:effectLst/>
+      </p:bgPr>
+    </p:bg>
+    <p:spTree>
+      <p:nvGrpSpPr>
+        <p:cNvPr id="1" name=""/>
+        <p:cNvGrpSpPr/>
+        <p:nvPr/>
+      </p:nvGrpSpPr>
+      <p:grpSpPr/>
+      <p:sp>
+        <p:nvSpPr>
+          <p:cNvPr id="2" name="TextBox 1"/>
+          <p:cNvSpPr txBox="1"/>
+          <p:nvPr/>
+        </p:nvSpPr>
+        <p:spPr>
+          <a:xfrm>
+            <a:off x="548640" y="320040"/>
+            <a:ext cx="11094415" cy="274320"/>
+          </a:xfrm>
+          <a:prstGeom prst="rect">
+            <a:avLst/>
+          </a:prstGeom>
+          <a:noFill/>
+        </p:spPr>
+        <p:txBody>
+          <a:bodyPr wrap="square" anchor="t" lIns="0" rIns="0" tIns="0" bIns="0"/>
+          <a:lstStyle/>
+          <a:p>
+            <a:pPr algn="l"/>
+            <a:r>
+              <a:rPr sz="1100" b="1" i="0">
+                <a:solidFill>
+                  <a:srgbClr val="54595D"/>
+                </a:solidFill>
+                <a:latin typeface="Calibri"/>
+              </a:rPr>
+              <a:t>DIGITAL SUPPORT  ·  Digital Support Content Area 2</a:t>
+            </a:r>
+          </a:p>
+        </p:txBody>
+      </p:sp>
+      <p:sp>
+        <p:nvSpPr>
+          <p:cNvPr id="3" name="TextBox 2"/>
+          <p:cNvSpPr txBox="1"/>
+          <p:nvPr/>
+        </p:nvSpPr>
+        <p:spPr>
+          <a:xfrm>
+            <a:off x="548640" y="566928"/>
+            <a:ext cx="11094415" cy="822960"/>
+          </a:xfrm>
+          <a:prstGeom prst="rect">
+            <a:avLst/>
+          </a:prstGeom>
+          <a:noFill/>
+        </p:spPr>
+        <p:txBody>
+          <a:bodyPr wrap="square" anchor="ctr" lIns="0" rIns="0" tIns="0" bIns="0"/>
+          <a:lstStyle/>
+          <a:p>
+            <a:pPr algn="l"/>
+            <a:r>
+              <a:rPr sz="3200" b="1" i="0">
+                <a:solidFill>
+                  <a:srgbClr val="03306E"/>
+                </a:solidFill>
+                <a:latin typeface="Cambria"/>
+              </a:rPr>
+              <a:t>Check your understanding</a:t>
+            </a:r>
+          </a:p>
+        </p:txBody>
+      </p:sp>
+      <p:sp>
+        <p:nvSpPr>
+          <p:cNvPr id="4" name="TextBox 3"/>
+          <p:cNvSpPr txBox="1"/>
+          <p:nvPr/>
+        </p:nvSpPr>
+        <p:spPr>
+          <a:xfrm>
+            <a:off x="548640" y="6446520"/>
+            <a:ext cx="8229600" cy="274320"/>
+          </a:xfrm>
+          <a:prstGeom prst="rect">
+            <a:avLst/>
+          </a:prstGeom>
+          <a:noFill/>
+        </p:spPr>
+        <p:txBody>
+          <a:bodyPr wrap="square" anchor="t" lIns="0" rIns="0" tIns="0" bIns="0"/>
+          <a:lstStyle/>
+          <a:p>
+            <a:pPr algn="l"/>
+            <a:r>
+              <a:rPr sz="1000" b="0" i="0">
+                <a:solidFill>
+                  <a:srgbClr val="54595D"/>
+                </a:solidFill>
+                <a:latin typeface="Calibri"/>
+              </a:rPr>
+              <a:t>Digital Support and Security T Level  ·  Devices, Operating Systems and Applications</a:t>
+            </a:r>
+          </a:p>
+        </p:txBody>
+      </p:sp>
+      <p:sp>
+        <p:nvSpPr>
+          <p:cNvPr id="5" name="TextBox 4"/>
+          <p:cNvSpPr txBox="1"/>
+          <p:nvPr/>
+        </p:nvSpPr>
+        <p:spPr>
+          <a:xfrm>
+            <a:off x="10728655" y="6446520"/>
+            <a:ext cx="914400" cy="274320"/>
+          </a:xfrm>
+          <a:prstGeom prst="rect">
+            <a:avLst/>
+          </a:prstGeom>
+          <a:noFill/>
+        </p:spPr>
+        <p:txBody>
+          <a:bodyPr wrap="square" anchor="t" lIns="0" rIns="0" tIns="0" bIns="0"/>
+          <a:lstStyle/>
+          <a:p>
+            <a:pPr algn="r"/>
+            <a:r>
+              <a:rPr sz="1000" b="0" i="0">
+                <a:solidFill>
+                  <a:srgbClr val="54595D"/>
+                </a:solidFill>
+                <a:latin typeface="Calibri"/>
+              </a:rPr>
+              <a:t>13</a:t>
+            </a:r>
+          </a:p>
+        </p:txBody>
+      </p:sp>
+      <p:sp>
+        <p:nvSpPr>
+          <p:cNvPr id="6" name="Oval 5"/>
+          <p:cNvSpPr/>
+          <p:nvPr/>
+        </p:nvSpPr>
+        <p:spPr>
+          <a:xfrm>
+            <a:off x="548640" y="1618488"/>
+            <a:ext cx="411480" cy="411480"/>
+          </a:xfrm>
+          <a:prstGeom prst="ellipse">
+            <a:avLst/>
+          </a:prstGeom>
+          <a:solidFill>
+            <a:srgbClr val="4EA1FF"/>
+          </a:solidFill>
+          <a:ln>
+            <a:noFill/>
+          </a:ln>
+          <a:effectLst/>
+        </p:spPr>
+        <p:style>
+          <a:lnRef idx="1">
+            <a:schemeClr val="accent1"/>
+          </a:lnRef>
+          <a:fillRef idx="3">
+            <a:schemeClr val="accent1"/>
+          </a:fillRef>
+          <a:effectRef idx="2">
+            <a:schemeClr val="accent1"/>
+          </a:effectRef>
+          <a:fontRef idx="minor">
+            <a:schemeClr val="lt1"/>
+          </a:fontRef>
+        </p:style>
+        <p:txBody>
+          <a:bodyPr rtlCol="0" anchor="ctr" lIns="0" rIns="0" tIns="0" bIns="0"/>
+          <a:lstStyle/>
+          <a:p>
+            <a:pPr algn="ctr"/>
+            <a:r>
+              <a:rPr sz="1400" b="1">
+                <a:solidFill>
+                  <a:srgbClr val="202122"/>
+                </a:solidFill>
+                <a:latin typeface="Calibri"/>
+              </a:rPr>
+              <a:t>1</a:t>
+            </a:r>
+          </a:p>
+        </p:txBody>
+      </p:sp>
+      <p:sp>
+        <p:nvSpPr>
+          <p:cNvPr id="7" name="TextBox 6"/>
+          <p:cNvSpPr txBox="1"/>
+          <p:nvPr/>
+        </p:nvSpPr>
+        <p:spPr>
+          <a:xfrm>
+            <a:off x="1234440" y="1600200"/>
+            <a:ext cx="10408615" cy="1030986"/>
+          </a:xfrm>
+          <a:prstGeom prst="rect">
+            <a:avLst/>
+          </a:prstGeom>
+          <a:noFill/>
+        </p:spPr>
+        <p:txBody>
+          <a:bodyPr wrap="square" anchor="t" lIns="0" rIns="0" tIns="0" bIns="0"/>
+          <a:lstStyle/>
+          <a:p>
+            <a:pPr algn="l"/>
+            <a:r>
+              <a:rPr sz="2200" b="0" i="0">
+                <a:solidFill>
+                  <a:srgbClr val="202122"/>
+                </a:solidFill>
+                <a:latin typeface="Calibri"/>
+              </a:rPr>
+              <a:t>What is the difference between a thick and a thin client?</a:t>
+            </a:r>
+          </a:p>
+        </p:txBody>
+      </p:sp>
+      <p:sp>
+        <p:nvSpPr>
+          <p:cNvPr id="8" name="Oval 7"/>
+          <p:cNvSpPr/>
+          <p:nvPr/>
+        </p:nvSpPr>
+        <p:spPr>
+          <a:xfrm>
+            <a:off x="548640" y="2814066"/>
+            <a:ext cx="411480" cy="411480"/>
+          </a:xfrm>
+          <a:prstGeom prst="ellipse">
+            <a:avLst/>
+          </a:prstGeom>
+          <a:solidFill>
+            <a:srgbClr val="4EA1FF"/>
+          </a:solidFill>
+          <a:ln>
+            <a:noFill/>
+          </a:ln>
+          <a:effectLst/>
+        </p:spPr>
+        <p:style>
+          <a:lnRef idx="1">
+            <a:schemeClr val="accent1"/>
+          </a:lnRef>
+          <a:fillRef idx="3">
+            <a:schemeClr val="accent1"/>
+          </a:fillRef>
+          <a:effectRef idx="2">
+            <a:schemeClr val="accent1"/>
+          </a:effectRef>
+          <a:fontRef idx="minor">
+            <a:schemeClr val="lt1"/>
+          </a:fontRef>
+        </p:style>
+        <p:txBody>
+          <a:bodyPr rtlCol="0" anchor="ctr" lIns="0" rIns="0" tIns="0" bIns="0"/>
+          <a:lstStyle/>
+          <a:p>
+            <a:pPr algn="ctr"/>
+            <a:r>
+              <a:rPr sz="1400" b="1">
+                <a:solidFill>
+                  <a:srgbClr val="202122"/>
+                </a:solidFill>
+                <a:latin typeface="Calibri"/>
+              </a:rPr>
+              <a:t>2</a:t>
+            </a:r>
+          </a:p>
+        </p:txBody>
+      </p:sp>
+      <p:sp>
+        <p:nvSpPr>
+          <p:cNvPr id="9" name="TextBox 8"/>
+          <p:cNvSpPr txBox="1"/>
+          <p:nvPr/>
+        </p:nvSpPr>
+        <p:spPr>
+          <a:xfrm>
+            <a:off x="1234440" y="2795778"/>
+            <a:ext cx="10408615" cy="1030986"/>
+          </a:xfrm>
+          <a:prstGeom prst="rect">
+            <a:avLst/>
+          </a:prstGeom>
+          <a:noFill/>
+        </p:spPr>
+        <p:txBody>
+          <a:bodyPr wrap="square" anchor="t" lIns="0" rIns="0" tIns="0" bIns="0"/>
+          <a:lstStyle/>
+          <a:p>
+            <a:pPr algn="l"/>
+            <a:r>
+              <a:rPr sz="2200" b="0" i="0">
+                <a:solidFill>
+                  <a:srgbClr val="202122"/>
+                </a:solidFill>
+                <a:latin typeface="Calibri"/>
+              </a:rPr>
+              <a:t>Give two advantages of an SSD over an HDD.</a:t>
+            </a:r>
+          </a:p>
+        </p:txBody>
+      </p:sp>
+      <p:sp>
+        <p:nvSpPr>
+          <p:cNvPr id="10" name="Oval 9"/>
+          <p:cNvSpPr/>
+          <p:nvPr/>
+        </p:nvSpPr>
+        <p:spPr>
+          <a:xfrm>
+            <a:off x="548640" y="4009644"/>
+            <a:ext cx="411480" cy="411480"/>
+          </a:xfrm>
+          <a:prstGeom prst="ellipse">
+            <a:avLst/>
+          </a:prstGeom>
+          <a:solidFill>
+            <a:srgbClr val="4EA1FF"/>
+          </a:solidFill>
+          <a:ln>
+            <a:noFill/>
+          </a:ln>
+          <a:effectLst/>
+        </p:spPr>
+        <p:style>
+          <a:lnRef idx="1">
+            <a:schemeClr val="accent1"/>
+          </a:lnRef>
+          <a:fillRef idx="3">
+            <a:schemeClr val="accent1"/>
+          </a:fillRef>
+          <a:effectRef idx="2">
+            <a:schemeClr val="accent1"/>
+          </a:effectRef>
+          <a:fontRef idx="minor">
+            <a:schemeClr val="lt1"/>
+          </a:fontRef>
+        </p:style>
+        <p:txBody>
+          <a:bodyPr rtlCol="0" anchor="ctr" lIns="0" rIns="0" tIns="0" bIns="0"/>
+          <a:lstStyle/>
+          <a:p>
+            <a:pPr algn="ctr"/>
+            <a:r>
+              <a:rPr sz="1400" b="1">
+                <a:solidFill>
+                  <a:srgbClr val="202122"/>
+                </a:solidFill>
+                <a:latin typeface="Calibri"/>
+              </a:rPr>
+              <a:t>3</a:t>
+            </a:r>
+          </a:p>
+        </p:txBody>
+      </p:sp>
+      <p:sp>
+        <p:nvSpPr>
+          <p:cNvPr id="11" name="TextBox 10"/>
+          <p:cNvSpPr txBox="1"/>
+          <p:nvPr/>
+        </p:nvSpPr>
+        <p:spPr>
+          <a:xfrm>
+            <a:off x="1234440" y="3991356"/>
+            <a:ext cx="10408615" cy="1030986"/>
+          </a:xfrm>
+          <a:prstGeom prst="rect">
+            <a:avLst/>
+          </a:prstGeom>
+          <a:noFill/>
+        </p:spPr>
+        <p:txBody>
+          <a:bodyPr wrap="square" anchor="t" lIns="0" rIns="0" tIns="0" bIns="0"/>
+          <a:lstStyle/>
+          <a:p>
+            <a:pPr algn="l"/>
+            <a:r>
+              <a:rPr sz="2200" b="0" i="0">
+                <a:solidFill>
+                  <a:srgbClr val="202122"/>
+                </a:solidFill>
+                <a:latin typeface="Calibri"/>
+              </a:rPr>
+              <a:t>Name two collaboration applications.</a:t>
+            </a:r>
+          </a:p>
+        </p:txBody>
+      </p:sp>
+      <p:sp>
+        <p:nvSpPr>
+          <p:cNvPr id="12" name="Oval 11"/>
+          <p:cNvSpPr/>
+          <p:nvPr/>
+        </p:nvSpPr>
+        <p:spPr>
+          <a:xfrm>
+            <a:off x="548640" y="5205221"/>
+            <a:ext cx="411480" cy="411480"/>
+          </a:xfrm>
+          <a:prstGeom prst="ellipse">
+            <a:avLst/>
+          </a:prstGeom>
+          <a:solidFill>
+            <a:srgbClr val="4EA1FF"/>
+          </a:solidFill>
+          <a:ln>
+            <a:noFill/>
+          </a:ln>
+          <a:effectLst/>
+        </p:spPr>
+        <p:style>
+          <a:lnRef idx="1">
+            <a:schemeClr val="accent1"/>
+          </a:lnRef>
+          <a:fillRef idx="3">
+            <a:schemeClr val="accent1"/>
+          </a:fillRef>
+          <a:effectRef idx="2">
+            <a:schemeClr val="accent1"/>
+          </a:effectRef>
+          <a:fontRef idx="minor">
+            <a:schemeClr val="lt1"/>
+          </a:fontRef>
+        </p:style>
+        <p:txBody>
+          <a:bodyPr rtlCol="0" anchor="ctr" lIns="0" rIns="0" tIns="0" bIns="0"/>
+          <a:lstStyle/>
+          <a:p>
+            <a:pPr algn="ctr"/>
+            <a:r>
+              <a:rPr sz="1400" b="1">
+                <a:solidFill>
+                  <a:srgbClr val="202122"/>
+                </a:solidFill>
+                <a:latin typeface="Calibri"/>
+              </a:rPr>
+              <a:t>4</a:t>
+            </a:r>
+          </a:p>
+        </p:txBody>
+      </p:sp>
+      <p:sp>
+        <p:nvSpPr>
+          <p:cNvPr id="13" name="TextBox 12"/>
+          <p:cNvSpPr txBox="1"/>
+          <p:nvPr/>
+        </p:nvSpPr>
+        <p:spPr>
+          <a:xfrm>
+            <a:off x="1234440" y="5186933"/>
+            <a:ext cx="10408615" cy="1030986"/>
+          </a:xfrm>
+          <a:prstGeom prst="rect">
+            <a:avLst/>
+          </a:prstGeom>
+          <a:noFill/>
+        </p:spPr>
+        <p:txBody>
+          <a:bodyPr wrap="square" anchor="t" lIns="0" rIns="0" tIns="0" bIns="0"/>
+          <a:lstStyle/>
+          <a:p>
+            <a:pPr algn="l"/>
+            <a:r>
+              <a:rPr sz="2200" b="0" i="0">
+                <a:solidFill>
+                  <a:srgbClr val="202122"/>
+                </a:solidFill>
+                <a:latin typeface="Calibri"/>
+              </a:rPr>
+              <a:t>What should you check before installing software?</a:t>
+            </a:r>
+          </a:p>
+        </p:txBody>
+      </p:sp>
+    </p:spTree>
+  </p:cSld>
+  <p:clrMapOvr>
+    <a:masterClrMapping/>
+  </p:clrMapOvr>
+</p:sld>
+</file>
+
+<file path=ppt/slides/slide14.xml><?xml version="1.0" encoding="utf-8"?>
+<p:sld xmlns:a="http://schemas.openxmlformats.org/drawingml/2006/main" xmlns:p="http://schemas.openxmlformats.org/presentationml/2006/main" xmlns:r="http://schemas.openxmlformats.org/officeDocument/2006/relationships">
+  <p:cSld>
+    <p:bg>
+      <p:bgPr>
+        <a:solidFill>
+          <a:srgbClr val="FFFFFF"/>
+        </a:solidFill>
+        <a:effectLst/>
+      </p:bgPr>
+    </p:bg>
+    <p:spTree>
+      <p:nvGrpSpPr>
+        <p:cNvPr id="1" name=""/>
+        <p:cNvGrpSpPr/>
+        <p:nvPr/>
+      </p:nvGrpSpPr>
+      <p:grpSpPr/>
+      <p:sp>
+        <p:nvSpPr>
+          <p:cNvPr id="2" name="TextBox 1"/>
+          <p:cNvSpPr txBox="1"/>
+          <p:nvPr/>
+        </p:nvSpPr>
+        <p:spPr>
+          <a:xfrm>
+            <a:off x="548640" y="320040"/>
+            <a:ext cx="11094415" cy="274320"/>
+          </a:xfrm>
+          <a:prstGeom prst="rect">
+            <a:avLst/>
+          </a:prstGeom>
+          <a:noFill/>
+        </p:spPr>
+        <p:txBody>
+          <a:bodyPr wrap="square" anchor="t" lIns="0" rIns="0" tIns="0" bIns="0"/>
+          <a:lstStyle/>
+          <a:p>
+            <a:pPr algn="l"/>
+            <a:r>
+              <a:rPr sz="1100" b="1" i="0">
+                <a:solidFill>
+                  <a:srgbClr val="54595D"/>
+                </a:solidFill>
+                <a:latin typeface="Calibri"/>
+              </a:rPr>
+              <a:t>DIGITAL SUPPORT  ·  Digital Support Content Area 2</a:t>
+            </a:r>
+          </a:p>
+        </p:txBody>
+      </p:sp>
+      <p:sp>
+        <p:nvSpPr>
+          <p:cNvPr id="3" name="TextBox 2"/>
+          <p:cNvSpPr txBox="1"/>
+          <p:nvPr/>
+        </p:nvSpPr>
+        <p:spPr>
+          <a:xfrm>
+            <a:off x="548640" y="566928"/>
+            <a:ext cx="11094415" cy="822960"/>
+          </a:xfrm>
+          <a:prstGeom prst="rect">
+            <a:avLst/>
+          </a:prstGeom>
+          <a:noFill/>
+        </p:spPr>
+        <p:txBody>
+          <a:bodyPr wrap="square" anchor="ctr" lIns="0" rIns="0" tIns="0" bIns="0"/>
+          <a:lstStyle/>
+          <a:p>
+            <a:pPr algn="l"/>
+            <a:r>
+              <a:rPr sz="3200" b="1" i="0">
+                <a:solidFill>
+                  <a:srgbClr val="03306E"/>
+                </a:solidFill>
+                <a:latin typeface="Cambria"/>
+              </a:rPr>
+              <a:t>Answers</a:t>
+            </a:r>
+          </a:p>
+        </p:txBody>
+      </p:sp>
+      <p:sp>
+        <p:nvSpPr>
+          <p:cNvPr id="4" name="TextBox 3"/>
+          <p:cNvSpPr txBox="1"/>
+          <p:nvPr/>
+        </p:nvSpPr>
+        <p:spPr>
+          <a:xfrm>
+            <a:off x="548640" y="6446520"/>
+            <a:ext cx="8229600" cy="274320"/>
+          </a:xfrm>
+          <a:prstGeom prst="rect">
+            <a:avLst/>
+          </a:prstGeom>
+          <a:noFill/>
+        </p:spPr>
+        <p:txBody>
+          <a:bodyPr wrap="square" anchor="t" lIns="0" rIns="0" tIns="0" bIns="0"/>
+          <a:lstStyle/>
+          <a:p>
+            <a:pPr algn="l"/>
+            <a:r>
+              <a:rPr sz="1000" b="0" i="0">
+                <a:solidFill>
+                  <a:srgbClr val="54595D"/>
+                </a:solidFill>
+                <a:latin typeface="Calibri"/>
+              </a:rPr>
+              <a:t>Digital Support and Security T Level  ·  Devices, Operating Systems and Applications</a:t>
+            </a:r>
+          </a:p>
+        </p:txBody>
+      </p:sp>
+      <p:sp>
+        <p:nvSpPr>
+          <p:cNvPr id="5" name="TextBox 4"/>
+          <p:cNvSpPr txBox="1"/>
+          <p:nvPr/>
+        </p:nvSpPr>
+        <p:spPr>
+          <a:xfrm>
+            <a:off x="10728655" y="6446520"/>
+            <a:ext cx="914400" cy="274320"/>
+          </a:xfrm>
+          <a:prstGeom prst="rect">
+            <a:avLst/>
+          </a:prstGeom>
+          <a:noFill/>
+        </p:spPr>
+        <p:txBody>
+          <a:bodyPr wrap="square" anchor="t" lIns="0" rIns="0" tIns="0" bIns="0"/>
+          <a:lstStyle/>
+          <a:p>
+            <a:pPr algn="r"/>
+            <a:r>
+              <a:rPr sz="1000" b="0" i="0">
+                <a:solidFill>
+                  <a:srgbClr val="54595D"/>
+                </a:solidFill>
+                <a:latin typeface="Calibri"/>
+              </a:rPr>
+              <a:t>14</a:t>
+            </a:r>
+          </a:p>
+        </p:txBody>
+      </p:sp>
+      <p:sp>
+        <p:nvSpPr>
+          <p:cNvPr id="6" name="Oval 5"/>
+          <p:cNvSpPr/>
+          <p:nvPr/>
+        </p:nvSpPr>
+        <p:spPr>
+          <a:xfrm>
+            <a:off x="548640" y="1618488"/>
+            <a:ext cx="411480" cy="411480"/>
+          </a:xfrm>
+          <a:prstGeom prst="ellipse">
+            <a:avLst/>
+          </a:prstGeom>
+          <a:solidFill>
+            <a:srgbClr val="4EA1FF"/>
+          </a:solidFill>
+          <a:ln>
+            <a:noFill/>
+          </a:ln>
+          <a:effectLst/>
+        </p:spPr>
+        <p:style>
+          <a:lnRef idx="1">
+            <a:schemeClr val="accent1"/>
+          </a:lnRef>
+          <a:fillRef idx="3">
+            <a:schemeClr val="accent1"/>
+          </a:fillRef>
+          <a:effectRef idx="2">
+            <a:schemeClr val="accent1"/>
+          </a:effectRef>
+          <a:fontRef idx="minor">
+            <a:schemeClr val="lt1"/>
+          </a:fontRef>
+        </p:style>
+        <p:txBody>
+          <a:bodyPr rtlCol="0" anchor="ctr" lIns="0" rIns="0" tIns="0" bIns="0"/>
+          <a:lstStyle/>
+          <a:p>
+            <a:pPr algn="ctr"/>
+            <a:r>
+              <a:rPr sz="1400" b="1">
+                <a:solidFill>
+                  <a:srgbClr val="202122"/>
+                </a:solidFill>
+                <a:latin typeface="Calibri"/>
+              </a:rPr>
+              <a:t>1</a:t>
+            </a:r>
+          </a:p>
+        </p:txBody>
+      </p:sp>
+      <p:sp>
+        <p:nvSpPr>
+          <p:cNvPr id="7" name="TextBox 6"/>
+          <p:cNvSpPr txBox="1"/>
+          <p:nvPr/>
+        </p:nvSpPr>
+        <p:spPr>
+          <a:xfrm>
+            <a:off x="1234440" y="1600200"/>
+            <a:ext cx="10408615" cy="1030986"/>
+          </a:xfrm>
+          <a:prstGeom prst="rect">
+            <a:avLst/>
+          </a:prstGeom>
+          <a:noFill/>
+        </p:spPr>
+        <p:txBody>
+          <a:bodyPr wrap="square" anchor="t" lIns="0" rIns="0" tIns="0" bIns="0"/>
+          <a:lstStyle/>
+          <a:p>
+            <a:pPr algn="l"/>
+            <a:r>
+              <a:rPr sz="1800" b="0" i="0">
+                <a:solidFill>
+                  <a:srgbClr val="54595D"/>
+                </a:solidFill>
+                <a:latin typeface="Calibri"/>
+              </a:rPr>
+              <a:t>What is the difference between a thick and a thin client?</a:t>
+            </a:r>
+          </a:p>
+          <a:p>
+            <a:r>
+              <a:rPr sz="1800" b="1">
+                <a:solidFill>
+                  <a:srgbClr val="03306E"/>
+                </a:solidFill>
+                <a:latin typeface="Calibri"/>
+              </a:rPr>
+              <a:t>A thick client processes locally; a thin client relies on a server.</a:t>
+            </a:r>
+          </a:p>
+        </p:txBody>
+      </p:sp>
+      <p:sp>
+        <p:nvSpPr>
+          <p:cNvPr id="8" name="Oval 7"/>
+          <p:cNvSpPr/>
+          <p:nvPr/>
+        </p:nvSpPr>
+        <p:spPr>
+          <a:xfrm>
+            <a:off x="548640" y="2814066"/>
+            <a:ext cx="411480" cy="411480"/>
+          </a:xfrm>
+          <a:prstGeom prst="ellipse">
+            <a:avLst/>
+          </a:prstGeom>
+          <a:solidFill>
+            <a:srgbClr val="4EA1FF"/>
+          </a:solidFill>
+          <a:ln>
+            <a:noFill/>
+          </a:ln>
+          <a:effectLst/>
+        </p:spPr>
+        <p:style>
+          <a:lnRef idx="1">
+            <a:schemeClr val="accent1"/>
+          </a:lnRef>
+          <a:fillRef idx="3">
+            <a:schemeClr val="accent1"/>
+          </a:fillRef>
+          <a:effectRef idx="2">
+            <a:schemeClr val="accent1"/>
+          </a:effectRef>
+          <a:fontRef idx="minor">
+            <a:schemeClr val="lt1"/>
+          </a:fontRef>
+        </p:style>
+        <p:txBody>
+          <a:bodyPr rtlCol="0" anchor="ctr" lIns="0" rIns="0" tIns="0" bIns="0"/>
+          <a:lstStyle/>
+          <a:p>
+            <a:pPr algn="ctr"/>
+            <a:r>
+              <a:rPr sz="1400" b="1">
+                <a:solidFill>
+                  <a:srgbClr val="202122"/>
+                </a:solidFill>
+                <a:latin typeface="Calibri"/>
+              </a:rPr>
+              <a:t>2</a:t>
+            </a:r>
+          </a:p>
+        </p:txBody>
+      </p:sp>
+      <p:sp>
+        <p:nvSpPr>
+          <p:cNvPr id="9" name="TextBox 8"/>
+          <p:cNvSpPr txBox="1"/>
+          <p:nvPr/>
+        </p:nvSpPr>
+        <p:spPr>
+          <a:xfrm>
+            <a:off x="1234440" y="2795778"/>
+            <a:ext cx="10408615" cy="1030986"/>
+          </a:xfrm>
+          <a:prstGeom prst="rect">
+            <a:avLst/>
+          </a:prstGeom>
+          <a:noFill/>
+        </p:spPr>
+        <p:txBody>
+          <a:bodyPr wrap="square" anchor="t" lIns="0" rIns="0" tIns="0" bIns="0"/>
+          <a:lstStyle/>
+          <a:p>
+            <a:pPr algn="l"/>
+            <a:r>
+              <a:rPr sz="1800" b="0" i="0">
+                <a:solidFill>
+                  <a:srgbClr val="54595D"/>
+                </a:solidFill>
+                <a:latin typeface="Calibri"/>
+              </a:rPr>
+              <a:t>Give two advantages of an SSD over an HDD.</a:t>
+            </a:r>
+          </a:p>
+          <a:p>
+            <a:r>
+              <a:rPr sz="1800" b="1">
+                <a:solidFill>
+                  <a:srgbClr val="03306E"/>
+                </a:solidFill>
+                <a:latin typeface="Calibri"/>
+              </a:rPr>
+              <a:t>Faster; no moving parts.</a:t>
+            </a:r>
+          </a:p>
+        </p:txBody>
+      </p:sp>
+      <p:sp>
+        <p:nvSpPr>
+          <p:cNvPr id="10" name="Oval 9"/>
+          <p:cNvSpPr/>
+          <p:nvPr/>
+        </p:nvSpPr>
+        <p:spPr>
+          <a:xfrm>
+            <a:off x="548640" y="4009644"/>
+            <a:ext cx="411480" cy="411480"/>
+          </a:xfrm>
+          <a:prstGeom prst="ellipse">
+            <a:avLst/>
+          </a:prstGeom>
+          <a:solidFill>
+            <a:srgbClr val="4EA1FF"/>
+          </a:solidFill>
+          <a:ln>
+            <a:noFill/>
+          </a:ln>
+          <a:effectLst/>
+        </p:spPr>
+        <p:style>
+          <a:lnRef idx="1">
+            <a:schemeClr val="accent1"/>
+          </a:lnRef>
+          <a:fillRef idx="3">
+            <a:schemeClr val="accent1"/>
+          </a:fillRef>
+          <a:effectRef idx="2">
+            <a:schemeClr val="accent1"/>
+          </a:effectRef>
+          <a:fontRef idx="minor">
+            <a:schemeClr val="lt1"/>
+          </a:fontRef>
+        </p:style>
+        <p:txBody>
+          <a:bodyPr rtlCol="0" anchor="ctr" lIns="0" rIns="0" tIns="0" bIns="0"/>
+          <a:lstStyle/>
+          <a:p>
+            <a:pPr algn="ctr"/>
+            <a:r>
+              <a:rPr sz="1400" b="1">
+                <a:solidFill>
+                  <a:srgbClr val="202122"/>
+                </a:solidFill>
+                <a:latin typeface="Calibri"/>
+              </a:rPr>
+              <a:t>3</a:t>
+            </a:r>
+          </a:p>
+        </p:txBody>
+      </p:sp>
+      <p:sp>
+        <p:nvSpPr>
+          <p:cNvPr id="11" name="TextBox 10"/>
+          <p:cNvSpPr txBox="1"/>
+          <p:nvPr/>
+        </p:nvSpPr>
+        <p:spPr>
+          <a:xfrm>
+            <a:off x="1234440" y="3991356"/>
+            <a:ext cx="10408615" cy="1030986"/>
+          </a:xfrm>
+          <a:prstGeom prst="rect">
+            <a:avLst/>
+          </a:prstGeom>
+          <a:noFill/>
+        </p:spPr>
+        <p:txBody>
+          <a:bodyPr wrap="square" anchor="t" lIns="0" rIns="0" tIns="0" bIns="0"/>
+          <a:lstStyle/>
+          <a:p>
+            <a:pPr algn="l"/>
+            <a:r>
+              <a:rPr sz="1800" b="0" i="0">
+                <a:solidFill>
+                  <a:srgbClr val="54595D"/>
+                </a:solidFill>
+                <a:latin typeface="Calibri"/>
+              </a:rPr>
+              <a:t>Name two collaboration applications.</a:t>
+            </a:r>
+          </a:p>
+          <a:p>
+            <a:r>
+              <a:rPr sz="1800" b="1">
+                <a:solidFill>
+                  <a:srgbClr val="03306E"/>
+                </a:solidFill>
+                <a:latin typeface="Calibri"/>
+              </a:rPr>
+              <a:t>Any two of: email client, video conferencing, VoIP, instant messaging, document sharing.</a:t>
+            </a:r>
+          </a:p>
+        </p:txBody>
+      </p:sp>
+      <p:sp>
+        <p:nvSpPr>
+          <p:cNvPr id="12" name="Oval 11"/>
+          <p:cNvSpPr/>
+          <p:nvPr/>
+        </p:nvSpPr>
+        <p:spPr>
+          <a:xfrm>
+            <a:off x="548640" y="5205221"/>
+            <a:ext cx="411480" cy="411480"/>
+          </a:xfrm>
+          <a:prstGeom prst="ellipse">
+            <a:avLst/>
+          </a:prstGeom>
+          <a:solidFill>
+            <a:srgbClr val="4EA1FF"/>
+          </a:solidFill>
+          <a:ln>
+            <a:noFill/>
+          </a:ln>
+          <a:effectLst/>
+        </p:spPr>
+        <p:style>
+          <a:lnRef idx="1">
+            <a:schemeClr val="accent1"/>
+          </a:lnRef>
+          <a:fillRef idx="3">
+            <a:schemeClr val="accent1"/>
+          </a:fillRef>
+          <a:effectRef idx="2">
+            <a:schemeClr val="accent1"/>
+          </a:effectRef>
+          <a:fontRef idx="minor">
+            <a:schemeClr val="lt1"/>
+          </a:fontRef>
+        </p:style>
+        <p:txBody>
+          <a:bodyPr rtlCol="0" anchor="ctr" lIns="0" rIns="0" tIns="0" bIns="0"/>
+          <a:lstStyle/>
+          <a:p>
+            <a:pPr algn="ctr"/>
+            <a:r>
+              <a:rPr sz="1400" b="1">
+                <a:solidFill>
+                  <a:srgbClr val="202122"/>
+                </a:solidFill>
+                <a:latin typeface="Calibri"/>
+              </a:rPr>
+              <a:t>4</a:t>
+            </a:r>
+          </a:p>
+        </p:txBody>
+      </p:sp>
+      <p:sp>
+        <p:nvSpPr>
+          <p:cNvPr id="13" name="TextBox 12"/>
+          <p:cNvSpPr txBox="1"/>
+          <p:nvPr/>
+        </p:nvSpPr>
+        <p:spPr>
+          <a:xfrm>
+            <a:off x="1234440" y="5186933"/>
+            <a:ext cx="10408615" cy="1030986"/>
+          </a:xfrm>
+          <a:prstGeom prst="rect">
+            <a:avLst/>
+          </a:prstGeom>
+          <a:noFill/>
+        </p:spPr>
+        <p:txBody>
+          <a:bodyPr wrap="square" anchor="t" lIns="0" rIns="0" tIns="0" bIns="0"/>
+          <a:lstStyle/>
+          <a:p>
+            <a:pPr algn="l"/>
+            <a:r>
+              <a:rPr sz="1800" b="0" i="0">
+                <a:solidFill>
+                  <a:srgbClr val="54595D"/>
+                </a:solidFill>
+                <a:latin typeface="Calibri"/>
+              </a:rPr>
+              <a:t>What should you check before installing software?</a:t>
+            </a:r>
+          </a:p>
+          <a:p>
+            <a:r>
+              <a:rPr sz="1800" b="1">
+                <a:solidFill>
+                  <a:srgbClr val="03306E"/>
+                </a:solidFill>
+                <a:latin typeface="Calibri"/>
+              </a:rPr>
+              <a:t>System requirements: storage, RAM, processor, OS compatibility.</a:t>
+            </a:r>
+          </a:p>
+        </p:txBody>
+      </p:sp>
+    </p:spTree>
+  </p:cSld>
+  <p:clrMapOvr>
+    <a:masterClrMapping/>
+  </p:clrMapOvr>
+</p:sld>
+</file>
+
+<file path=ppt/slides/slide15.xml><?xml version="1.0" encoding="utf-8"?>
+<p:sld xmlns:a="http://schemas.openxmlformats.org/drawingml/2006/main" xmlns:p="http://schemas.openxmlformats.org/presentationml/2006/main" xmlns:r="http://schemas.openxmlformats.org/officeDocument/2006/relationships">
+  <p:cSld>
+    <p:bg>
+      <p:bgPr>
+        <a:solidFill>
+          <a:srgbClr val="FFFFFF"/>
+        </a:solidFill>
+        <a:effectLst/>
+      </p:bgPr>
+    </p:bg>
+    <p:spTree>
+      <p:nvGrpSpPr>
+        <p:cNvPr id="1" name=""/>
+        <p:cNvGrpSpPr/>
+        <p:nvPr/>
+      </p:nvGrpSpPr>
+      <p:grpSpPr/>
+      <p:sp>
+        <p:nvSpPr>
+          <p:cNvPr id="2" name="TextBox 1"/>
+          <p:cNvSpPr txBox="1"/>
+          <p:nvPr/>
+        </p:nvSpPr>
+        <p:spPr>
+          <a:xfrm>
+            <a:off x="548640" y="320040"/>
+            <a:ext cx="11094415" cy="274320"/>
+          </a:xfrm>
+          <a:prstGeom prst="rect">
+            <a:avLst/>
+          </a:prstGeom>
+          <a:noFill/>
+        </p:spPr>
+        <p:txBody>
+          <a:bodyPr wrap="square" anchor="t" lIns="0" rIns="0" tIns="0" bIns="0"/>
+          <a:lstStyle/>
+          <a:p>
+            <a:pPr algn="l"/>
+            <a:r>
+              <a:rPr sz="1100" b="1" i="0">
+                <a:solidFill>
+                  <a:srgbClr val="54595D"/>
+                </a:solidFill>
+                <a:latin typeface="Calibri"/>
+              </a:rPr>
+              <a:t>DIGITAL SUPPORT  ·  Digital Support Content Area 2</a:t>
+            </a:r>
+          </a:p>
+        </p:txBody>
+      </p:sp>
+      <p:sp>
+        <p:nvSpPr>
+          <p:cNvPr id="3" name="TextBox 2"/>
+          <p:cNvSpPr txBox="1"/>
+          <p:nvPr/>
+        </p:nvSpPr>
+        <p:spPr>
+          <a:xfrm>
+            <a:off x="548640" y="566928"/>
+            <a:ext cx="11094415" cy="822960"/>
+          </a:xfrm>
+          <a:prstGeom prst="rect">
+            <a:avLst/>
+          </a:prstGeom>
+          <a:noFill/>
+        </p:spPr>
+        <p:txBody>
+          <a:bodyPr wrap="square" anchor="ctr" lIns="0" rIns="0" tIns="0" bIns="0"/>
+          <a:lstStyle/>
+          <a:p>
+            <a:pPr algn="l"/>
+            <a:r>
+              <a:rPr sz="3200" b="1" i="0">
+                <a:solidFill>
+                  <a:srgbClr val="03306E"/>
+                </a:solidFill>
+                <a:latin typeface="Cambria"/>
+              </a:rPr>
+              <a:t>Activity: Install and configure</a:t>
+            </a:r>
+          </a:p>
+        </p:txBody>
+      </p:sp>
+      <p:sp>
+        <p:nvSpPr>
+          <p:cNvPr id="4" name="TextBox 3"/>
+          <p:cNvSpPr txBox="1"/>
+          <p:nvPr/>
+        </p:nvSpPr>
+        <p:spPr>
+          <a:xfrm>
+            <a:off x="548640" y="6446520"/>
+            <a:ext cx="8229600" cy="274320"/>
+          </a:xfrm>
+          <a:prstGeom prst="rect">
+            <a:avLst/>
+          </a:prstGeom>
+          <a:noFill/>
+        </p:spPr>
+        <p:txBody>
+          <a:bodyPr wrap="square" anchor="t" lIns="0" rIns="0" tIns="0" bIns="0"/>
+          <a:lstStyle/>
+          <a:p>
+            <a:pPr algn="l"/>
+            <a:r>
+              <a:rPr sz="1000" b="0" i="0">
+                <a:solidFill>
+                  <a:srgbClr val="54595D"/>
+                </a:solidFill>
+                <a:latin typeface="Calibri"/>
+              </a:rPr>
+              <a:t>Digital Support and Security T Level  ·  Devices, Operating Systems and Applications</a:t>
+            </a:r>
+          </a:p>
+        </p:txBody>
+      </p:sp>
+      <p:sp>
+        <p:nvSpPr>
+          <p:cNvPr id="5" name="TextBox 4"/>
+          <p:cNvSpPr txBox="1"/>
+          <p:nvPr/>
+        </p:nvSpPr>
+        <p:spPr>
+          <a:xfrm>
+            <a:off x="10728655" y="6446520"/>
+            <a:ext cx="914400" cy="274320"/>
+          </a:xfrm>
+          <a:prstGeom prst="rect">
+            <a:avLst/>
+          </a:prstGeom>
+          <a:noFill/>
+        </p:spPr>
+        <p:txBody>
+          <a:bodyPr wrap="square" anchor="t" lIns="0" rIns="0" tIns="0" bIns="0"/>
+          <a:lstStyle/>
+          <a:p>
+            <a:pPr algn="r"/>
+            <a:r>
+              <a:rPr sz="1000" b="0" i="0">
+                <a:solidFill>
+                  <a:srgbClr val="54595D"/>
+                </a:solidFill>
+                <a:latin typeface="Calibri"/>
+              </a:rPr>
+              <a:t>15</a:t>
+            </a:r>
+          </a:p>
+        </p:txBody>
+      </p:sp>
+      <p:sp>
+        <p:nvSpPr>
+          <p:cNvPr id="6" name="Rounded Rectangle 5"/>
+          <p:cNvSpPr/>
+          <p:nvPr/>
+        </p:nvSpPr>
+        <p:spPr>
+          <a:xfrm>
+            <a:off x="548640" y="1508760"/>
+            <a:ext cx="2011680" cy="457200"/>
+          </a:xfrm>
+          <a:prstGeom prst="roundRect">
+            <a:avLst>
+              <a:gd name="adj" fmla="val 50000"/>
+            </a:avLst>
+          </a:prstGeom>
+          <a:solidFill>
+            <a:srgbClr val="4EA1FF"/>
+          </a:solidFill>
+          <a:ln>
+            <a:noFill/>
+          </a:ln>
+          <a:effectLst/>
+        </p:spPr>
+        <p:style>
+          <a:lnRef idx="1">
+            <a:schemeClr val="accent1"/>
+          </a:lnRef>
+          <a:fillRef idx="3">
+            <a:schemeClr val="accent1"/>
+          </a:fillRef>
+          <a:effectRef idx="2">
+            <a:schemeClr val="accent1"/>
+          </a:effectRef>
+          <a:fontRef idx="minor">
+            <a:schemeClr val="lt1"/>
+          </a:fontRef>
+        </p:style>
+        <p:txBody>
+          <a:bodyPr rtlCol="0" anchor="ctr"/>
+          <a:lstStyle/>
+          <a:p/>
+        </p:txBody>
+      </p:sp>
+      <p:sp>
+        <p:nvSpPr>
+          <p:cNvPr id="7" name="TextBox 6"/>
+          <p:cNvSpPr txBox="1"/>
+          <p:nvPr/>
+        </p:nvSpPr>
+        <p:spPr>
+          <a:xfrm>
+            <a:off x="548640" y="1508760"/>
+            <a:ext cx="2011680" cy="457200"/>
+          </a:xfrm>
+          <a:prstGeom prst="rect">
+            <a:avLst/>
+          </a:prstGeom>
+          <a:noFill/>
+        </p:spPr>
+        <p:txBody>
+          <a:bodyPr wrap="square" anchor="ctr" lIns="0" rIns="0" tIns="0" bIns="0"/>
+          <a:lstStyle/>
+          <a:p>
+            <a:pPr algn="ctr"/>
+            <a:r>
+              <a:rPr sz="1400" b="1" i="0">
+                <a:solidFill>
+                  <a:srgbClr val="202122"/>
+                </a:solidFill>
+                <a:latin typeface="Calibri"/>
+              </a:rPr>
+              <a:t>45 minutes</a:t>
+            </a:r>
+          </a:p>
+        </p:txBody>
+      </p:sp>
+      <p:sp>
+        <p:nvSpPr>
+          <p:cNvPr id="8" name="TextBox 7"/>
+          <p:cNvSpPr txBox="1"/>
+          <p:nvPr/>
+        </p:nvSpPr>
+        <p:spPr>
+          <a:xfrm>
+            <a:off x="2743200" y="1508760"/>
+            <a:ext cx="4754880" cy="457200"/>
+          </a:xfrm>
+          <a:prstGeom prst="rect">
+            <a:avLst/>
+          </a:prstGeom>
+          <a:noFill/>
+        </p:spPr>
+        <p:txBody>
+          <a:bodyPr wrap="square" anchor="ctr" lIns="0" rIns="0" tIns="0" bIns="0"/>
+          <a:lstStyle/>
+          <a:p>
+            <a:pPr algn="l"/>
+            <a:r>
+              <a:rPr sz="1400" b="0" i="1">
+                <a:solidFill>
+                  <a:srgbClr val="54595D"/>
+                </a:solidFill>
+                <a:latin typeface="Calibri"/>
+              </a:rPr>
+              <a:t>Individual, on a VM</a:t>
+            </a:r>
+          </a:p>
+        </p:txBody>
+      </p:sp>
+      <p:sp>
+        <p:nvSpPr>
+          <p:cNvPr id="9" name="Oval 8"/>
+          <p:cNvSpPr/>
+          <p:nvPr/>
+        </p:nvSpPr>
+        <p:spPr>
+          <a:xfrm>
+            <a:off x="548640" y="2482596"/>
+            <a:ext cx="384048" cy="384048"/>
+          </a:xfrm>
+          <a:prstGeom prst="ellipse">
+            <a:avLst/>
+          </a:prstGeom>
+          <a:solidFill>
+            <a:srgbClr val="0645AD"/>
+          </a:solidFill>
+          <a:ln>
+            <a:noFill/>
+          </a:ln>
+          <a:effectLst/>
+        </p:spPr>
+        <p:style>
+          <a:lnRef idx="1">
+            <a:schemeClr val="accent1"/>
+          </a:lnRef>
+          <a:fillRef idx="3">
+            <a:schemeClr val="accent1"/>
+          </a:fillRef>
+          <a:effectRef idx="2">
+            <a:schemeClr val="accent1"/>
+          </a:effectRef>
+          <a:fontRef idx="minor">
+            <a:schemeClr val="lt1"/>
+          </a:fontRef>
+        </p:style>
+        <p:txBody>
+          <a:bodyPr rtlCol="0" anchor="ctr" lIns="0" rIns="0" tIns="0" bIns="0"/>
+          <a:lstStyle/>
+          <a:p>
+            <a:pPr algn="ctr"/>
+            <a:r>
+              <a:rPr sz="1300" b="1">
+                <a:solidFill>
+                  <a:srgbClr val="FFFFFF"/>
+                </a:solidFill>
+                <a:latin typeface="Calibri"/>
+              </a:rPr>
+              <a:t>1</a:t>
+            </a:r>
+          </a:p>
+        </p:txBody>
+      </p:sp>
+      <p:sp>
+        <p:nvSpPr>
+          <p:cNvPr id="10" name="TextBox 9"/>
+          <p:cNvSpPr txBox="1"/>
+          <p:nvPr/>
+        </p:nvSpPr>
+        <p:spPr>
+          <a:xfrm>
+            <a:off x="1143000" y="2240280"/>
+            <a:ext cx="5943600" cy="868680"/>
+          </a:xfrm>
+          <a:prstGeom prst="rect">
+            <a:avLst/>
+          </a:prstGeom>
+          <a:noFill/>
+        </p:spPr>
+        <p:txBody>
+          <a:bodyPr wrap="square" anchor="ctr" lIns="0" rIns="0" tIns="0" bIns="0"/>
+          <a:lstStyle/>
+          <a:p>
+            <a:pPr algn="l"/>
+            <a:r>
+              <a:rPr sz="1700" b="0" i="0">
+                <a:solidFill>
+                  <a:srgbClr val="202122"/>
+                </a:solidFill>
+                <a:latin typeface="Calibri"/>
+              </a:rPr>
+              <a:t>Check the VM meets the system requirements for the given OS.</a:t>
+            </a:r>
+          </a:p>
+        </p:txBody>
+      </p:sp>
+      <p:sp>
+        <p:nvSpPr>
+          <p:cNvPr id="11" name="Oval 10"/>
+          <p:cNvSpPr/>
+          <p:nvPr/>
+        </p:nvSpPr>
+        <p:spPr>
+          <a:xfrm>
+            <a:off x="548640" y="3461004"/>
+            <a:ext cx="384048" cy="384048"/>
+          </a:xfrm>
+          <a:prstGeom prst="ellipse">
+            <a:avLst/>
+          </a:prstGeom>
+          <a:solidFill>
+            <a:srgbClr val="0645AD"/>
+          </a:solidFill>
+          <a:ln>
+            <a:noFill/>
+          </a:ln>
+          <a:effectLst/>
+        </p:spPr>
+        <p:style>
+          <a:lnRef idx="1">
+            <a:schemeClr val="accent1"/>
+          </a:lnRef>
+          <a:fillRef idx="3">
+            <a:schemeClr val="accent1"/>
+          </a:fillRef>
+          <a:effectRef idx="2">
+            <a:schemeClr val="accent1"/>
+          </a:effectRef>
+          <a:fontRef idx="minor">
+            <a:schemeClr val="lt1"/>
+          </a:fontRef>
+        </p:style>
+        <p:txBody>
+          <a:bodyPr rtlCol="0" anchor="ctr" lIns="0" rIns="0" tIns="0" bIns="0"/>
+          <a:lstStyle/>
+          <a:p>
+            <a:pPr algn="ctr"/>
+            <a:r>
+              <a:rPr sz="1300" b="1">
+                <a:solidFill>
+                  <a:srgbClr val="FFFFFF"/>
+                </a:solidFill>
+                <a:latin typeface="Calibri"/>
+              </a:rPr>
+              <a:t>2</a:t>
+            </a:r>
+          </a:p>
+        </p:txBody>
+      </p:sp>
+      <p:sp>
+        <p:nvSpPr>
+          <p:cNvPr id="12" name="TextBox 11"/>
+          <p:cNvSpPr txBox="1"/>
+          <p:nvPr/>
+        </p:nvSpPr>
+        <p:spPr>
+          <a:xfrm>
+            <a:off x="1143000" y="3218688"/>
+            <a:ext cx="5943600" cy="868680"/>
+          </a:xfrm>
+          <a:prstGeom prst="rect">
+            <a:avLst/>
+          </a:prstGeom>
+          <a:noFill/>
+        </p:spPr>
+        <p:txBody>
+          <a:bodyPr wrap="square" anchor="ctr" lIns="0" rIns="0" tIns="0" bIns="0"/>
+          <a:lstStyle/>
+          <a:p>
+            <a:pPr algn="l"/>
+            <a:r>
+              <a:rPr sz="1700" b="0" i="0">
+                <a:solidFill>
+                  <a:srgbClr val="202122"/>
+                </a:solidFill>
+                <a:latin typeface="Calibri"/>
+              </a:rPr>
+              <a:t>Install the OS with a sensible partition layout.</a:t>
+            </a:r>
+          </a:p>
+        </p:txBody>
+      </p:sp>
+      <p:sp>
+        <p:nvSpPr>
+          <p:cNvPr id="13" name="Oval 12"/>
+          <p:cNvSpPr/>
+          <p:nvPr/>
+        </p:nvSpPr>
+        <p:spPr>
+          <a:xfrm>
+            <a:off x="548640" y="4439412"/>
+            <a:ext cx="384048" cy="384048"/>
+          </a:xfrm>
+          <a:prstGeom prst="ellipse">
+            <a:avLst/>
+          </a:prstGeom>
+          <a:solidFill>
+            <a:srgbClr val="0645AD"/>
+          </a:solidFill>
+          <a:ln>
+            <a:noFill/>
+          </a:ln>
+          <a:effectLst/>
+        </p:spPr>
+        <p:style>
+          <a:lnRef idx="1">
+            <a:schemeClr val="accent1"/>
+          </a:lnRef>
+          <a:fillRef idx="3">
+            <a:schemeClr val="accent1"/>
+          </a:fillRef>
+          <a:effectRef idx="2">
+            <a:schemeClr val="accent1"/>
+          </a:effectRef>
+          <a:fontRef idx="minor">
+            <a:schemeClr val="lt1"/>
+          </a:fontRef>
+        </p:style>
+        <p:txBody>
+          <a:bodyPr rtlCol="0" anchor="ctr" lIns="0" rIns="0" tIns="0" bIns="0"/>
+          <a:lstStyle/>
+          <a:p>
+            <a:pPr algn="ctr"/>
+            <a:r>
+              <a:rPr sz="1300" b="1">
+                <a:solidFill>
+                  <a:srgbClr val="FFFFFF"/>
+                </a:solidFill>
+                <a:latin typeface="Calibri"/>
+              </a:rPr>
+              <a:t>3</a:t>
+            </a:r>
+          </a:p>
+        </p:txBody>
+      </p:sp>
+      <p:sp>
+        <p:nvSpPr>
+          <p:cNvPr id="14" name="TextBox 13"/>
+          <p:cNvSpPr txBox="1"/>
+          <p:nvPr/>
+        </p:nvSpPr>
+        <p:spPr>
+          <a:xfrm>
+            <a:off x="1143000" y="4197096"/>
+            <a:ext cx="5943600" cy="868680"/>
+          </a:xfrm>
+          <a:prstGeom prst="rect">
+            <a:avLst/>
+          </a:prstGeom>
+          <a:noFill/>
+        </p:spPr>
+        <p:txBody>
+          <a:bodyPr wrap="square" anchor="ctr" lIns="0" rIns="0" tIns="0" bIns="0"/>
+          <a:lstStyle/>
+          <a:p>
+            <a:pPr algn="l"/>
+            <a:r>
+              <a:rPr sz="1700" b="0" i="0">
+                <a:solidFill>
+                  <a:srgbClr val="202122"/>
+                </a:solidFill>
+                <a:latin typeface="Calibri"/>
+              </a:rPr>
+              <a:t>Set region, language and time, then apply updates.</a:t>
+            </a:r>
+          </a:p>
+        </p:txBody>
+      </p:sp>
+      <p:sp>
+        <p:nvSpPr>
+          <p:cNvPr id="15" name="Oval 14"/>
+          <p:cNvSpPr/>
+          <p:nvPr/>
+        </p:nvSpPr>
+        <p:spPr>
+          <a:xfrm>
+            <a:off x="548640" y="5417820"/>
+            <a:ext cx="384048" cy="384048"/>
+          </a:xfrm>
+          <a:prstGeom prst="ellipse">
+            <a:avLst/>
+          </a:prstGeom>
+          <a:solidFill>
+            <a:srgbClr val="0645AD"/>
+          </a:solidFill>
+          <a:ln>
+            <a:noFill/>
+          </a:ln>
+          <a:effectLst/>
+        </p:spPr>
+        <p:style>
+          <a:lnRef idx="1">
+            <a:schemeClr val="accent1"/>
+          </a:lnRef>
+          <a:fillRef idx="3">
+            <a:schemeClr val="accent1"/>
+          </a:fillRef>
+          <a:effectRef idx="2">
+            <a:schemeClr val="accent1"/>
+          </a:effectRef>
+          <a:fontRef idx="minor">
+            <a:schemeClr val="lt1"/>
+          </a:fontRef>
+        </p:style>
+        <p:txBody>
+          <a:bodyPr rtlCol="0" anchor="ctr" lIns="0" rIns="0" tIns="0" bIns="0"/>
+          <a:lstStyle/>
+          <a:p>
+            <a:pPr algn="ctr"/>
+            <a:r>
+              <a:rPr sz="1300" b="1">
+                <a:solidFill>
+                  <a:srgbClr val="FFFFFF"/>
+                </a:solidFill>
+                <a:latin typeface="Calibri"/>
+              </a:rPr>
+              <a:t>4</a:t>
+            </a:r>
+          </a:p>
+        </p:txBody>
+      </p:sp>
+      <p:sp>
+        <p:nvSpPr>
+          <p:cNvPr id="16" name="TextBox 15"/>
+          <p:cNvSpPr txBox="1"/>
+          <p:nvPr/>
+        </p:nvSpPr>
+        <p:spPr>
+          <a:xfrm>
+            <a:off x="1143000" y="5175504"/>
+            <a:ext cx="5943600" cy="868680"/>
+          </a:xfrm>
+          <a:prstGeom prst="rect">
+            <a:avLst/>
+          </a:prstGeom>
+          <a:noFill/>
+        </p:spPr>
+        <p:txBody>
+          <a:bodyPr wrap="square" anchor="ctr" lIns="0" rIns="0" tIns="0" bIns="0"/>
+          <a:lstStyle/>
+          <a:p>
+            <a:pPr algn="l"/>
+            <a:r>
+              <a:rPr sz="1700" b="0" i="0">
+                <a:solidFill>
+                  <a:srgbClr val="202122"/>
+                </a:solidFill>
+                <a:latin typeface="Calibri"/>
+              </a:rPr>
+              <a:t>Install a productivity suite and record every setting you chose.</a:t>
+            </a:r>
+          </a:p>
+        </p:txBody>
+      </p:sp>
+      <p:sp>
+        <p:nvSpPr>
+          <p:cNvPr id="17" name="Rounded Rectangle 16"/>
+          <p:cNvSpPr/>
+          <p:nvPr/>
+        </p:nvSpPr>
+        <p:spPr>
+          <a:xfrm>
+            <a:off x="7772400" y="1508760"/>
+            <a:ext cx="3867912" cy="4572000"/>
+          </a:xfrm>
+          <a:prstGeom prst="roundRect">
+            <a:avLst>
+              <a:gd name="adj" fmla="val 8000"/>
+            </a:avLst>
+          </a:prstGeom>
+          <a:solidFill>
+            <a:srgbClr val="EAF3FF"/>
+          </a:solidFill>
+          <a:ln>
+            <a:noFill/>
+          </a:ln>
+          <a:effectLst/>
+        </p:spPr>
+        <p:style>
+          <a:lnRef idx="1">
+            <a:schemeClr val="accent1"/>
+          </a:lnRef>
+          <a:fillRef idx="3">
+            <a:schemeClr val="accent1"/>
+          </a:fillRef>
+          <a:effectRef idx="2">
+            <a:schemeClr val="accent1"/>
+          </a:effectRef>
+          <a:fontRef idx="minor">
+            <a:schemeClr val="lt1"/>
+          </a:fontRef>
+        </p:style>
+        <p:txBody>
+          <a:bodyPr rtlCol="0" anchor="ctr"/>
+          <a:lstStyle/>
+          <a:p/>
+        </p:txBody>
+      </p:sp>
+      <p:sp>
+        <p:nvSpPr>
+          <p:cNvPr id="18" name="TextBox 17"/>
+          <p:cNvSpPr txBox="1"/>
+          <p:nvPr/>
+        </p:nvSpPr>
+        <p:spPr>
+          <a:xfrm>
+            <a:off x="8046720" y="1737360"/>
+            <a:ext cx="3291840" cy="365760"/>
+          </a:xfrm>
+          <a:prstGeom prst="rect">
+            <a:avLst/>
+          </a:prstGeom>
+          <a:noFill/>
+        </p:spPr>
+        <p:txBody>
+          <a:bodyPr wrap="square" anchor="t" lIns="0" rIns="0" tIns="0" bIns="0"/>
+          <a:lstStyle/>
+          <a:p>
+            <a:pPr algn="l"/>
+            <a:r>
+              <a:rPr sz="1300" b="1" i="0">
+                <a:solidFill>
+                  <a:srgbClr val="0645AD"/>
+                </a:solidFill>
+                <a:latin typeface="Calibri"/>
+              </a:rPr>
+              <a:t>SUCCESS CRITERIA</a:t>
+            </a:r>
+          </a:p>
+        </p:txBody>
+      </p:sp>
+      <p:sp>
+        <p:nvSpPr>
+          <p:cNvPr id="19" name="TextBox 18"/>
+          <p:cNvSpPr txBox="1"/>
+          <p:nvPr/>
+        </p:nvSpPr>
+        <p:spPr>
+          <a:xfrm>
+            <a:off x="8046720" y="2240280"/>
+            <a:ext cx="3337560" cy="3657600"/>
+          </a:xfrm>
+          <a:prstGeom prst="rect">
+            <a:avLst/>
+          </a:prstGeom>
+          <a:noFill/>
+        </p:spPr>
+        <p:txBody>
+          <a:bodyPr wrap="square" lIns="0" rIns="0" tIns="0" bIns="0">
+            <a:spAutoFit/>
+          </a:bodyPr>
+          <a:lstStyle/>
+          <a:p>
+            <a:pPr marL="274320" indent="-274320">
+              <a:spcAft>
+                <a:spcPts val="810"/>
+              </a:spcAft>
+              <a:buClr>
+                <a:srgbClr val="0645AD"/>
+              </a:buClr>
+              <a:buFont typeface="Arial"/>
+              <a:buChar char="•"/>
+            </a:pPr>
+            <a:r>
+              <a:rPr sz="1800" b="0">
+                <a:solidFill>
+                  <a:srgbClr val="202122"/>
+                </a:solidFill>
+                <a:latin typeface="Calibri"/>
+              </a:rPr>
+              <a:t>Requirements checked and recorded</a:t>
+            </a:r>
+          </a:p>
+          <a:p>
+            <a:pPr marL="274320" indent="-274320">
+              <a:spcAft>
+                <a:spcPts val="810"/>
+              </a:spcAft>
+              <a:buClr>
+                <a:srgbClr val="0645AD"/>
+              </a:buClr>
+              <a:buFont typeface="Arial"/>
+              <a:buChar char="•"/>
+            </a:pPr>
+            <a:r>
+              <a:rPr sz="1800" b="0">
+                <a:solidFill>
+                  <a:srgbClr val="202122"/>
+                </a:solidFill>
+                <a:latin typeface="Calibri"/>
+              </a:rPr>
+              <a:t>OS fully updated</a:t>
+            </a:r>
+          </a:p>
+          <a:p>
+            <a:pPr marL="274320" indent="-274320">
+              <a:spcAft>
+                <a:spcPts val="810"/>
+              </a:spcAft>
+              <a:buClr>
+                <a:srgbClr val="0645AD"/>
+              </a:buClr>
+              <a:buFont typeface="Arial"/>
+              <a:buChar char="•"/>
+            </a:pPr>
+            <a:r>
+              <a:rPr sz="1800" b="0">
+                <a:solidFill>
+                  <a:srgbClr val="202122"/>
+                </a:solidFill>
+                <a:latin typeface="Calibri"/>
+              </a:rPr>
+              <a:t>Clear installation log for a colleague to follow</a:t>
+            </a:r>
+          </a:p>
+        </p:txBody>
+      </p:sp>
+    </p:spTree>
+  </p:cSld>
+  <p:clrMapOvr>
+    <a:masterClrMapping/>
+  </p:clrMapOvr>
+</p:sld>
+</file>
+
+<file path=ppt/slides/slide16.xml><?xml version="1.0" encoding="utf-8"?>
+<p:sld xmlns:a="http://schemas.openxmlformats.org/drawingml/2006/main" xmlns:p="http://schemas.openxmlformats.org/presentationml/2006/main" xmlns:r="http://schemas.openxmlformats.org/officeDocument/2006/relationships">
+  <p:cSld>
+    <p:bg>
+      <p:bgPr>
+        <a:solidFill>
           <a:srgbClr val="03306E"/>
         </a:solidFill>
         <a:effectLst/>
@@ -5283,22 +9386,102 @@
       </p:sp>
       <p:sp>
         <p:nvSpPr>
-          <p:cNvPr id="6" name="Rounded Rectangle 5"/>
+          <p:cNvPr id="6" name="TextBox 5"/>
+          <p:cNvSpPr txBox="1"/>
+          <p:nvPr/>
+        </p:nvSpPr>
+        <p:spPr>
+          <a:xfrm>
+            <a:off x="548640" y="1554480"/>
+            <a:ext cx="6720840" cy="4617720"/>
+          </a:xfrm>
+          <a:prstGeom prst="rect">
+            <a:avLst/>
+          </a:prstGeom>
+          <a:noFill/>
+        </p:spPr>
+        <p:txBody>
+          <a:bodyPr wrap="square" lIns="0" rIns="0" tIns="0" bIns="0">
+            <a:spAutoFit/>
+          </a:bodyPr>
+          <a:lstStyle/>
+          <a:p>
+            <a:pPr>
+              <a:spcAft>
+                <a:spcPts val="1260"/>
+              </a:spcAft>
+            </a:pPr>
+            <a:r>
+              <a:rPr sz="2100" b="0">
+                <a:solidFill>
+                  <a:srgbClr val="202122"/>
+                </a:solidFill>
+                <a:latin typeface="Calibri"/>
+              </a:rPr>
+              <a:t>Support technicians look after a wide range of devices.</a:t>
+            </a:r>
+          </a:p>
+          <a:p>
+            <a:pPr>
+              <a:spcAft>
+                <a:spcPts val="1260"/>
+              </a:spcAft>
+            </a:pPr>
+            <a:r>
+              <a:rPr sz="2100" b="0">
+                <a:solidFill>
+                  <a:srgbClr val="202122"/>
+                </a:solidFill>
+                <a:latin typeface="Calibri"/>
+              </a:rPr>
+              <a:t>Desktops can be thick clients, which process locally, or thin clients, which rely on a server. Cloud workspaces provide a whole desktop over the internet. Mobile devices include laptops, tablets, phones, wearables and e-readers. Peripherals include keyboards, monitors, printers, scanners, projectors, drives and card readers.</a:t>
+            </a:r>
+          </a:p>
+          <a:p>
+            <a:pPr>
+              <a:spcAft>
+                <a:spcPts val="1260"/>
+              </a:spcAft>
+            </a:pPr>
+            <a:r>
+              <a:rPr sz="2100" b="1">
+                <a:solidFill>
+                  <a:srgbClr val="202122"/>
+                </a:solidFill>
+                <a:latin typeface="Calibri"/>
+              </a:rPr>
+              <a:t>IoT devices are growing fast:</a:t>
+            </a:r>
+            <a:r>
+              <a:rPr sz="2100" b="0">
+                <a:solidFill>
+                  <a:srgbClr val="202122"/>
+                </a:solidFill>
+                <a:latin typeface="Calibri"/>
+              </a:rPr>
+              <a:t> smart building systems such as alarms, meters and lighting, and smart devices such as smart TVs. Each needs setting up, securing and supporting.</a:t>
+            </a:r>
+          </a:p>
+        </p:txBody>
+      </p:sp>
+      <p:sp>
+        <p:nvSpPr>
+          <p:cNvPr id="7" name="Rounded Rectangle 6"/>
           <p:cNvSpPr/>
           <p:nvPr/>
         </p:nvSpPr>
         <p:spPr>
           <a:xfrm>
-            <a:off x="548640" y="1600200"/>
-            <a:ext cx="3515258" cy="2148840"/>
+            <a:off x="7772400" y="1554480"/>
+            <a:ext cx="3867912" cy="4526280"/>
           </a:xfrm>
           <a:prstGeom prst="roundRect">
             <a:avLst>
-              <a:gd name="adj" fmla="val 6000"/>
+              <a:gd name="adj" fmla="val 8000"/>
             </a:avLst>
           </a:prstGeom>
           <a:solidFill>
-            <a:srgbClr val="EAF3FF"/>
+            <a:srgbClr val="03306E"/>
           </a:solidFill>
           <a:ln>
             <a:noFill/>
@@ -5327,14 +9510,14 @@
       </p:sp>
       <p:sp>
         <p:nvSpPr>
-          <p:cNvPr id="7" name="Oval 6"/>
+          <p:cNvPr id="8" name="Oval 7"/>
           <p:cNvSpPr/>
           <p:nvPr/>
         </p:nvSpPr>
         <p:spPr>
           <a:xfrm>
-            <a:off x="777240" y="1828800"/>
-            <a:ext cx="457200" cy="457200"/>
+            <a:off x="8046720" y="1828800"/>
+            <a:ext cx="548640" cy="548640"/>
           </a:xfrm>
           <a:prstGeom prst="ellipse">
             <a:avLst/>
@@ -5367,60 +9550,60 @@
           <a:p>
             <a:pPr algn="ctr"/>
             <a:r>
-              <a:rPr sz="1500" b="1">
+              <a:rPr sz="1300" b="1">
                 <a:solidFill>
                   <a:srgbClr val="202122"/>
                 </a:solidFill>
                 <a:latin typeface="Calibri"/>
               </a:rPr>
-              <a:t>1</a:t>
-            </a:r>
-          </a:p>
-        </p:txBody>
-      </p:sp>
-      <p:sp>
-        <p:nvSpPr>
-          <p:cNvPr id="8" name="TextBox 7"/>
-          <p:cNvSpPr txBox="1"/>
-          <p:nvPr/>
-        </p:nvSpPr>
-        <p:spPr>
-          <a:xfrm>
-            <a:off x="1371600" y="1801368"/>
-            <a:ext cx="2509418" cy="512064"/>
-          </a:xfrm>
-          <a:prstGeom prst="rect">
-            <a:avLst/>
-          </a:prstGeom>
-          <a:noFill/>
-        </p:spPr>
-        <p:txBody>
-          <a:bodyPr wrap="square" anchor="ctr" lIns="0" rIns="0" tIns="0" bIns="0"/>
+              <a:t>e.g.</a:t>
+            </a:r>
+          </a:p>
+        </p:txBody>
+      </p:sp>
+      <p:sp>
+        <p:nvSpPr>
+          <p:cNvPr id="9" name="TextBox 8"/>
+          <p:cNvSpPr txBox="1"/>
+          <p:nvPr/>
+        </p:nvSpPr>
+        <p:spPr>
+          <a:xfrm>
+            <a:off x="8046720" y="2560320"/>
+            <a:ext cx="3291840" cy="365760"/>
+          </a:xfrm>
+          <a:prstGeom prst="rect">
+            <a:avLst/>
+          </a:prstGeom>
+          <a:noFill/>
+        </p:spPr>
+        <p:txBody>
+          <a:bodyPr wrap="square" anchor="t" lIns="0" rIns="0" tIns="0" bIns="0"/>
           <a:lstStyle/>
           <a:p>
             <a:pPr algn="l"/>
             <a:r>
-              <a:rPr sz="1900" b="1" i="0">
-                <a:solidFill>
-                  <a:srgbClr val="03306E"/>
-                </a:solidFill>
-                <a:latin typeface="Calibri"/>
-              </a:rPr>
-              <a:t>Desktops</a:t>
-            </a:r>
-          </a:p>
-        </p:txBody>
-      </p:sp>
-      <p:sp>
-        <p:nvSpPr>
-          <p:cNvPr id="9" name="TextBox 8"/>
-          <p:cNvSpPr txBox="1"/>
-          <p:nvPr/>
-        </p:nvSpPr>
-        <p:spPr>
-          <a:xfrm>
-            <a:off x="777240" y="2468880"/>
-            <a:ext cx="3058058" cy="1143000"/>
+              <a:rPr sz="1300" b="1" i="0">
+                <a:solidFill>
+                  <a:srgbClr val="A9C8F0"/>
+                </a:solidFill>
+                <a:latin typeface="Calibri"/>
+              </a:rPr>
+              <a:t>EXAMPLE</a:t>
+            </a:r>
+          </a:p>
+        </p:txBody>
+      </p:sp>
+      <p:sp>
+        <p:nvSpPr>
+          <p:cNvPr id="10" name="TextBox 9"/>
+          <p:cNvSpPr txBox="1"/>
+          <p:nvPr/>
+        </p:nvSpPr>
+        <p:spPr>
+          <a:xfrm>
+            <a:off x="8046720" y="2971800"/>
+            <a:ext cx="3291840" cy="2971800"/>
           </a:xfrm>
           <a:prstGeom prst="rect">
             <a:avLst/>
@@ -5435,663 +9618,11 @@
             <a:r>
               <a:rPr sz="1900" b="0" i="0">
                 <a:solidFill>
-                  <a:srgbClr val="202122"/>
-                </a:solidFill>
-                <a:latin typeface="Calibri"/>
-              </a:rPr>
-              <a:t>Thick clients that process locally, or thin clients that rely on a server.</a:t>
-            </a:r>
-          </a:p>
-        </p:txBody>
-      </p:sp>
-      <p:sp>
-        <p:nvSpPr>
-          <p:cNvPr id="10" name="Rounded Rectangle 9"/>
-          <p:cNvSpPr/>
-          <p:nvPr/>
-        </p:nvSpPr>
-        <p:spPr>
-          <a:xfrm>
-            <a:off x="4338218" y="1600200"/>
-            <a:ext cx="3515258" cy="2148840"/>
-          </a:xfrm>
-          <a:prstGeom prst="roundRect">
-            <a:avLst>
-              <a:gd name="adj" fmla="val 6000"/>
-            </a:avLst>
-          </a:prstGeom>
-          <a:solidFill>
-            <a:srgbClr val="EAF3FF"/>
-          </a:solidFill>
-          <a:ln>
-            <a:noFill/>
-          </a:ln>
-          <a:effectLst/>
-        </p:spPr>
-        <p:style>
-          <a:lnRef idx="1">
-            <a:schemeClr val="accent1"/>
-          </a:lnRef>
-          <a:fillRef idx="3">
-            <a:schemeClr val="accent1"/>
-          </a:fillRef>
-          <a:effectRef idx="2">
-            <a:schemeClr val="accent1"/>
-          </a:effectRef>
-          <a:fontRef idx="minor">
-            <a:schemeClr val="lt1"/>
-          </a:fontRef>
-        </p:style>
-        <p:txBody>
-          <a:bodyPr rtlCol="0" anchor="ctr"/>
-          <a:lstStyle/>
-          <a:p/>
-        </p:txBody>
-      </p:sp>
-      <p:sp>
-        <p:nvSpPr>
-          <p:cNvPr id="11" name="Oval 10"/>
-          <p:cNvSpPr/>
-          <p:nvPr/>
-        </p:nvSpPr>
-        <p:spPr>
-          <a:xfrm>
-            <a:off x="4566818" y="1828800"/>
-            <a:ext cx="457200" cy="457200"/>
-          </a:xfrm>
-          <a:prstGeom prst="ellipse">
-            <a:avLst/>
-          </a:prstGeom>
-          <a:solidFill>
-            <a:srgbClr val="4EA1FF"/>
-          </a:solidFill>
-          <a:ln>
-            <a:noFill/>
-          </a:ln>
-          <a:effectLst/>
-        </p:spPr>
-        <p:style>
-          <a:lnRef idx="1">
-            <a:schemeClr val="accent1"/>
-          </a:lnRef>
-          <a:fillRef idx="3">
-            <a:schemeClr val="accent1"/>
-          </a:fillRef>
-          <a:effectRef idx="2">
-            <a:schemeClr val="accent1"/>
-          </a:effectRef>
-          <a:fontRef idx="minor">
-            <a:schemeClr val="lt1"/>
-          </a:fontRef>
-        </p:style>
-        <p:txBody>
-          <a:bodyPr rtlCol="0" anchor="ctr" lIns="0" rIns="0" tIns="0" bIns="0"/>
-          <a:lstStyle/>
-          <a:p>
-            <a:pPr algn="ctr"/>
-            <a:r>
-              <a:rPr sz="1500" b="1">
-                <a:solidFill>
-                  <a:srgbClr val="202122"/>
-                </a:solidFill>
-                <a:latin typeface="Calibri"/>
-              </a:rPr>
-              <a:t>2</a:t>
-            </a:r>
-          </a:p>
-        </p:txBody>
-      </p:sp>
-      <p:sp>
-        <p:nvSpPr>
-          <p:cNvPr id="12" name="TextBox 11"/>
-          <p:cNvSpPr txBox="1"/>
-          <p:nvPr/>
-        </p:nvSpPr>
-        <p:spPr>
-          <a:xfrm>
-            <a:off x="5161178" y="1801368"/>
-            <a:ext cx="2509418" cy="512064"/>
-          </a:xfrm>
-          <a:prstGeom prst="rect">
-            <a:avLst/>
-          </a:prstGeom>
-          <a:noFill/>
-        </p:spPr>
-        <p:txBody>
-          <a:bodyPr wrap="square" anchor="ctr" lIns="0" rIns="0" tIns="0" bIns="0"/>
-          <a:lstStyle/>
-          <a:p>
-            <a:pPr algn="l"/>
-            <a:r>
-              <a:rPr sz="1900" b="1" i="0">
-                <a:solidFill>
-                  <a:srgbClr val="03306E"/>
-                </a:solidFill>
-                <a:latin typeface="Calibri"/>
-              </a:rPr>
-              <a:t>Cloud workspaces</a:t>
-            </a:r>
-          </a:p>
-        </p:txBody>
-      </p:sp>
-      <p:sp>
-        <p:nvSpPr>
-          <p:cNvPr id="13" name="TextBox 12"/>
-          <p:cNvSpPr txBox="1"/>
-          <p:nvPr/>
-        </p:nvSpPr>
-        <p:spPr>
-          <a:xfrm>
-            <a:off x="4566818" y="2468880"/>
-            <a:ext cx="3058058" cy="1143000"/>
-          </a:xfrm>
-          <a:prstGeom prst="rect">
-            <a:avLst/>
-          </a:prstGeom>
-          <a:noFill/>
-        </p:spPr>
-        <p:txBody>
-          <a:bodyPr wrap="square" anchor="t" lIns="0" rIns="0" tIns="0" bIns="0"/>
-          <a:lstStyle/>
-          <a:p>
-            <a:pPr algn="l"/>
-            <a:r>
-              <a:rPr sz="2000" b="0" i="0">
-                <a:solidFill>
-                  <a:srgbClr val="202122"/>
-                </a:solidFill>
-                <a:latin typeface="Calibri"/>
-              </a:rPr>
-              <a:t>Free or licensed online desktops.</a:t>
-            </a:r>
-          </a:p>
-        </p:txBody>
-      </p:sp>
-      <p:sp>
-        <p:nvSpPr>
-          <p:cNvPr id="14" name="Rounded Rectangle 13"/>
-          <p:cNvSpPr/>
-          <p:nvPr/>
-        </p:nvSpPr>
-        <p:spPr>
-          <a:xfrm>
-            <a:off x="8127796" y="1600200"/>
-            <a:ext cx="3515258" cy="2148840"/>
-          </a:xfrm>
-          <a:prstGeom prst="roundRect">
-            <a:avLst>
-              <a:gd name="adj" fmla="val 6000"/>
-            </a:avLst>
-          </a:prstGeom>
-          <a:solidFill>
-            <a:srgbClr val="EAF3FF"/>
-          </a:solidFill>
-          <a:ln>
-            <a:noFill/>
-          </a:ln>
-          <a:effectLst/>
-        </p:spPr>
-        <p:style>
-          <a:lnRef idx="1">
-            <a:schemeClr val="accent1"/>
-          </a:lnRef>
-          <a:fillRef idx="3">
-            <a:schemeClr val="accent1"/>
-          </a:fillRef>
-          <a:effectRef idx="2">
-            <a:schemeClr val="accent1"/>
-          </a:effectRef>
-          <a:fontRef idx="minor">
-            <a:schemeClr val="lt1"/>
-          </a:fontRef>
-        </p:style>
-        <p:txBody>
-          <a:bodyPr rtlCol="0" anchor="ctr"/>
-          <a:lstStyle/>
-          <a:p/>
-        </p:txBody>
-      </p:sp>
-      <p:sp>
-        <p:nvSpPr>
-          <p:cNvPr id="15" name="Oval 14"/>
-          <p:cNvSpPr/>
-          <p:nvPr/>
-        </p:nvSpPr>
-        <p:spPr>
-          <a:xfrm>
-            <a:off x="8356396" y="1828800"/>
-            <a:ext cx="457200" cy="457200"/>
-          </a:xfrm>
-          <a:prstGeom prst="ellipse">
-            <a:avLst/>
-          </a:prstGeom>
-          <a:solidFill>
-            <a:srgbClr val="4EA1FF"/>
-          </a:solidFill>
-          <a:ln>
-            <a:noFill/>
-          </a:ln>
-          <a:effectLst/>
-        </p:spPr>
-        <p:style>
-          <a:lnRef idx="1">
-            <a:schemeClr val="accent1"/>
-          </a:lnRef>
-          <a:fillRef idx="3">
-            <a:schemeClr val="accent1"/>
-          </a:fillRef>
-          <a:effectRef idx="2">
-            <a:schemeClr val="accent1"/>
-          </a:effectRef>
-          <a:fontRef idx="minor">
-            <a:schemeClr val="lt1"/>
-          </a:fontRef>
-        </p:style>
-        <p:txBody>
-          <a:bodyPr rtlCol="0" anchor="ctr" lIns="0" rIns="0" tIns="0" bIns="0"/>
-          <a:lstStyle/>
-          <a:p>
-            <a:pPr algn="ctr"/>
-            <a:r>
-              <a:rPr sz="1500" b="1">
-                <a:solidFill>
-                  <a:srgbClr val="202122"/>
-                </a:solidFill>
-                <a:latin typeface="Calibri"/>
-              </a:rPr>
-              <a:t>3</a:t>
-            </a:r>
-          </a:p>
-        </p:txBody>
-      </p:sp>
-      <p:sp>
-        <p:nvSpPr>
-          <p:cNvPr id="16" name="TextBox 15"/>
-          <p:cNvSpPr txBox="1"/>
-          <p:nvPr/>
-        </p:nvSpPr>
-        <p:spPr>
-          <a:xfrm>
-            <a:off x="8950756" y="1801368"/>
-            <a:ext cx="2509418" cy="512064"/>
-          </a:xfrm>
-          <a:prstGeom prst="rect">
-            <a:avLst/>
-          </a:prstGeom>
-          <a:noFill/>
-        </p:spPr>
-        <p:txBody>
-          <a:bodyPr wrap="square" anchor="ctr" lIns="0" rIns="0" tIns="0" bIns="0"/>
-          <a:lstStyle/>
-          <a:p>
-            <a:pPr algn="l"/>
-            <a:r>
-              <a:rPr sz="1900" b="1" i="0">
-                <a:solidFill>
-                  <a:srgbClr val="03306E"/>
-                </a:solidFill>
-                <a:latin typeface="Calibri"/>
-              </a:rPr>
-              <a:t>Mobile devices</a:t>
-            </a:r>
-          </a:p>
-        </p:txBody>
-      </p:sp>
-      <p:sp>
-        <p:nvSpPr>
-          <p:cNvPr id="17" name="TextBox 16"/>
-          <p:cNvSpPr txBox="1"/>
-          <p:nvPr/>
-        </p:nvSpPr>
-        <p:spPr>
-          <a:xfrm>
-            <a:off x="8356396" y="2468880"/>
-            <a:ext cx="3058058" cy="1143000"/>
-          </a:xfrm>
-          <a:prstGeom prst="rect">
-            <a:avLst/>
-          </a:prstGeom>
-          <a:noFill/>
-        </p:spPr>
-        <p:txBody>
-          <a:bodyPr wrap="square" anchor="t" lIns="0" rIns="0" tIns="0" bIns="0"/>
-          <a:lstStyle/>
-          <a:p>
-            <a:pPr algn="l"/>
-            <a:r>
-              <a:rPr sz="2000" b="0" i="0">
-                <a:solidFill>
-                  <a:srgbClr val="202122"/>
-                </a:solidFill>
-                <a:latin typeface="Calibri"/>
-              </a:rPr>
-              <a:t>Tablets, smartphones, wearables, e-readers.</a:t>
-            </a:r>
-          </a:p>
-        </p:txBody>
-      </p:sp>
-      <p:sp>
-        <p:nvSpPr>
-          <p:cNvPr id="18" name="Rounded Rectangle 17"/>
-          <p:cNvSpPr/>
-          <p:nvPr/>
-        </p:nvSpPr>
-        <p:spPr>
-          <a:xfrm>
-            <a:off x="548640" y="4023360"/>
-            <a:ext cx="3515258" cy="2148840"/>
-          </a:xfrm>
-          <a:prstGeom prst="roundRect">
-            <a:avLst>
-              <a:gd name="adj" fmla="val 6000"/>
-            </a:avLst>
-          </a:prstGeom>
-          <a:solidFill>
-            <a:srgbClr val="EAF3FF"/>
-          </a:solidFill>
-          <a:ln>
-            <a:noFill/>
-          </a:ln>
-          <a:effectLst/>
-        </p:spPr>
-        <p:style>
-          <a:lnRef idx="1">
-            <a:schemeClr val="accent1"/>
-          </a:lnRef>
-          <a:fillRef idx="3">
-            <a:schemeClr val="accent1"/>
-          </a:fillRef>
-          <a:effectRef idx="2">
-            <a:schemeClr val="accent1"/>
-          </a:effectRef>
-          <a:fontRef idx="minor">
-            <a:schemeClr val="lt1"/>
-          </a:fontRef>
-        </p:style>
-        <p:txBody>
-          <a:bodyPr rtlCol="0" anchor="ctr"/>
-          <a:lstStyle/>
-          <a:p/>
-        </p:txBody>
-      </p:sp>
-      <p:sp>
-        <p:nvSpPr>
-          <p:cNvPr id="19" name="Oval 18"/>
-          <p:cNvSpPr/>
-          <p:nvPr/>
-        </p:nvSpPr>
-        <p:spPr>
-          <a:xfrm>
-            <a:off x="777240" y="4251960"/>
-            <a:ext cx="457200" cy="457200"/>
-          </a:xfrm>
-          <a:prstGeom prst="ellipse">
-            <a:avLst/>
-          </a:prstGeom>
-          <a:solidFill>
-            <a:srgbClr val="4EA1FF"/>
-          </a:solidFill>
-          <a:ln>
-            <a:noFill/>
-          </a:ln>
-          <a:effectLst/>
-        </p:spPr>
-        <p:style>
-          <a:lnRef idx="1">
-            <a:schemeClr val="accent1"/>
-          </a:lnRef>
-          <a:fillRef idx="3">
-            <a:schemeClr val="accent1"/>
-          </a:fillRef>
-          <a:effectRef idx="2">
-            <a:schemeClr val="accent1"/>
-          </a:effectRef>
-          <a:fontRef idx="minor">
-            <a:schemeClr val="lt1"/>
-          </a:fontRef>
-        </p:style>
-        <p:txBody>
-          <a:bodyPr rtlCol="0" anchor="ctr" lIns="0" rIns="0" tIns="0" bIns="0"/>
-          <a:lstStyle/>
-          <a:p>
-            <a:pPr algn="ctr"/>
-            <a:r>
-              <a:rPr sz="1500" b="1">
-                <a:solidFill>
-                  <a:srgbClr val="202122"/>
-                </a:solidFill>
-                <a:latin typeface="Calibri"/>
-              </a:rPr>
-              <a:t>4</a:t>
-            </a:r>
-          </a:p>
-        </p:txBody>
-      </p:sp>
-      <p:sp>
-        <p:nvSpPr>
-          <p:cNvPr id="20" name="TextBox 19"/>
-          <p:cNvSpPr txBox="1"/>
-          <p:nvPr/>
-        </p:nvSpPr>
-        <p:spPr>
-          <a:xfrm>
-            <a:off x="1371600" y="4224528"/>
-            <a:ext cx="2509418" cy="512064"/>
-          </a:xfrm>
-          <a:prstGeom prst="rect">
-            <a:avLst/>
-          </a:prstGeom>
-          <a:noFill/>
-        </p:spPr>
-        <p:txBody>
-          <a:bodyPr wrap="square" anchor="ctr" lIns="0" rIns="0" tIns="0" bIns="0"/>
-          <a:lstStyle/>
-          <a:p>
-            <a:pPr algn="l"/>
-            <a:r>
-              <a:rPr sz="1900" b="1" i="0">
-                <a:solidFill>
-                  <a:srgbClr val="03306E"/>
-                </a:solidFill>
-                <a:latin typeface="Calibri"/>
-              </a:rPr>
-              <a:t>Peripherals</a:t>
-            </a:r>
-          </a:p>
-        </p:txBody>
-      </p:sp>
-      <p:sp>
-        <p:nvSpPr>
-          <p:cNvPr id="21" name="TextBox 20"/>
-          <p:cNvSpPr txBox="1"/>
-          <p:nvPr/>
-        </p:nvSpPr>
-        <p:spPr>
-          <a:xfrm>
-            <a:off x="777240" y="4892040"/>
-            <a:ext cx="3058058" cy="1143000"/>
-          </a:xfrm>
-          <a:prstGeom prst="rect">
-            <a:avLst/>
-          </a:prstGeom>
-          <a:noFill/>
-        </p:spPr>
-        <p:txBody>
-          <a:bodyPr wrap="square" anchor="t" lIns="0" rIns="0" tIns="0" bIns="0"/>
-          <a:lstStyle/>
-          <a:p>
-            <a:pPr algn="l"/>
-            <a:r>
-              <a:rPr sz="2000" b="0" i="0">
-                <a:solidFill>
-                  <a:srgbClr val="202122"/>
-                </a:solidFill>
-                <a:latin typeface="Calibri"/>
-              </a:rPr>
-              <a:t>Keyboards, monitors, printers, projectors, card readers, drives.</a:t>
-            </a:r>
-          </a:p>
-        </p:txBody>
-      </p:sp>
-      <p:sp>
-        <p:nvSpPr>
-          <p:cNvPr id="22" name="Rounded Rectangle 21"/>
-          <p:cNvSpPr/>
-          <p:nvPr/>
-        </p:nvSpPr>
-        <p:spPr>
-          <a:xfrm>
-            <a:off x="4338218" y="4023360"/>
-            <a:ext cx="3515258" cy="2148840"/>
-          </a:xfrm>
-          <a:prstGeom prst="roundRect">
-            <a:avLst>
-              <a:gd name="adj" fmla="val 6000"/>
-            </a:avLst>
-          </a:prstGeom>
-          <a:solidFill>
-            <a:srgbClr val="EAF3FF"/>
-          </a:solidFill>
-          <a:ln>
-            <a:noFill/>
-          </a:ln>
-          <a:effectLst/>
-        </p:spPr>
-        <p:style>
-          <a:lnRef idx="1">
-            <a:schemeClr val="accent1"/>
-          </a:lnRef>
-          <a:fillRef idx="3">
-            <a:schemeClr val="accent1"/>
-          </a:fillRef>
-          <a:effectRef idx="2">
-            <a:schemeClr val="accent1"/>
-          </a:effectRef>
-          <a:fontRef idx="minor">
-            <a:schemeClr val="lt1"/>
-          </a:fontRef>
-        </p:style>
-        <p:txBody>
-          <a:bodyPr rtlCol="0" anchor="ctr"/>
-          <a:lstStyle/>
-          <a:p/>
-        </p:txBody>
-      </p:sp>
-      <p:sp>
-        <p:nvSpPr>
-          <p:cNvPr id="23" name="Oval 22"/>
-          <p:cNvSpPr/>
-          <p:nvPr/>
-        </p:nvSpPr>
-        <p:spPr>
-          <a:xfrm>
-            <a:off x="4566818" y="4251960"/>
-            <a:ext cx="457200" cy="457200"/>
-          </a:xfrm>
-          <a:prstGeom prst="ellipse">
-            <a:avLst/>
-          </a:prstGeom>
-          <a:solidFill>
-            <a:srgbClr val="4EA1FF"/>
-          </a:solidFill>
-          <a:ln>
-            <a:noFill/>
-          </a:ln>
-          <a:effectLst/>
-        </p:spPr>
-        <p:style>
-          <a:lnRef idx="1">
-            <a:schemeClr val="accent1"/>
-          </a:lnRef>
-          <a:fillRef idx="3">
-            <a:schemeClr val="accent1"/>
-          </a:fillRef>
-          <a:effectRef idx="2">
-            <a:schemeClr val="accent1"/>
-          </a:effectRef>
-          <a:fontRef idx="minor">
-            <a:schemeClr val="lt1"/>
-          </a:fontRef>
-        </p:style>
-        <p:txBody>
-          <a:bodyPr rtlCol="0" anchor="ctr" lIns="0" rIns="0" tIns="0" bIns="0"/>
-          <a:lstStyle/>
-          <a:p>
-            <a:pPr algn="ctr"/>
-            <a:r>
-              <a:rPr sz="1500" b="1">
-                <a:solidFill>
-                  <a:srgbClr val="202122"/>
-                </a:solidFill>
-                <a:latin typeface="Calibri"/>
-              </a:rPr>
-              <a:t>5</a:t>
-            </a:r>
-          </a:p>
-        </p:txBody>
-      </p:sp>
-      <p:sp>
-        <p:nvSpPr>
-          <p:cNvPr id="24" name="TextBox 23"/>
-          <p:cNvSpPr txBox="1"/>
-          <p:nvPr/>
-        </p:nvSpPr>
-        <p:spPr>
-          <a:xfrm>
-            <a:off x="5161178" y="4224528"/>
-            <a:ext cx="2509418" cy="512064"/>
-          </a:xfrm>
-          <a:prstGeom prst="rect">
-            <a:avLst/>
-          </a:prstGeom>
-          <a:noFill/>
-        </p:spPr>
-        <p:txBody>
-          <a:bodyPr wrap="square" anchor="ctr" lIns="0" rIns="0" tIns="0" bIns="0"/>
-          <a:lstStyle/>
-          <a:p>
-            <a:pPr algn="l"/>
-            <a:r>
-              <a:rPr sz="1900" b="1" i="0">
-                <a:solidFill>
-                  <a:srgbClr val="03306E"/>
-                </a:solidFill>
-                <a:latin typeface="Calibri"/>
-              </a:rPr>
-              <a:t>IoT</a:t>
-            </a:r>
-          </a:p>
-        </p:txBody>
-      </p:sp>
-      <p:sp>
-        <p:nvSpPr>
-          <p:cNvPr id="25" name="TextBox 24"/>
-          <p:cNvSpPr txBox="1"/>
-          <p:nvPr/>
-        </p:nvSpPr>
-        <p:spPr>
-          <a:xfrm>
-            <a:off x="4566818" y="4892040"/>
-            <a:ext cx="3058058" cy="1143000"/>
-          </a:xfrm>
-          <a:prstGeom prst="rect">
-            <a:avLst/>
-          </a:prstGeom>
-          <a:noFill/>
-        </p:spPr>
-        <p:txBody>
-          <a:bodyPr wrap="square" anchor="t" lIns="0" rIns="0" tIns="0" bIns="0"/>
-          <a:lstStyle/>
-          <a:p>
-            <a:pPr algn="l"/>
-            <a:r>
-              <a:rPr sz="1900" b="0" i="0">
-                <a:solidFill>
-                  <a:srgbClr val="202122"/>
-                </a:solidFill>
-                <a:latin typeface="Calibri"/>
-              </a:rPr>
-              <a:t>Smart building alarms, meters and lighting; smart TVs; autonomous vehicles.</a:t>
+                  <a:srgbClr val="FFFFFF"/>
+                </a:solidFill>
+                <a:latin typeface="Cambria"/>
+              </a:rPr>
+              <a:t>A call centre uses thin clients: cheap, easy to replace, and all the software runs centrally, so one update fixes every desk.</a:t>
             </a:r>
           </a:p>
         </p:txBody>
@@ -6183,7 +9714,7 @@
                 </a:solidFill>
                 <a:latin typeface="Cambria"/>
               </a:rPr>
-              <a:t>Operating systems and applications</a:t>
+              <a:t>End-user devices</a:t>
             </a:r>
           </a:p>
         </p:txBody>
@@ -6263,88 +9794,11 @@
         <p:spPr>
           <a:xfrm>
             <a:off x="548640" y="1600200"/>
-            <a:ext cx="5364327" cy="640080"/>
+            <a:ext cx="3515258" cy="2148840"/>
           </a:xfrm>
           <a:prstGeom prst="roundRect">
             <a:avLst>
-              <a:gd name="adj" fmla="val 15000"/>
-            </a:avLst>
-          </a:prstGeom>
-          <a:solidFill>
-            <a:srgbClr val="03306E"/>
-          </a:solidFill>
-          <a:ln>
-            <a:noFill/>
-          </a:ln>
-          <a:effectLst/>
-        </p:spPr>
-        <p:style>
-          <a:lnRef idx="1">
-            <a:schemeClr val="accent1"/>
-          </a:lnRef>
-          <a:fillRef idx="3">
-            <a:schemeClr val="accent1"/>
-          </a:fillRef>
-          <a:effectRef idx="2">
-            <a:schemeClr val="accent1"/>
-          </a:effectRef>
-          <a:fontRef idx="minor">
-            <a:schemeClr val="lt1"/>
-          </a:fontRef>
-        </p:style>
-        <p:txBody>
-          <a:bodyPr rtlCol="0" anchor="ctr"/>
-          <a:lstStyle/>
-          <a:p/>
-        </p:txBody>
-      </p:sp>
-      <p:sp>
-        <p:nvSpPr>
-          <p:cNvPr id="7" name="TextBox 6"/>
-          <p:cNvSpPr txBox="1"/>
-          <p:nvPr/>
-        </p:nvSpPr>
-        <p:spPr>
-          <a:xfrm>
-            <a:off x="777240" y="1600200"/>
-            <a:ext cx="4907127" cy="640080"/>
-          </a:xfrm>
-          <a:prstGeom prst="rect">
-            <a:avLst/>
-          </a:prstGeom>
-          <a:noFill/>
-        </p:spPr>
-        <p:txBody>
-          <a:bodyPr wrap="square" anchor="ctr" lIns="0" rIns="0" tIns="0" bIns="0"/>
-          <a:lstStyle/>
-          <a:p>
-            <a:pPr algn="l"/>
-            <a:r>
-              <a:rPr sz="2000" b="1" i="0">
-                <a:solidFill>
-                  <a:srgbClr val="FFFFFF"/>
-                </a:solidFill>
-                <a:latin typeface="Calibri"/>
-              </a:rPr>
-              <a:t>OS types</a:t>
-            </a:r>
-          </a:p>
-        </p:txBody>
-      </p:sp>
-      <p:sp>
-        <p:nvSpPr>
-          <p:cNvPr id="8" name="Rounded Rectangle 7"/>
-          <p:cNvSpPr/>
-          <p:nvPr/>
-        </p:nvSpPr>
-        <p:spPr>
-          <a:xfrm>
-            <a:off x="548640" y="2377440"/>
-            <a:ext cx="5364327" cy="3794760"/>
-          </a:xfrm>
-          <a:prstGeom prst="roundRect">
-            <a:avLst>
-              <a:gd name="adj" fmla="val 4000"/>
+              <a:gd name="adj" fmla="val 6000"/>
             </a:avLst>
           </a:prstGeom>
           <a:solidFill>
@@ -6377,135 +9831,20 @@
       </p:sp>
       <p:sp>
         <p:nvSpPr>
-          <p:cNvPr id="9" name="TextBox 8"/>
-          <p:cNvSpPr txBox="1"/>
-          <p:nvPr/>
-        </p:nvSpPr>
-        <p:spPr>
-          <a:xfrm>
-            <a:off x="822959" y="2606040"/>
-            <a:ext cx="4815687" cy="3337560"/>
-          </a:xfrm>
-          <a:prstGeom prst="rect">
-            <a:avLst/>
-          </a:prstGeom>
-          <a:noFill/>
-        </p:spPr>
-        <p:txBody>
-          <a:bodyPr wrap="square" lIns="0" rIns="0" tIns="0" bIns="0">
-            <a:spAutoFit/>
-          </a:bodyPr>
-          <a:lstStyle/>
-          <a:p>
-            <a:pPr marL="274320" indent="-274320">
-              <a:spcAft>
-                <a:spcPts val="990"/>
-              </a:spcAft>
-              <a:buClr>
-                <a:srgbClr val="0645AD"/>
-              </a:buClr>
-              <a:buFont typeface="Arial"/>
-              <a:buChar char="•"/>
-            </a:pPr>
-            <a:r>
-              <a:rPr sz="2200" b="1">
-                <a:solidFill>
-                  <a:srgbClr val="202122"/>
-                </a:solidFill>
-                <a:latin typeface="Calibri"/>
-              </a:rPr>
-              <a:t>End-user:</a:t>
-            </a:r>
-            <a:r>
-              <a:rPr sz="2200" b="0">
-                <a:solidFill>
-                  <a:srgbClr val="202122"/>
-                </a:solidFill>
-                <a:latin typeface="Calibri"/>
-              </a:rPr>
-              <a:t> Windows, macOS, Linux</a:t>
-            </a:r>
-          </a:p>
-          <a:p>
-            <a:pPr marL="274320" indent="-274320">
-              <a:spcAft>
-                <a:spcPts val="990"/>
-              </a:spcAft>
-              <a:buClr>
-                <a:srgbClr val="0645AD"/>
-              </a:buClr>
-              <a:buFont typeface="Arial"/>
-              <a:buChar char="•"/>
-            </a:pPr>
-            <a:r>
-              <a:rPr sz="2200" b="1">
-                <a:solidFill>
-                  <a:srgbClr val="202122"/>
-                </a:solidFill>
-                <a:latin typeface="Calibri"/>
-              </a:rPr>
-              <a:t>Mobile:</a:t>
-            </a:r>
-            <a:r>
-              <a:rPr sz="2200" b="0">
-                <a:solidFill>
-                  <a:srgbClr val="202122"/>
-                </a:solidFill>
-                <a:latin typeface="Calibri"/>
-              </a:rPr>
-              <a:t> iOS, Android</a:t>
-            </a:r>
-          </a:p>
-          <a:p>
-            <a:pPr marL="274320" indent="-274320">
-              <a:spcAft>
-                <a:spcPts val="990"/>
-              </a:spcAft>
-              <a:buClr>
-                <a:srgbClr val="0645AD"/>
-              </a:buClr>
-              <a:buFont typeface="Arial"/>
-              <a:buChar char="•"/>
-            </a:pPr>
-            <a:r>
-              <a:rPr sz="2200" b="1">
-                <a:solidFill>
-                  <a:srgbClr val="202122"/>
-                </a:solidFill>
-                <a:latin typeface="Calibri"/>
-              </a:rPr>
-              <a:t>Server:</a:t>
-            </a:r>
-            <a:r>
-              <a:rPr sz="2200" b="0">
-                <a:solidFill>
-                  <a:srgbClr val="202122"/>
-                </a:solidFill>
-                <a:latin typeface="Calibri"/>
-              </a:rPr>
-              <a:t> Windows Server, Linux</a:t>
-            </a:r>
-          </a:p>
-        </p:txBody>
-      </p:sp>
-      <p:sp>
-        <p:nvSpPr>
-          <p:cNvPr id="10" name="Rounded Rectangle 9"/>
+          <p:cNvPr id="7" name="Oval 6"/>
           <p:cNvSpPr/>
           <p:nvPr/>
         </p:nvSpPr>
         <p:spPr>
           <a:xfrm>
-            <a:off x="6278727" y="1600200"/>
-            <a:ext cx="5364327" cy="640080"/>
-          </a:xfrm>
-          <a:prstGeom prst="roundRect">
-            <a:avLst>
-              <a:gd name="adj" fmla="val 15000"/>
-            </a:avLst>
+            <a:off x="777240" y="1828800"/>
+            <a:ext cx="457200" cy="457200"/>
+          </a:xfrm>
+          <a:prstGeom prst="ellipse">
+            <a:avLst/>
           </a:prstGeom>
           <a:solidFill>
-            <a:srgbClr val="0645AD"/>
+            <a:srgbClr val="4EA1FF"/>
           </a:solidFill>
           <a:ln>
             <a:noFill/>
@@ -6527,21 +9866,32 @@
           </a:fontRef>
         </p:style>
         <p:txBody>
-          <a:bodyPr rtlCol="0" anchor="ctr"/>
-          <a:lstStyle/>
-          <a:p/>
-        </p:txBody>
-      </p:sp>
-      <p:sp>
-        <p:nvSpPr>
-          <p:cNvPr id="11" name="TextBox 10"/>
-          <p:cNvSpPr txBox="1"/>
-          <p:nvPr/>
-        </p:nvSpPr>
-        <p:spPr>
-          <a:xfrm>
-            <a:off x="6507327" y="1600200"/>
-            <a:ext cx="4907127" cy="640080"/>
+          <a:bodyPr rtlCol="0" anchor="ctr" lIns="0" rIns="0" tIns="0" bIns="0"/>
+          <a:lstStyle/>
+          <a:p>
+            <a:pPr algn="ctr"/>
+            <a:r>
+              <a:rPr sz="1500" b="1">
+                <a:solidFill>
+                  <a:srgbClr val="202122"/>
+                </a:solidFill>
+                <a:latin typeface="Calibri"/>
+              </a:rPr>
+              <a:t>1</a:t>
+            </a:r>
+          </a:p>
+        </p:txBody>
+      </p:sp>
+      <p:sp>
+        <p:nvSpPr>
+          <p:cNvPr id="8" name="TextBox 7"/>
+          <p:cNvSpPr txBox="1"/>
+          <p:nvPr/>
+        </p:nvSpPr>
+        <p:spPr>
+          <a:xfrm>
+            <a:off x="1371600" y="1801368"/>
+            <a:ext cx="2509418" cy="512064"/>
           </a:xfrm>
           <a:prstGeom prst="rect">
             <a:avLst/>
@@ -6554,31 +9904,64 @@
           <a:p>
             <a:pPr algn="l"/>
             <a:r>
-              <a:rPr sz="2000" b="1" i="0">
-                <a:solidFill>
-                  <a:srgbClr val="FFFFFF"/>
-                </a:solidFill>
-                <a:latin typeface="Calibri"/>
-              </a:rPr>
-              <a:t>Application types</a:t>
-            </a:r>
-          </a:p>
-        </p:txBody>
-      </p:sp>
-      <p:sp>
-        <p:nvSpPr>
-          <p:cNvPr id="12" name="Rounded Rectangle 11"/>
+              <a:rPr sz="1900" b="1" i="0">
+                <a:solidFill>
+                  <a:srgbClr val="03306E"/>
+                </a:solidFill>
+                <a:latin typeface="Calibri"/>
+              </a:rPr>
+              <a:t>Desktops</a:t>
+            </a:r>
+          </a:p>
+        </p:txBody>
+      </p:sp>
+      <p:sp>
+        <p:nvSpPr>
+          <p:cNvPr id="9" name="TextBox 8"/>
+          <p:cNvSpPr txBox="1"/>
+          <p:nvPr/>
+        </p:nvSpPr>
+        <p:spPr>
+          <a:xfrm>
+            <a:off x="777240" y="2468880"/>
+            <a:ext cx="3058058" cy="1143000"/>
+          </a:xfrm>
+          <a:prstGeom prst="rect">
+            <a:avLst/>
+          </a:prstGeom>
+          <a:noFill/>
+        </p:spPr>
+        <p:txBody>
+          <a:bodyPr wrap="square" anchor="t" lIns="0" rIns="0" tIns="0" bIns="0"/>
+          <a:lstStyle/>
+          <a:p>
+            <a:pPr algn="l"/>
+            <a:r>
+              <a:rPr sz="1900" b="0" i="0">
+                <a:solidFill>
+                  <a:srgbClr val="202122"/>
+                </a:solidFill>
+                <a:latin typeface="Calibri"/>
+              </a:rPr>
+              <a:t>Thick clients that process locally, or thin clients that rely on a server.</a:t>
+            </a:r>
+          </a:p>
+        </p:txBody>
+      </p:sp>
+      <p:sp>
+        <p:nvSpPr>
+          <p:cNvPr id="10" name="Rounded Rectangle 9"/>
           <p:cNvSpPr/>
           <p:nvPr/>
         </p:nvSpPr>
         <p:spPr>
           <a:xfrm>
-            <a:off x="6278727" y="2377440"/>
-            <a:ext cx="5364327" cy="3794760"/>
+            <a:off x="4338218" y="1600200"/>
+            <a:ext cx="3515258" cy="2148840"/>
           </a:xfrm>
           <a:prstGeom prst="roundRect">
             <a:avLst>
-              <a:gd name="adj" fmla="val 4000"/>
+              <a:gd name="adj" fmla="val 6000"/>
             </a:avLst>
           </a:prstGeom>
           <a:solidFill>
@@ -6611,164 +9994,608 @@
       </p:sp>
       <p:sp>
         <p:nvSpPr>
+          <p:cNvPr id="11" name="Oval 10"/>
+          <p:cNvSpPr/>
+          <p:nvPr/>
+        </p:nvSpPr>
+        <p:spPr>
+          <a:xfrm>
+            <a:off x="4566818" y="1828800"/>
+            <a:ext cx="457200" cy="457200"/>
+          </a:xfrm>
+          <a:prstGeom prst="ellipse">
+            <a:avLst/>
+          </a:prstGeom>
+          <a:solidFill>
+            <a:srgbClr val="4EA1FF"/>
+          </a:solidFill>
+          <a:ln>
+            <a:noFill/>
+          </a:ln>
+          <a:effectLst/>
+        </p:spPr>
+        <p:style>
+          <a:lnRef idx="1">
+            <a:schemeClr val="accent1"/>
+          </a:lnRef>
+          <a:fillRef idx="3">
+            <a:schemeClr val="accent1"/>
+          </a:fillRef>
+          <a:effectRef idx="2">
+            <a:schemeClr val="accent1"/>
+          </a:effectRef>
+          <a:fontRef idx="minor">
+            <a:schemeClr val="lt1"/>
+          </a:fontRef>
+        </p:style>
+        <p:txBody>
+          <a:bodyPr rtlCol="0" anchor="ctr" lIns="0" rIns="0" tIns="0" bIns="0"/>
+          <a:lstStyle/>
+          <a:p>
+            <a:pPr algn="ctr"/>
+            <a:r>
+              <a:rPr sz="1500" b="1">
+                <a:solidFill>
+                  <a:srgbClr val="202122"/>
+                </a:solidFill>
+                <a:latin typeface="Calibri"/>
+              </a:rPr>
+              <a:t>2</a:t>
+            </a:r>
+          </a:p>
+        </p:txBody>
+      </p:sp>
+      <p:sp>
+        <p:nvSpPr>
+          <p:cNvPr id="12" name="TextBox 11"/>
+          <p:cNvSpPr txBox="1"/>
+          <p:nvPr/>
+        </p:nvSpPr>
+        <p:spPr>
+          <a:xfrm>
+            <a:off x="5161178" y="1801368"/>
+            <a:ext cx="2509418" cy="512064"/>
+          </a:xfrm>
+          <a:prstGeom prst="rect">
+            <a:avLst/>
+          </a:prstGeom>
+          <a:noFill/>
+        </p:spPr>
+        <p:txBody>
+          <a:bodyPr wrap="square" anchor="ctr" lIns="0" rIns="0" tIns="0" bIns="0"/>
+          <a:lstStyle/>
+          <a:p>
+            <a:pPr algn="l"/>
+            <a:r>
+              <a:rPr sz="1900" b="1" i="0">
+                <a:solidFill>
+                  <a:srgbClr val="03306E"/>
+                </a:solidFill>
+                <a:latin typeface="Calibri"/>
+              </a:rPr>
+              <a:t>Cloud workspaces</a:t>
+            </a:r>
+          </a:p>
+        </p:txBody>
+      </p:sp>
+      <p:sp>
+        <p:nvSpPr>
           <p:cNvPr id="13" name="TextBox 12"/>
           <p:cNvSpPr txBox="1"/>
           <p:nvPr/>
         </p:nvSpPr>
         <p:spPr>
           <a:xfrm>
-            <a:off x="6553047" y="2606040"/>
-            <a:ext cx="4815687" cy="3337560"/>
-          </a:xfrm>
-          <a:prstGeom prst="rect">
-            <a:avLst/>
-          </a:prstGeom>
-          <a:noFill/>
-        </p:spPr>
-        <p:txBody>
-          <a:bodyPr wrap="square" lIns="0" rIns="0" tIns="0" bIns="0">
-            <a:spAutoFit/>
-          </a:bodyPr>
-          <a:lstStyle/>
-          <a:p>
-            <a:pPr marL="274320" indent="-274320">
-              <a:spcAft>
-                <a:spcPts val="945"/>
-              </a:spcAft>
-              <a:buClr>
-                <a:srgbClr val="0645AD"/>
-              </a:buClr>
-              <a:buFont typeface="Arial"/>
-              <a:buChar char="•"/>
-            </a:pPr>
-            <a:r>
-              <a:rPr sz="2100" b="1">
+            <a:off x="4566818" y="2468880"/>
+            <a:ext cx="3058058" cy="1143000"/>
+          </a:xfrm>
+          <a:prstGeom prst="rect">
+            <a:avLst/>
+          </a:prstGeom>
+          <a:noFill/>
+        </p:spPr>
+        <p:txBody>
+          <a:bodyPr wrap="square" anchor="t" lIns="0" rIns="0" tIns="0" bIns="0"/>
+          <a:lstStyle/>
+          <a:p>
+            <a:pPr algn="l"/>
+            <a:r>
+              <a:rPr sz="2000" b="0" i="0">
                 <a:solidFill>
                   <a:srgbClr val="202122"/>
                 </a:solidFill>
                 <a:latin typeface="Calibri"/>
               </a:rPr>
-              <a:t>Productivity:</a:t>
-            </a:r>
-            <a:r>
-              <a:rPr sz="2100" b="0">
+              <a:t>Free or licensed online desktops.</a:t>
+            </a:r>
+          </a:p>
+        </p:txBody>
+      </p:sp>
+      <p:sp>
+        <p:nvSpPr>
+          <p:cNvPr id="14" name="Rounded Rectangle 13"/>
+          <p:cNvSpPr/>
+          <p:nvPr/>
+        </p:nvSpPr>
+        <p:spPr>
+          <a:xfrm>
+            <a:off x="8127796" y="1600200"/>
+            <a:ext cx="3515258" cy="2148840"/>
+          </a:xfrm>
+          <a:prstGeom prst="roundRect">
+            <a:avLst>
+              <a:gd name="adj" fmla="val 6000"/>
+            </a:avLst>
+          </a:prstGeom>
+          <a:solidFill>
+            <a:srgbClr val="EAF3FF"/>
+          </a:solidFill>
+          <a:ln>
+            <a:noFill/>
+          </a:ln>
+          <a:effectLst/>
+        </p:spPr>
+        <p:style>
+          <a:lnRef idx="1">
+            <a:schemeClr val="accent1"/>
+          </a:lnRef>
+          <a:fillRef idx="3">
+            <a:schemeClr val="accent1"/>
+          </a:fillRef>
+          <a:effectRef idx="2">
+            <a:schemeClr val="accent1"/>
+          </a:effectRef>
+          <a:fontRef idx="minor">
+            <a:schemeClr val="lt1"/>
+          </a:fontRef>
+        </p:style>
+        <p:txBody>
+          <a:bodyPr rtlCol="0" anchor="ctr"/>
+          <a:lstStyle/>
+          <a:p/>
+        </p:txBody>
+      </p:sp>
+      <p:sp>
+        <p:nvSpPr>
+          <p:cNvPr id="15" name="Oval 14"/>
+          <p:cNvSpPr/>
+          <p:nvPr/>
+        </p:nvSpPr>
+        <p:spPr>
+          <a:xfrm>
+            <a:off x="8356396" y="1828800"/>
+            <a:ext cx="457200" cy="457200"/>
+          </a:xfrm>
+          <a:prstGeom prst="ellipse">
+            <a:avLst/>
+          </a:prstGeom>
+          <a:solidFill>
+            <a:srgbClr val="4EA1FF"/>
+          </a:solidFill>
+          <a:ln>
+            <a:noFill/>
+          </a:ln>
+          <a:effectLst/>
+        </p:spPr>
+        <p:style>
+          <a:lnRef idx="1">
+            <a:schemeClr val="accent1"/>
+          </a:lnRef>
+          <a:fillRef idx="3">
+            <a:schemeClr val="accent1"/>
+          </a:fillRef>
+          <a:effectRef idx="2">
+            <a:schemeClr val="accent1"/>
+          </a:effectRef>
+          <a:fontRef idx="minor">
+            <a:schemeClr val="lt1"/>
+          </a:fontRef>
+        </p:style>
+        <p:txBody>
+          <a:bodyPr rtlCol="0" anchor="ctr" lIns="0" rIns="0" tIns="0" bIns="0"/>
+          <a:lstStyle/>
+          <a:p>
+            <a:pPr algn="ctr"/>
+            <a:r>
+              <a:rPr sz="1500" b="1">
                 <a:solidFill>
                   <a:srgbClr val="202122"/>
                 </a:solidFill>
                 <a:latin typeface="Calibri"/>
               </a:rPr>
-              <a:t> word processing, spreadsheets, diagrams</a:t>
-            </a:r>
-          </a:p>
-          <a:p>
-            <a:pPr marL="274320" indent="-274320">
-              <a:spcAft>
-                <a:spcPts val="945"/>
-              </a:spcAft>
-              <a:buClr>
-                <a:srgbClr val="0645AD"/>
-              </a:buClr>
-              <a:buFont typeface="Arial"/>
-              <a:buChar char="•"/>
-            </a:pPr>
-            <a:r>
-              <a:rPr sz="2100" b="0">
+              <a:t>3</a:t>
+            </a:r>
+          </a:p>
+        </p:txBody>
+      </p:sp>
+      <p:sp>
+        <p:nvSpPr>
+          <p:cNvPr id="16" name="TextBox 15"/>
+          <p:cNvSpPr txBox="1"/>
+          <p:nvPr/>
+        </p:nvSpPr>
+        <p:spPr>
+          <a:xfrm>
+            <a:off x="8950756" y="1801368"/>
+            <a:ext cx="2509418" cy="512064"/>
+          </a:xfrm>
+          <a:prstGeom prst="rect">
+            <a:avLst/>
+          </a:prstGeom>
+          <a:noFill/>
+        </p:spPr>
+        <p:txBody>
+          <a:bodyPr wrap="square" anchor="ctr" lIns="0" rIns="0" tIns="0" bIns="0"/>
+          <a:lstStyle/>
+          <a:p>
+            <a:pPr algn="l"/>
+            <a:r>
+              <a:rPr sz="1900" b="1" i="0">
+                <a:solidFill>
+                  <a:srgbClr val="03306E"/>
+                </a:solidFill>
+                <a:latin typeface="Calibri"/>
+              </a:rPr>
+              <a:t>Mobile devices</a:t>
+            </a:r>
+          </a:p>
+        </p:txBody>
+      </p:sp>
+      <p:sp>
+        <p:nvSpPr>
+          <p:cNvPr id="17" name="TextBox 16"/>
+          <p:cNvSpPr txBox="1"/>
+          <p:nvPr/>
+        </p:nvSpPr>
+        <p:spPr>
+          <a:xfrm>
+            <a:off x="8356396" y="2468880"/>
+            <a:ext cx="3058058" cy="1143000"/>
+          </a:xfrm>
+          <a:prstGeom prst="rect">
+            <a:avLst/>
+          </a:prstGeom>
+          <a:noFill/>
+        </p:spPr>
+        <p:txBody>
+          <a:bodyPr wrap="square" anchor="t" lIns="0" rIns="0" tIns="0" bIns="0"/>
+          <a:lstStyle/>
+          <a:p>
+            <a:pPr algn="l"/>
+            <a:r>
+              <a:rPr sz="2000" b="0" i="0">
                 <a:solidFill>
                   <a:srgbClr val="202122"/>
                 </a:solidFill>
                 <a:latin typeface="Calibri"/>
               </a:rPr>
-              <a:t>Web browsers</a:t>
-            </a:r>
-          </a:p>
-          <a:p>
-            <a:pPr marL="274320" indent="-274320">
-              <a:spcAft>
-                <a:spcPts val="945"/>
-              </a:spcAft>
-              <a:buClr>
-                <a:srgbClr val="0645AD"/>
-              </a:buClr>
-              <a:buFont typeface="Arial"/>
-              <a:buChar char="•"/>
-            </a:pPr>
-            <a:r>
-              <a:rPr sz="2100" b="1">
+              <a:t>Tablets, smartphones, wearables, e-readers.</a:t>
+            </a:r>
+          </a:p>
+        </p:txBody>
+      </p:sp>
+      <p:sp>
+        <p:nvSpPr>
+          <p:cNvPr id="18" name="Rounded Rectangle 17"/>
+          <p:cNvSpPr/>
+          <p:nvPr/>
+        </p:nvSpPr>
+        <p:spPr>
+          <a:xfrm>
+            <a:off x="548640" y="4023360"/>
+            <a:ext cx="3515258" cy="2148840"/>
+          </a:xfrm>
+          <a:prstGeom prst="roundRect">
+            <a:avLst>
+              <a:gd name="adj" fmla="val 6000"/>
+            </a:avLst>
+          </a:prstGeom>
+          <a:solidFill>
+            <a:srgbClr val="EAF3FF"/>
+          </a:solidFill>
+          <a:ln>
+            <a:noFill/>
+          </a:ln>
+          <a:effectLst/>
+        </p:spPr>
+        <p:style>
+          <a:lnRef idx="1">
+            <a:schemeClr val="accent1"/>
+          </a:lnRef>
+          <a:fillRef idx="3">
+            <a:schemeClr val="accent1"/>
+          </a:fillRef>
+          <a:effectRef idx="2">
+            <a:schemeClr val="accent1"/>
+          </a:effectRef>
+          <a:fontRef idx="minor">
+            <a:schemeClr val="lt1"/>
+          </a:fontRef>
+        </p:style>
+        <p:txBody>
+          <a:bodyPr rtlCol="0" anchor="ctr"/>
+          <a:lstStyle/>
+          <a:p/>
+        </p:txBody>
+      </p:sp>
+      <p:sp>
+        <p:nvSpPr>
+          <p:cNvPr id="19" name="Oval 18"/>
+          <p:cNvSpPr/>
+          <p:nvPr/>
+        </p:nvSpPr>
+        <p:spPr>
+          <a:xfrm>
+            <a:off x="777240" y="4251960"/>
+            <a:ext cx="457200" cy="457200"/>
+          </a:xfrm>
+          <a:prstGeom prst="ellipse">
+            <a:avLst/>
+          </a:prstGeom>
+          <a:solidFill>
+            <a:srgbClr val="4EA1FF"/>
+          </a:solidFill>
+          <a:ln>
+            <a:noFill/>
+          </a:ln>
+          <a:effectLst/>
+        </p:spPr>
+        <p:style>
+          <a:lnRef idx="1">
+            <a:schemeClr val="accent1"/>
+          </a:lnRef>
+          <a:fillRef idx="3">
+            <a:schemeClr val="accent1"/>
+          </a:fillRef>
+          <a:effectRef idx="2">
+            <a:schemeClr val="accent1"/>
+          </a:effectRef>
+          <a:fontRef idx="minor">
+            <a:schemeClr val="lt1"/>
+          </a:fontRef>
+        </p:style>
+        <p:txBody>
+          <a:bodyPr rtlCol="0" anchor="ctr" lIns="0" rIns="0" tIns="0" bIns="0"/>
+          <a:lstStyle/>
+          <a:p>
+            <a:pPr algn="ctr"/>
+            <a:r>
+              <a:rPr sz="1500" b="1">
                 <a:solidFill>
                   <a:srgbClr val="202122"/>
                 </a:solidFill>
                 <a:latin typeface="Calibri"/>
               </a:rPr>
-              <a:t>Collaboration:</a:t>
-            </a:r>
-            <a:r>
-              <a:rPr sz="2100" b="0">
+              <a:t>4</a:t>
+            </a:r>
+          </a:p>
+        </p:txBody>
+      </p:sp>
+      <p:sp>
+        <p:nvSpPr>
+          <p:cNvPr id="20" name="TextBox 19"/>
+          <p:cNvSpPr txBox="1"/>
+          <p:nvPr/>
+        </p:nvSpPr>
+        <p:spPr>
+          <a:xfrm>
+            <a:off x="1371600" y="4224528"/>
+            <a:ext cx="2509418" cy="512064"/>
+          </a:xfrm>
+          <a:prstGeom prst="rect">
+            <a:avLst/>
+          </a:prstGeom>
+          <a:noFill/>
+        </p:spPr>
+        <p:txBody>
+          <a:bodyPr wrap="square" anchor="ctr" lIns="0" rIns="0" tIns="0" bIns="0"/>
+          <a:lstStyle/>
+          <a:p>
+            <a:pPr algn="l"/>
+            <a:r>
+              <a:rPr sz="1900" b="1" i="0">
+                <a:solidFill>
+                  <a:srgbClr val="03306E"/>
+                </a:solidFill>
+                <a:latin typeface="Calibri"/>
+              </a:rPr>
+              <a:t>Peripherals</a:t>
+            </a:r>
+          </a:p>
+        </p:txBody>
+      </p:sp>
+      <p:sp>
+        <p:nvSpPr>
+          <p:cNvPr id="21" name="TextBox 20"/>
+          <p:cNvSpPr txBox="1"/>
+          <p:nvPr/>
+        </p:nvSpPr>
+        <p:spPr>
+          <a:xfrm>
+            <a:off x="777240" y="4892040"/>
+            <a:ext cx="3058058" cy="1143000"/>
+          </a:xfrm>
+          <a:prstGeom prst="rect">
+            <a:avLst/>
+          </a:prstGeom>
+          <a:noFill/>
+        </p:spPr>
+        <p:txBody>
+          <a:bodyPr wrap="square" anchor="t" lIns="0" rIns="0" tIns="0" bIns="0"/>
+          <a:lstStyle/>
+          <a:p>
+            <a:pPr algn="l"/>
+            <a:r>
+              <a:rPr sz="2000" b="0" i="0">
                 <a:solidFill>
                   <a:srgbClr val="202122"/>
                 </a:solidFill>
                 <a:latin typeface="Calibri"/>
               </a:rPr>
-              <a:t> email, conferencing, VoIP, chat</a:t>
-            </a:r>
-          </a:p>
-          <a:p>
-            <a:pPr marL="274320" indent="-274320">
-              <a:spcAft>
-                <a:spcPts val="945"/>
-              </a:spcAft>
-              <a:buClr>
-                <a:srgbClr val="0645AD"/>
-              </a:buClr>
-              <a:buFont typeface="Arial"/>
-              <a:buChar char="•"/>
-            </a:pPr>
-            <a:r>
-              <a:rPr sz="2100" b="1">
+              <a:t>Keyboards, monitors, printers, projectors, card readers, drives.</a:t>
+            </a:r>
+          </a:p>
+        </p:txBody>
+      </p:sp>
+      <p:sp>
+        <p:nvSpPr>
+          <p:cNvPr id="22" name="Rounded Rectangle 21"/>
+          <p:cNvSpPr/>
+          <p:nvPr/>
+        </p:nvSpPr>
+        <p:spPr>
+          <a:xfrm>
+            <a:off x="4338218" y="4023360"/>
+            <a:ext cx="3515258" cy="2148840"/>
+          </a:xfrm>
+          <a:prstGeom prst="roundRect">
+            <a:avLst>
+              <a:gd name="adj" fmla="val 6000"/>
+            </a:avLst>
+          </a:prstGeom>
+          <a:solidFill>
+            <a:srgbClr val="EAF3FF"/>
+          </a:solidFill>
+          <a:ln>
+            <a:noFill/>
+          </a:ln>
+          <a:effectLst/>
+        </p:spPr>
+        <p:style>
+          <a:lnRef idx="1">
+            <a:schemeClr val="accent1"/>
+          </a:lnRef>
+          <a:fillRef idx="3">
+            <a:schemeClr val="accent1"/>
+          </a:fillRef>
+          <a:effectRef idx="2">
+            <a:schemeClr val="accent1"/>
+          </a:effectRef>
+          <a:fontRef idx="minor">
+            <a:schemeClr val="lt1"/>
+          </a:fontRef>
+        </p:style>
+        <p:txBody>
+          <a:bodyPr rtlCol="0" anchor="ctr"/>
+          <a:lstStyle/>
+          <a:p/>
+        </p:txBody>
+      </p:sp>
+      <p:sp>
+        <p:nvSpPr>
+          <p:cNvPr id="23" name="Oval 22"/>
+          <p:cNvSpPr/>
+          <p:nvPr/>
+        </p:nvSpPr>
+        <p:spPr>
+          <a:xfrm>
+            <a:off x="4566818" y="4251960"/>
+            <a:ext cx="457200" cy="457200"/>
+          </a:xfrm>
+          <a:prstGeom prst="ellipse">
+            <a:avLst/>
+          </a:prstGeom>
+          <a:solidFill>
+            <a:srgbClr val="4EA1FF"/>
+          </a:solidFill>
+          <a:ln>
+            <a:noFill/>
+          </a:ln>
+          <a:effectLst/>
+        </p:spPr>
+        <p:style>
+          <a:lnRef idx="1">
+            <a:schemeClr val="accent1"/>
+          </a:lnRef>
+          <a:fillRef idx="3">
+            <a:schemeClr val="accent1"/>
+          </a:fillRef>
+          <a:effectRef idx="2">
+            <a:schemeClr val="accent1"/>
+          </a:effectRef>
+          <a:fontRef idx="minor">
+            <a:schemeClr val="lt1"/>
+          </a:fontRef>
+        </p:style>
+        <p:txBody>
+          <a:bodyPr rtlCol="0" anchor="ctr" lIns="0" rIns="0" tIns="0" bIns="0"/>
+          <a:lstStyle/>
+          <a:p>
+            <a:pPr algn="ctr"/>
+            <a:r>
+              <a:rPr sz="1500" b="1">
                 <a:solidFill>
                   <a:srgbClr val="202122"/>
                 </a:solidFill>
                 <a:latin typeface="Calibri"/>
               </a:rPr>
-              <a:t>Business:</a:t>
-            </a:r>
-            <a:r>
-              <a:rPr sz="2100" b="0">
+              <a:t>5</a:t>
+            </a:r>
+          </a:p>
+        </p:txBody>
+      </p:sp>
+      <p:sp>
+        <p:nvSpPr>
+          <p:cNvPr id="24" name="TextBox 23"/>
+          <p:cNvSpPr txBox="1"/>
+          <p:nvPr/>
+        </p:nvSpPr>
+        <p:spPr>
+          <a:xfrm>
+            <a:off x="5161178" y="4224528"/>
+            <a:ext cx="2509418" cy="512064"/>
+          </a:xfrm>
+          <a:prstGeom prst="rect">
+            <a:avLst/>
+          </a:prstGeom>
+          <a:noFill/>
+        </p:spPr>
+        <p:txBody>
+          <a:bodyPr wrap="square" anchor="ctr" lIns="0" rIns="0" tIns="0" bIns="0"/>
+          <a:lstStyle/>
+          <a:p>
+            <a:pPr algn="l"/>
+            <a:r>
+              <a:rPr sz="1900" b="1" i="0">
+                <a:solidFill>
+                  <a:srgbClr val="03306E"/>
+                </a:solidFill>
+                <a:latin typeface="Calibri"/>
+              </a:rPr>
+              <a:t>IoT</a:t>
+            </a:r>
+          </a:p>
+        </p:txBody>
+      </p:sp>
+      <p:sp>
+        <p:nvSpPr>
+          <p:cNvPr id="25" name="TextBox 24"/>
+          <p:cNvSpPr txBox="1"/>
+          <p:nvPr/>
+        </p:nvSpPr>
+        <p:spPr>
+          <a:xfrm>
+            <a:off x="4566818" y="4892040"/>
+            <a:ext cx="3058058" cy="1143000"/>
+          </a:xfrm>
+          <a:prstGeom prst="rect">
+            <a:avLst/>
+          </a:prstGeom>
+          <a:noFill/>
+        </p:spPr>
+        <p:txBody>
+          <a:bodyPr wrap="square" anchor="t" lIns="0" rIns="0" tIns="0" bIns="0"/>
+          <a:lstStyle/>
+          <a:p>
+            <a:pPr algn="l"/>
+            <a:r>
+              <a:rPr sz="1900" b="0" i="0">
                 <a:solidFill>
                   <a:srgbClr val="202122"/>
                 </a:solidFill>
                 <a:latin typeface="Calibri"/>
               </a:rPr>
-              <a:t> databases, CRM, ticketing, accounting</a:t>
-            </a:r>
-          </a:p>
-          <a:p>
-            <a:pPr marL="274320" indent="-274320">
-              <a:spcAft>
-                <a:spcPts val="945"/>
-              </a:spcAft>
-              <a:buClr>
-                <a:srgbClr val="0645AD"/>
-              </a:buClr>
-              <a:buFont typeface="Arial"/>
-              <a:buChar char="•"/>
-            </a:pPr>
-            <a:r>
-              <a:rPr sz="2100" b="1">
-                <a:solidFill>
-                  <a:srgbClr val="202122"/>
-                </a:solidFill>
-                <a:latin typeface="Calibri"/>
-              </a:rPr>
-              <a:t>Development:</a:t>
-            </a:r>
-            <a:r>
-              <a:rPr sz="2100" b="0">
-                <a:solidFill>
-                  <a:srgbClr val="202122"/>
-                </a:solidFill>
-                <a:latin typeface="Calibri"/>
-              </a:rPr>
-              <a:t> CAD, IDE</a:t>
+              <a:t>Smart building alarms, meters and lighting; smart TVs; autonomous vehicles.</a:t>
             </a:r>
           </a:p>
         </p:txBody>
@@ -6860,7 +10687,7 @@
                 </a:solidFill>
                 <a:latin typeface="Cambria"/>
               </a:rPr>
-              <a:t>Checking requirements: storage</a:t>
+              <a:t>Quick check: End-user devices</a:t>
             </a:r>
           </a:p>
         </p:txBody>
@@ -6933,22 +10760,20 @@
       </p:sp>
       <p:sp>
         <p:nvSpPr>
-          <p:cNvPr id="6" name="Rounded Rectangle 5"/>
+          <p:cNvPr id="6" name="Oval 5"/>
           <p:cNvSpPr/>
           <p:nvPr/>
         </p:nvSpPr>
         <p:spPr>
           <a:xfrm>
-            <a:off x="548640" y="1600200"/>
-            <a:ext cx="5364327" cy="640080"/>
-          </a:xfrm>
-          <a:prstGeom prst="roundRect">
-            <a:avLst>
-              <a:gd name="adj" fmla="val 15000"/>
-            </a:avLst>
+            <a:off x="548640" y="1691640"/>
+            <a:ext cx="502920" cy="502920"/>
+          </a:xfrm>
+          <a:prstGeom prst="ellipse">
+            <a:avLst/>
           </a:prstGeom>
           <a:solidFill>
-            <a:srgbClr val="03306E"/>
+            <a:srgbClr val="4EA1FF"/>
           </a:solidFill>
           <a:ln>
             <a:noFill/>
@@ -6970,9 +10795,20 @@
           </a:fontRef>
         </p:style>
         <p:txBody>
-          <a:bodyPr rtlCol="0" anchor="ctr"/>
-          <a:lstStyle/>
-          <a:p/>
+          <a:bodyPr rtlCol="0" anchor="ctr" lIns="0" rIns="0" tIns="0" bIns="0"/>
+          <a:lstStyle/>
+          <a:p>
+            <a:pPr algn="ctr"/>
+            <a:r>
+              <a:rPr sz="1600" b="1">
+                <a:solidFill>
+                  <a:srgbClr val="202122"/>
+                </a:solidFill>
+                <a:latin typeface="Calibri"/>
+              </a:rPr>
+              <a:t>1</a:t>
+            </a:r>
+          </a:p>
         </p:txBody>
       </p:sp>
       <p:sp>
@@ -6983,49 +10819,47 @@
         </p:nvSpPr>
         <p:spPr>
           <a:xfrm>
-            <a:off x="777240" y="1600200"/>
-            <a:ext cx="4907127" cy="640080"/>
-          </a:xfrm>
-          <a:prstGeom prst="rect">
-            <a:avLst/>
-          </a:prstGeom>
-          <a:noFill/>
-        </p:spPr>
-        <p:txBody>
-          <a:bodyPr wrap="square" anchor="ctr" lIns="0" rIns="0" tIns="0" bIns="0"/>
+            <a:off x="1371600" y="1645920"/>
+            <a:ext cx="10271455" cy="1188720"/>
+          </a:xfrm>
+          <a:prstGeom prst="rect">
+            <a:avLst/>
+          </a:prstGeom>
+          <a:noFill/>
+        </p:spPr>
+        <p:txBody>
+          <a:bodyPr wrap="square" anchor="t" lIns="0" rIns="0" tIns="0" bIns="0"/>
           <a:lstStyle/>
           <a:p>
             <a:pPr algn="l"/>
             <a:r>
-              <a:rPr sz="2000" b="1" i="0">
-                <a:solidFill>
-                  <a:srgbClr val="FFFFFF"/>
-                </a:solidFill>
-                <a:latin typeface="Calibri"/>
-              </a:rPr>
-              <a:t>HDD</a:t>
-            </a:r>
-          </a:p>
-        </p:txBody>
-      </p:sp>
-      <p:sp>
-        <p:nvSpPr>
-          <p:cNvPr id="8" name="Rounded Rectangle 7"/>
+              <a:rPr sz="2400" b="0" i="0">
+                <a:solidFill>
+                  <a:srgbClr val="202122"/>
+                </a:solidFill>
+                <a:latin typeface="Calibri"/>
+              </a:rPr>
+              <a:t>What is a thin client?</a:t>
+            </a:r>
+          </a:p>
+        </p:txBody>
+      </p:sp>
+      <p:sp>
+        <p:nvSpPr>
+          <p:cNvPr id="8" name="Oval 7"/>
           <p:cNvSpPr/>
           <p:nvPr/>
         </p:nvSpPr>
         <p:spPr>
           <a:xfrm>
-            <a:off x="548640" y="2377440"/>
-            <a:ext cx="5364327" cy="3794760"/>
-          </a:xfrm>
-          <a:prstGeom prst="roundRect">
-            <a:avLst>
-              <a:gd name="adj" fmla="val 4000"/>
-            </a:avLst>
+            <a:off x="548640" y="3108960"/>
+            <a:ext cx="502920" cy="502920"/>
+          </a:xfrm>
+          <a:prstGeom prst="ellipse">
+            <a:avLst/>
           </a:prstGeom>
           <a:solidFill>
-            <a:srgbClr val="EAF3FF"/>
+            <a:srgbClr val="4EA1FF"/>
           </a:solidFill>
           <a:ln>
             <a:noFill/>
@@ -7047,9 +10881,20 @@
           </a:fontRef>
         </p:style>
         <p:txBody>
-          <a:bodyPr rtlCol="0" anchor="ctr"/>
-          <a:lstStyle/>
-          <a:p/>
+          <a:bodyPr rtlCol="0" anchor="ctr" lIns="0" rIns="0" tIns="0" bIns="0"/>
+          <a:lstStyle/>
+          <a:p>
+            <a:pPr algn="ctr"/>
+            <a:r>
+              <a:rPr sz="1600" b="1">
+                <a:solidFill>
+                  <a:srgbClr val="202122"/>
+                </a:solidFill>
+                <a:latin typeface="Calibri"/>
+              </a:rPr>
+              <a:t>2</a:t>
+            </a:r>
+          </a:p>
         </p:txBody>
       </p:sp>
       <p:sp>
@@ -7060,123 +10905,47 @@
         </p:nvSpPr>
         <p:spPr>
           <a:xfrm>
-            <a:off x="822959" y="2606040"/>
-            <a:ext cx="4815687" cy="3337560"/>
-          </a:xfrm>
-          <a:prstGeom prst="rect">
-            <a:avLst/>
-          </a:prstGeom>
-          <a:noFill/>
-        </p:spPr>
-        <p:txBody>
-          <a:bodyPr wrap="square" lIns="0" rIns="0" tIns="0" bIns="0">
-            <a:spAutoFit/>
-          </a:bodyPr>
-          <a:lstStyle/>
-          <a:p>
-            <a:pPr marL="274320" indent="-274320">
-              <a:spcAft>
-                <a:spcPts val="990"/>
-              </a:spcAft>
-              <a:buClr>
-                <a:srgbClr val="0645AD"/>
-              </a:buClr>
-              <a:buFont typeface="Arial"/>
-              <a:buChar char="•"/>
-            </a:pPr>
-            <a:r>
-              <a:rPr sz="2200" b="0">
+            <a:off x="1371600" y="3063240"/>
+            <a:ext cx="10271455" cy="1188720"/>
+          </a:xfrm>
+          <a:prstGeom prst="rect">
+            <a:avLst/>
+          </a:prstGeom>
+          <a:noFill/>
+        </p:spPr>
+        <p:txBody>
+          <a:bodyPr wrap="square" anchor="t" lIns="0" rIns="0" tIns="0" bIns="0"/>
+          <a:lstStyle/>
+          <a:p>
+            <a:pPr algn="l"/>
+            <a:r>
+              <a:rPr sz="2400" b="0" i="0">
                 <a:solidFill>
                   <a:srgbClr val="202122"/>
                 </a:solidFill>
                 <a:latin typeface="Calibri"/>
               </a:rPr>
-              <a:t>Cheap per gigabyte</a:t>
-            </a:r>
-          </a:p>
-          <a:p>
-            <a:pPr marL="274320" indent="-274320">
-              <a:spcAft>
-                <a:spcPts val="990"/>
-              </a:spcAft>
-              <a:buClr>
-                <a:srgbClr val="0645AD"/>
-              </a:buClr>
-              <a:buFont typeface="Arial"/>
-              <a:buChar char="•"/>
-            </a:pPr>
-            <a:r>
-              <a:rPr sz="2200" b="0">
-                <a:solidFill>
-                  <a:srgbClr val="202122"/>
-                </a:solidFill>
-                <a:latin typeface="Calibri"/>
-              </a:rPr>
-              <a:t>Large capacity</a:t>
-            </a:r>
-          </a:p>
-          <a:p>
-            <a:pPr marL="274320" indent="-274320">
-              <a:spcAft>
-                <a:spcPts val="990"/>
-              </a:spcAft>
-              <a:buClr>
-                <a:srgbClr val="0645AD"/>
-              </a:buClr>
-              <a:buFont typeface="Arial"/>
-              <a:buChar char="•"/>
-            </a:pPr>
-            <a:r>
-              <a:rPr sz="2200" b="0">
-                <a:solidFill>
-                  <a:srgbClr val="202122"/>
-                </a:solidFill>
-                <a:latin typeface="Calibri"/>
-              </a:rPr>
-              <a:t>Moving parts can break</a:t>
-            </a:r>
-          </a:p>
-          <a:p>
-            <a:pPr marL="274320" indent="-274320">
-              <a:spcAft>
-                <a:spcPts val="990"/>
-              </a:spcAft>
-              <a:buClr>
-                <a:srgbClr val="0645AD"/>
-              </a:buClr>
-              <a:buFont typeface="Arial"/>
-              <a:buChar char="•"/>
-            </a:pPr>
-            <a:r>
-              <a:rPr sz="2200" b="0">
-                <a:solidFill>
-                  <a:srgbClr val="202122"/>
-                </a:solidFill>
-                <a:latin typeface="Calibri"/>
-              </a:rPr>
-              <a:t>Can overheat</a:t>
-            </a:r>
-          </a:p>
-        </p:txBody>
-      </p:sp>
-      <p:sp>
-        <p:nvSpPr>
-          <p:cNvPr id="10" name="Rounded Rectangle 9"/>
+              <a:t>Give two examples of IoT devices in a building.</a:t>
+            </a:r>
+          </a:p>
+        </p:txBody>
+      </p:sp>
+      <p:sp>
+        <p:nvSpPr>
+          <p:cNvPr id="10" name="Oval 9"/>
           <p:cNvSpPr/>
           <p:nvPr/>
         </p:nvSpPr>
         <p:spPr>
           <a:xfrm>
-            <a:off x="6278727" y="1600200"/>
-            <a:ext cx="5364327" cy="640080"/>
-          </a:xfrm>
-          <a:prstGeom prst="roundRect">
-            <a:avLst>
-              <a:gd name="adj" fmla="val 15000"/>
-            </a:avLst>
+            <a:off x="548640" y="4526280"/>
+            <a:ext cx="502920" cy="502920"/>
+          </a:xfrm>
+          <a:prstGeom prst="ellipse">
+            <a:avLst/>
           </a:prstGeom>
           <a:solidFill>
-            <a:srgbClr val="0645AD"/>
+            <a:srgbClr val="4EA1FF"/>
           </a:solidFill>
           <a:ln>
             <a:noFill/>
@@ -7198,9 +10967,20 @@
           </a:fontRef>
         </p:style>
         <p:txBody>
-          <a:bodyPr rtlCol="0" anchor="ctr"/>
-          <a:lstStyle/>
-          <a:p/>
+          <a:bodyPr rtlCol="0" anchor="ctr" lIns="0" rIns="0" tIns="0" bIns="0"/>
+          <a:lstStyle/>
+          <a:p>
+            <a:pPr algn="ctr"/>
+            <a:r>
+              <a:rPr sz="1600" b="1">
+                <a:solidFill>
+                  <a:srgbClr val="202122"/>
+                </a:solidFill>
+                <a:latin typeface="Calibri"/>
+              </a:rPr>
+              <a:t>3</a:t>
+            </a:r>
+          </a:p>
         </p:txBody>
       </p:sp>
       <p:sp>
@@ -7211,178 +10991,60 @@
         </p:nvSpPr>
         <p:spPr>
           <a:xfrm>
-            <a:off x="6507327" y="1600200"/>
-            <a:ext cx="4907127" cy="640080"/>
-          </a:xfrm>
-          <a:prstGeom prst="rect">
-            <a:avLst/>
-          </a:prstGeom>
-          <a:noFill/>
-        </p:spPr>
-        <p:txBody>
-          <a:bodyPr wrap="square" anchor="ctr" lIns="0" rIns="0" tIns="0" bIns="0"/>
+            <a:off x="1371600" y="4480560"/>
+            <a:ext cx="10271455" cy="1188720"/>
+          </a:xfrm>
+          <a:prstGeom prst="rect">
+            <a:avLst/>
+          </a:prstGeom>
+          <a:noFill/>
+        </p:spPr>
+        <p:txBody>
+          <a:bodyPr wrap="square" anchor="t" lIns="0" rIns="0" tIns="0" bIns="0"/>
           <a:lstStyle/>
           <a:p>
             <a:pPr algn="l"/>
             <a:r>
-              <a:rPr sz="2000" b="1" i="0">
-                <a:solidFill>
-                  <a:srgbClr val="FFFFFF"/>
-                </a:solidFill>
-                <a:latin typeface="Calibri"/>
-              </a:rPr>
-              <a:t>SSD</a:t>
-            </a:r>
-          </a:p>
-        </p:txBody>
-      </p:sp>
-      <p:sp>
-        <p:nvSpPr>
-          <p:cNvPr id="12" name="Rounded Rectangle 11"/>
-          <p:cNvSpPr/>
-          <p:nvPr/>
-        </p:nvSpPr>
-        <p:spPr>
-          <a:xfrm>
-            <a:off x="6278727" y="2377440"/>
-            <a:ext cx="5364327" cy="3794760"/>
-          </a:xfrm>
-          <a:prstGeom prst="roundRect">
-            <a:avLst>
-              <a:gd name="adj" fmla="val 4000"/>
-            </a:avLst>
-          </a:prstGeom>
-          <a:solidFill>
-            <a:srgbClr val="EAF3FF"/>
-          </a:solidFill>
-          <a:ln>
-            <a:noFill/>
-          </a:ln>
-          <a:effectLst/>
-        </p:spPr>
-        <p:style>
-          <a:lnRef idx="1">
-            <a:schemeClr val="accent1"/>
-          </a:lnRef>
-          <a:fillRef idx="3">
-            <a:schemeClr val="accent1"/>
-          </a:fillRef>
-          <a:effectRef idx="2">
-            <a:schemeClr val="accent1"/>
-          </a:effectRef>
-          <a:fontRef idx="minor">
-            <a:schemeClr val="lt1"/>
-          </a:fontRef>
-        </p:style>
-        <p:txBody>
-          <a:bodyPr rtlCol="0" anchor="ctr"/>
-          <a:lstStyle/>
-          <a:p/>
-        </p:txBody>
-      </p:sp>
-      <p:sp>
-        <p:nvSpPr>
-          <p:cNvPr id="13" name="TextBox 12"/>
-          <p:cNvSpPr txBox="1"/>
-          <p:nvPr/>
-        </p:nvSpPr>
-        <p:spPr>
-          <a:xfrm>
-            <a:off x="6553047" y="2606040"/>
-            <a:ext cx="4815687" cy="3337560"/>
-          </a:xfrm>
-          <a:prstGeom prst="rect">
-            <a:avLst/>
-          </a:prstGeom>
-          <a:noFill/>
-        </p:spPr>
-        <p:txBody>
-          <a:bodyPr wrap="square" lIns="0" rIns="0" tIns="0" bIns="0">
-            <a:spAutoFit/>
-          </a:bodyPr>
-          <a:lstStyle/>
-          <a:p>
-            <a:pPr marL="274320" indent="-274320">
-              <a:spcAft>
-                <a:spcPts val="990"/>
-              </a:spcAft>
-              <a:buClr>
-                <a:srgbClr val="0645AD"/>
-              </a:buClr>
-              <a:buFont typeface="Arial"/>
-              <a:buChar char="•"/>
-            </a:pPr>
-            <a:r>
-              <a:rPr sz="2200" b="0">
+              <a:rPr sz="2400" b="0" i="0">
                 <a:solidFill>
                   <a:srgbClr val="202122"/>
                 </a:solidFill>
                 <a:latin typeface="Calibri"/>
               </a:rPr>
-              <a:t>Much faster</a:t>
-            </a:r>
-          </a:p>
-          <a:p>
-            <a:pPr marL="274320" indent="-274320">
-              <a:spcAft>
-                <a:spcPts val="990"/>
-              </a:spcAft>
-              <a:buClr>
-                <a:srgbClr val="0645AD"/>
-              </a:buClr>
-              <a:buFont typeface="Arial"/>
-              <a:buChar char="•"/>
-            </a:pPr>
-            <a:r>
-              <a:rPr sz="2200" b="0">
-                <a:solidFill>
-                  <a:srgbClr val="202122"/>
-                </a:solidFill>
-                <a:latin typeface="Calibri"/>
-              </a:rPr>
-              <a:t>No moving parts</a:t>
-            </a:r>
-          </a:p>
-          <a:p>
-            <a:pPr marL="274320" indent="-274320">
-              <a:spcAft>
-                <a:spcPts val="990"/>
-              </a:spcAft>
-              <a:buClr>
-                <a:srgbClr val="0645AD"/>
-              </a:buClr>
-              <a:buFont typeface="Arial"/>
-              <a:buChar char="•"/>
-            </a:pPr>
-            <a:r>
-              <a:rPr sz="2200" b="0">
-                <a:solidFill>
-                  <a:srgbClr val="202122"/>
-                </a:solidFill>
-                <a:latin typeface="Calibri"/>
-              </a:rPr>
-              <a:t>Costs more per gigabyte</a:t>
-            </a:r>
-          </a:p>
-          <a:p>
-            <a:pPr marL="274320" indent="-274320">
-              <a:spcAft>
-                <a:spcPts val="990"/>
-              </a:spcAft>
-              <a:buClr>
-                <a:srgbClr val="0645AD"/>
-              </a:buClr>
-              <a:buFont typeface="Arial"/>
-              <a:buChar char="•"/>
-            </a:pPr>
-            <a:r>
-              <a:rPr sz="2200" b="0">
-                <a:solidFill>
-                  <a:srgbClr val="202122"/>
-                </a:solidFill>
-                <a:latin typeface="Calibri"/>
-              </a:rPr>
-              <a:t>Smaller, suits compact devices</a:t>
+              <a:t>What is a cloud workspace?</a:t>
+            </a:r>
+          </a:p>
+        </p:txBody>
+      </p:sp>
+      <p:sp>
+        <p:nvSpPr>
+          <p:cNvPr id="12" name="TextBox 11"/>
+          <p:cNvSpPr txBox="1"/>
+          <p:nvPr/>
+        </p:nvSpPr>
+        <p:spPr>
+          <a:xfrm>
+            <a:off x="548640" y="5852160"/>
+            <a:ext cx="11094415" cy="365760"/>
+          </a:xfrm>
+          <a:prstGeom prst="rect">
+            <a:avLst/>
+          </a:prstGeom>
+          <a:noFill/>
+        </p:spPr>
+        <p:txBody>
+          <a:bodyPr wrap="square" anchor="t" lIns="0" rIns="0" tIns="0" bIns="0"/>
+          <a:lstStyle/>
+          <a:p>
+            <a:pPr algn="l"/>
+            <a:r>
+              <a:rPr sz="1300" b="0" i="1">
+                <a:solidFill>
+                  <a:srgbClr val="54595D"/>
+                </a:solidFill>
+                <a:latin typeface="Calibri"/>
+              </a:rPr>
+              <a:t>Answer on mini whiteboards or in your book. Answers are in the speaker notes.</a:t>
             </a:r>
           </a:p>
         </p:txBody>
@@ -7474,7 +11136,7 @@
                 </a:solidFill>
                 <a:latin typeface="Cambria"/>
               </a:rPr>
-              <a:t>Installing an operating system</a:t>
+              <a:t>Operating systems and applications</a:t>
             </a:r>
           </a:p>
         </p:txBody>
@@ -7547,20 +11209,22 @@
       </p:sp>
       <p:sp>
         <p:nvSpPr>
-          <p:cNvPr id="6" name="Rectangle 5"/>
+          <p:cNvPr id="6" name="Rounded Rectangle 5"/>
           <p:cNvSpPr/>
           <p:nvPr/>
         </p:nvSpPr>
         <p:spPr>
           <a:xfrm>
-            <a:off x="1416024" y="2557272"/>
-            <a:ext cx="9359646" cy="36576"/>
-          </a:xfrm>
-          <a:prstGeom prst="rect">
-            <a:avLst/>
+            <a:off x="548640" y="1600200"/>
+            <a:ext cx="5364327" cy="640080"/>
+          </a:xfrm>
+          <a:prstGeom prst="roundRect">
+            <a:avLst>
+              <a:gd name="adj" fmla="val 15000"/>
+            </a:avLst>
           </a:prstGeom>
           <a:solidFill>
-            <a:srgbClr val="A9C8F0"/>
+            <a:srgbClr val="03306E"/>
           </a:solidFill>
           <a:ln>
             <a:noFill/>
@@ -7589,104 +11253,51 @@
       </p:sp>
       <p:sp>
         <p:nvSpPr>
-          <p:cNvPr id="7" name="Oval 6"/>
+          <p:cNvPr id="7" name="TextBox 6"/>
+          <p:cNvSpPr txBox="1"/>
+          <p:nvPr/>
+        </p:nvSpPr>
+        <p:spPr>
+          <a:xfrm>
+            <a:off x="777240" y="1600200"/>
+            <a:ext cx="4907127" cy="640080"/>
+          </a:xfrm>
+          <a:prstGeom prst="rect">
+            <a:avLst/>
+          </a:prstGeom>
+          <a:noFill/>
+        </p:spPr>
+        <p:txBody>
+          <a:bodyPr wrap="square" anchor="ctr" lIns="0" rIns="0" tIns="0" bIns="0"/>
+          <a:lstStyle/>
+          <a:p>
+            <a:pPr algn="l"/>
+            <a:r>
+              <a:rPr sz="2000" b="1" i="0">
+                <a:solidFill>
+                  <a:srgbClr val="FFFFFF"/>
+                </a:solidFill>
+                <a:latin typeface="Calibri"/>
+              </a:rPr>
+              <a:t>OS types</a:t>
+            </a:r>
+          </a:p>
+        </p:txBody>
+      </p:sp>
+      <p:sp>
+        <p:nvSpPr>
+          <p:cNvPr id="8" name="Rounded Rectangle 7"/>
           <p:cNvSpPr/>
           <p:nvPr/>
         </p:nvSpPr>
         <p:spPr>
           <a:xfrm>
-            <a:off x="1095984" y="2255520"/>
-            <a:ext cx="640080" cy="640080"/>
-          </a:xfrm>
-          <a:prstGeom prst="ellipse">
-            <a:avLst/>
-          </a:prstGeom>
-          <a:solidFill>
-            <a:srgbClr val="4EA1FF"/>
-          </a:solidFill>
-          <a:ln>
-            <a:noFill/>
-          </a:ln>
-          <a:effectLst/>
-        </p:spPr>
-        <p:style>
-          <a:lnRef idx="1">
-            <a:schemeClr val="accent1"/>
-          </a:lnRef>
-          <a:fillRef idx="3">
-            <a:schemeClr val="accent1"/>
-          </a:fillRef>
-          <a:effectRef idx="2">
-            <a:schemeClr val="accent1"/>
-          </a:effectRef>
-          <a:fontRef idx="minor">
-            <a:schemeClr val="lt1"/>
-          </a:fontRef>
-        </p:style>
-        <p:txBody>
-          <a:bodyPr rtlCol="0" anchor="ctr" lIns="0" rIns="0" tIns="0" bIns="0"/>
-          <a:lstStyle/>
-          <a:p>
-            <a:pPr algn="ctr"/>
-            <a:r>
-              <a:rPr sz="2000" b="1">
-                <a:solidFill>
-                  <a:srgbClr val="202122"/>
-                </a:solidFill>
-                <a:latin typeface="Calibri"/>
-              </a:rPr>
-              <a:t>1</a:t>
-            </a:r>
-          </a:p>
-        </p:txBody>
-      </p:sp>
-      <p:sp>
-        <p:nvSpPr>
-          <p:cNvPr id="8" name="TextBox 7"/>
-          <p:cNvSpPr txBox="1"/>
-          <p:nvPr/>
-        </p:nvSpPr>
-        <p:spPr>
-          <a:xfrm>
-            <a:off x="548640" y="3032760"/>
-            <a:ext cx="1734769" cy="731520"/>
-          </a:xfrm>
-          <a:prstGeom prst="rect">
-            <a:avLst/>
-          </a:prstGeom>
-          <a:noFill/>
-        </p:spPr>
-        <p:txBody>
-          <a:bodyPr wrap="square" anchor="t" lIns="0" rIns="0" tIns="0" bIns="0"/>
-          <a:lstStyle/>
-          <a:p>
-            <a:pPr algn="ctr"/>
-            <a:r>
-              <a:rPr sz="1700" b="1" i="0">
-                <a:solidFill>
-                  <a:srgbClr val="03306E"/>
-                </a:solidFill>
-                <a:latin typeface="Calibri"/>
-              </a:rPr>
-              <a:t>Boot and partition</a:t>
-            </a:r>
-          </a:p>
-        </p:txBody>
-      </p:sp>
-      <p:sp>
-        <p:nvSpPr>
-          <p:cNvPr id="9" name="Rounded Rectangle 8"/>
-          <p:cNvSpPr/>
-          <p:nvPr/>
-        </p:nvSpPr>
-        <p:spPr>
-          <a:xfrm>
-            <a:off x="548640" y="3810000"/>
-            <a:ext cx="1734769" cy="1706880"/>
+            <a:off x="548640" y="2377440"/>
+            <a:ext cx="5364327" cy="3794760"/>
           </a:xfrm>
           <a:prstGeom prst="roundRect">
             <a:avLst>
-              <a:gd name="adj" fmla="val 6000"/>
+              <a:gd name="adj" fmla="val 4000"/>
             </a:avLst>
           </a:prstGeom>
           <a:solidFill>
@@ -7719,53 +11330,135 @@
       </p:sp>
       <p:sp>
         <p:nvSpPr>
-          <p:cNvPr id="10" name="TextBox 9"/>
-          <p:cNvSpPr txBox="1"/>
-          <p:nvPr/>
-        </p:nvSpPr>
-        <p:spPr>
-          <a:xfrm>
-            <a:off x="685800" y="3947160"/>
-            <a:ext cx="1460449" cy="1432560"/>
-          </a:xfrm>
-          <a:prstGeom prst="rect">
-            <a:avLst/>
-          </a:prstGeom>
-          <a:noFill/>
-        </p:spPr>
-        <p:txBody>
-          <a:bodyPr wrap="square" anchor="t" lIns="0" rIns="0" tIns="0" bIns="0"/>
-          <a:lstStyle/>
-          <a:p>
-            <a:pPr algn="l"/>
-            <a:r>
-              <a:rPr sz="1700" b="0" i="0">
+          <p:cNvPr id="9" name="TextBox 8"/>
+          <p:cNvSpPr txBox="1"/>
+          <p:nvPr/>
+        </p:nvSpPr>
+        <p:spPr>
+          <a:xfrm>
+            <a:off x="822959" y="2606040"/>
+            <a:ext cx="4815687" cy="3337560"/>
+          </a:xfrm>
+          <a:prstGeom prst="rect">
+            <a:avLst/>
+          </a:prstGeom>
+          <a:noFill/>
+        </p:spPr>
+        <p:txBody>
+          <a:bodyPr wrap="square" lIns="0" rIns="0" tIns="0" bIns="0">
+            <a:spAutoFit/>
+          </a:bodyPr>
+          <a:lstStyle/>
+          <a:p>
+            <a:pPr marL="274320" indent="-274320">
+              <a:spcAft>
+                <a:spcPts val="990"/>
+              </a:spcAft>
+              <a:buClr>
+                <a:srgbClr val="0645AD"/>
+              </a:buClr>
+              <a:buFont typeface="Arial"/>
+              <a:buChar char="•"/>
+            </a:pPr>
+            <a:r>
+              <a:rPr sz="2200" b="1">
                 <a:solidFill>
                   <a:srgbClr val="202122"/>
                 </a:solidFill>
                 <a:latin typeface="Calibri"/>
               </a:rPr>
-              <a:t>Choose the boot drive; partition and format.</a:t>
-            </a:r>
-          </a:p>
-        </p:txBody>
-      </p:sp>
-      <p:sp>
-        <p:nvSpPr>
-          <p:cNvPr id="11" name="Oval 10"/>
+              <a:t>End-user:</a:t>
+            </a:r>
+            <a:r>
+              <a:rPr sz="2200" b="0">
+                <a:solidFill>
+                  <a:srgbClr val="202122"/>
+                </a:solidFill>
+                <a:latin typeface="Calibri"/>
+              </a:rPr>
+              <a:t> Windows, macOS, Linux</a:t>
+            </a:r>
+          </a:p>
+          <a:p>
+            <a:pPr marL="274320" indent="-274320">
+              <a:spcAft>
+                <a:spcPts val="990"/>
+              </a:spcAft>
+              <a:buClr>
+                <a:srgbClr val="0645AD"/>
+              </a:buClr>
+              <a:buFont typeface="Arial"/>
+              <a:buChar char="•"/>
+            </a:pPr>
+            <a:r>
+              <a:rPr sz="2200" b="1">
+                <a:solidFill>
+                  <a:srgbClr val="202122"/>
+                </a:solidFill>
+                <a:latin typeface="Calibri"/>
+              </a:rPr>
+              <a:t>Mobile:</a:t>
+            </a:r>
+            <a:r>
+              <a:rPr sz="2200" b="0">
+                <a:solidFill>
+                  <a:srgbClr val="202122"/>
+                </a:solidFill>
+                <a:latin typeface="Calibri"/>
+              </a:rPr>
+              <a:t> iOS, Android</a:t>
+            </a:r>
+          </a:p>
+          <a:p>
+            <a:pPr marL="274320" indent="-274320">
+              <a:spcAft>
+                <a:spcPts val="990"/>
+              </a:spcAft>
+              <a:buClr>
+                <a:srgbClr val="0645AD"/>
+              </a:buClr>
+              <a:buFont typeface="Arial"/>
+              <a:buChar char="•"/>
+            </a:pPr>
+            <a:r>
+              <a:rPr sz="2200" b="1">
+                <a:solidFill>
+                  <a:srgbClr val="202122"/>
+                </a:solidFill>
+                <a:latin typeface="Calibri"/>
+              </a:rPr>
+              <a:t>Server:</a:t>
+            </a:r>
+            <a:r>
+              <a:rPr sz="2200" b="0">
+                <a:solidFill>
+                  <a:srgbClr val="202122"/>
+                </a:solidFill>
+                <a:latin typeface="Calibri"/>
+              </a:rPr>
+              <a:t> Windows Server, Linux</a:t>
+            </a:r>
+          </a:p>
+        </p:txBody>
+      </p:sp>
+      <p:sp>
+        <p:nvSpPr>
+          <p:cNvPr id="10" name="Rounded Rectangle 9"/>
           <p:cNvSpPr/>
           <p:nvPr/>
         </p:nvSpPr>
         <p:spPr>
           <a:xfrm>
-            <a:off x="2967913" y="2255520"/>
-            <a:ext cx="640080" cy="640080"/>
-          </a:xfrm>
-          <a:prstGeom prst="ellipse">
-            <a:avLst/>
+            <a:off x="6278727" y="1600200"/>
+            <a:ext cx="5364327" cy="640080"/>
+          </a:xfrm>
+          <a:prstGeom prst="roundRect">
+            <a:avLst>
+              <a:gd name="adj" fmla="val 15000"/>
+            </a:avLst>
           </a:prstGeom>
           <a:solidFill>
-            <a:srgbClr val="4EA1FF"/>
+            <a:srgbClr val="0645AD"/>
           </a:solidFill>
           <a:ln>
             <a:noFill/>
@@ -7787,69 +11480,58 @@
           </a:fontRef>
         </p:style>
         <p:txBody>
-          <a:bodyPr rtlCol="0" anchor="ctr" lIns="0" rIns="0" tIns="0" bIns="0"/>
-          <a:lstStyle/>
-          <a:p>
-            <a:pPr algn="ctr"/>
-            <a:r>
-              <a:rPr sz="2000" b="1">
-                <a:solidFill>
-                  <a:srgbClr val="202122"/>
-                </a:solidFill>
-                <a:latin typeface="Calibri"/>
-              </a:rPr>
-              <a:t>2</a:t>
-            </a:r>
-          </a:p>
-        </p:txBody>
-      </p:sp>
-      <p:sp>
-        <p:nvSpPr>
-          <p:cNvPr id="12" name="TextBox 11"/>
-          <p:cNvSpPr txBox="1"/>
-          <p:nvPr/>
-        </p:nvSpPr>
-        <p:spPr>
-          <a:xfrm>
-            <a:off x="2420569" y="3032760"/>
-            <a:ext cx="1734769" cy="731520"/>
-          </a:xfrm>
-          <a:prstGeom prst="rect">
-            <a:avLst/>
-          </a:prstGeom>
-          <a:noFill/>
-        </p:spPr>
-        <p:txBody>
-          <a:bodyPr wrap="square" anchor="t" lIns="0" rIns="0" tIns="0" bIns="0"/>
-          <a:lstStyle/>
-          <a:p>
-            <a:pPr algn="ctr"/>
-            <a:r>
-              <a:rPr sz="1700" b="1" i="0">
-                <a:solidFill>
-                  <a:srgbClr val="03306E"/>
-                </a:solidFill>
-                <a:latin typeface="Calibri"/>
-              </a:rPr>
-              <a:t>Domain</a:t>
-            </a:r>
-          </a:p>
-        </p:txBody>
-      </p:sp>
-      <p:sp>
-        <p:nvSpPr>
-          <p:cNvPr id="13" name="Rounded Rectangle 12"/>
+          <a:bodyPr rtlCol="0" anchor="ctr"/>
+          <a:lstStyle/>
+          <a:p/>
+        </p:txBody>
+      </p:sp>
+      <p:sp>
+        <p:nvSpPr>
+          <p:cNvPr id="11" name="TextBox 10"/>
+          <p:cNvSpPr txBox="1"/>
+          <p:nvPr/>
+        </p:nvSpPr>
+        <p:spPr>
+          <a:xfrm>
+            <a:off x="6507327" y="1600200"/>
+            <a:ext cx="4907127" cy="640080"/>
+          </a:xfrm>
+          <a:prstGeom prst="rect">
+            <a:avLst/>
+          </a:prstGeom>
+          <a:noFill/>
+        </p:spPr>
+        <p:txBody>
+          <a:bodyPr wrap="square" anchor="ctr" lIns="0" rIns="0" tIns="0" bIns="0"/>
+          <a:lstStyle/>
+          <a:p>
+            <a:pPr algn="l"/>
+            <a:r>
+              <a:rPr sz="2000" b="1" i="0">
+                <a:solidFill>
+                  <a:srgbClr val="FFFFFF"/>
+                </a:solidFill>
+                <a:latin typeface="Calibri"/>
+              </a:rPr>
+              <a:t>Application types</a:t>
+            </a:r>
+          </a:p>
+        </p:txBody>
+      </p:sp>
+      <p:sp>
+        <p:nvSpPr>
+          <p:cNvPr id="12" name="Rounded Rectangle 11"/>
           <p:cNvSpPr/>
           <p:nvPr/>
         </p:nvSpPr>
         <p:spPr>
           <a:xfrm>
-            <a:off x="2420569" y="3810000"/>
-            <a:ext cx="1734769" cy="1706880"/>
+            <a:off x="6278727" y="2377440"/>
+            <a:ext cx="5364327" cy="3794760"/>
           </a:xfrm>
           <a:prstGeom prst="roundRect">
             <a:avLst>
-              <a:gd name="adj" fmla="val 6000"/>
+              <a:gd name="adj" fmla="val 4000"/>
             </a:avLst>
           </a:prstGeom>
           <a:solidFill>
@@ -7882,685 +11564,164 @@
       </p:sp>
       <p:sp>
         <p:nvSpPr>
-          <p:cNvPr id="14" name="TextBox 13"/>
-          <p:cNvSpPr txBox="1"/>
-          <p:nvPr/>
-        </p:nvSpPr>
-        <p:spPr>
-          <a:xfrm>
-            <a:off x="2557729" y="3947160"/>
-            <a:ext cx="1460449" cy="1432560"/>
-          </a:xfrm>
-          <a:prstGeom prst="rect">
-            <a:avLst/>
-          </a:prstGeom>
-          <a:noFill/>
-        </p:spPr>
-        <p:txBody>
-          <a:bodyPr wrap="square" anchor="t" lIns="0" rIns="0" tIns="0" bIns="0"/>
-          <a:lstStyle/>
-          <a:p>
-            <a:pPr algn="l"/>
-            <a:r>
-              <a:rPr sz="1700" b="0" i="0">
+          <p:cNvPr id="13" name="TextBox 12"/>
+          <p:cNvSpPr txBox="1"/>
+          <p:nvPr/>
+        </p:nvSpPr>
+        <p:spPr>
+          <a:xfrm>
+            <a:off x="6553047" y="2606040"/>
+            <a:ext cx="4815687" cy="3337560"/>
+          </a:xfrm>
+          <a:prstGeom prst="rect">
+            <a:avLst/>
+          </a:prstGeom>
+          <a:noFill/>
+        </p:spPr>
+        <p:txBody>
+          <a:bodyPr wrap="square" lIns="0" rIns="0" tIns="0" bIns="0">
+            <a:spAutoFit/>
+          </a:bodyPr>
+          <a:lstStyle/>
+          <a:p>
+            <a:pPr marL="274320" indent="-274320">
+              <a:spcAft>
+                <a:spcPts val="945"/>
+              </a:spcAft>
+              <a:buClr>
+                <a:srgbClr val="0645AD"/>
+              </a:buClr>
+              <a:buFont typeface="Arial"/>
+              <a:buChar char="•"/>
+            </a:pPr>
+            <a:r>
+              <a:rPr sz="2100" b="1">
                 <a:solidFill>
                   <a:srgbClr val="202122"/>
                 </a:solidFill>
                 <a:latin typeface="Calibri"/>
               </a:rPr>
-              <a:t>Join the domain.</a:t>
-            </a:r>
-          </a:p>
-        </p:txBody>
-      </p:sp>
-      <p:sp>
-        <p:nvSpPr>
-          <p:cNvPr id="15" name="Oval 14"/>
-          <p:cNvSpPr/>
-          <p:nvPr/>
-        </p:nvSpPr>
-        <p:spPr>
-          <a:xfrm>
-            <a:off x="4839843" y="2255520"/>
-            <a:ext cx="640080" cy="640080"/>
-          </a:xfrm>
-          <a:prstGeom prst="ellipse">
-            <a:avLst/>
-          </a:prstGeom>
-          <a:solidFill>
-            <a:srgbClr val="4EA1FF"/>
-          </a:solidFill>
-          <a:ln>
-            <a:noFill/>
-          </a:ln>
-          <a:effectLst/>
-        </p:spPr>
-        <p:style>
-          <a:lnRef idx="1">
-            <a:schemeClr val="accent1"/>
-          </a:lnRef>
-          <a:fillRef idx="3">
-            <a:schemeClr val="accent1"/>
-          </a:fillRef>
-          <a:effectRef idx="2">
-            <a:schemeClr val="accent1"/>
-          </a:effectRef>
-          <a:fontRef idx="minor">
-            <a:schemeClr val="lt1"/>
-          </a:fontRef>
-        </p:style>
-        <p:txBody>
-          <a:bodyPr rtlCol="0" anchor="ctr" lIns="0" rIns="0" tIns="0" bIns="0"/>
-          <a:lstStyle/>
-          <a:p>
-            <a:pPr algn="ctr"/>
-            <a:r>
-              <a:rPr sz="2000" b="1">
+              <a:t>Productivity:</a:t>
+            </a:r>
+            <a:r>
+              <a:rPr sz="2100" b="0">
                 <a:solidFill>
                   <a:srgbClr val="202122"/>
                 </a:solidFill>
                 <a:latin typeface="Calibri"/>
               </a:rPr>
-              <a:t>3</a:t>
-            </a:r>
-          </a:p>
-        </p:txBody>
-      </p:sp>
-      <p:sp>
-        <p:nvSpPr>
-          <p:cNvPr id="16" name="TextBox 15"/>
-          <p:cNvSpPr txBox="1"/>
-          <p:nvPr/>
-        </p:nvSpPr>
-        <p:spPr>
-          <a:xfrm>
-            <a:off x="4292498" y="3032760"/>
-            <a:ext cx="1734769" cy="731520"/>
-          </a:xfrm>
-          <a:prstGeom prst="rect">
-            <a:avLst/>
-          </a:prstGeom>
-          <a:noFill/>
-        </p:spPr>
-        <p:txBody>
-          <a:bodyPr wrap="square" anchor="t" lIns="0" rIns="0" tIns="0" bIns="0"/>
-          <a:lstStyle/>
-          <a:p>
-            <a:pPr algn="ctr"/>
-            <a:r>
-              <a:rPr sz="1700" b="1" i="0">
-                <a:solidFill>
-                  <a:srgbClr val="03306E"/>
-                </a:solidFill>
-                <a:latin typeface="Calibri"/>
-              </a:rPr>
-              <a:t>Region</a:t>
-            </a:r>
-          </a:p>
-        </p:txBody>
-      </p:sp>
-      <p:sp>
-        <p:nvSpPr>
-          <p:cNvPr id="17" name="Rounded Rectangle 16"/>
-          <p:cNvSpPr/>
-          <p:nvPr/>
-        </p:nvSpPr>
-        <p:spPr>
-          <a:xfrm>
-            <a:off x="4292498" y="3810000"/>
-            <a:ext cx="1734769" cy="1706880"/>
-          </a:xfrm>
-          <a:prstGeom prst="roundRect">
-            <a:avLst>
-              <a:gd name="adj" fmla="val 6000"/>
-            </a:avLst>
-          </a:prstGeom>
-          <a:solidFill>
-            <a:srgbClr val="EAF3FF"/>
-          </a:solidFill>
-          <a:ln>
-            <a:noFill/>
-          </a:ln>
-          <a:effectLst/>
-        </p:spPr>
-        <p:style>
-          <a:lnRef idx="1">
-            <a:schemeClr val="accent1"/>
-          </a:lnRef>
-          <a:fillRef idx="3">
-            <a:schemeClr val="accent1"/>
-          </a:fillRef>
-          <a:effectRef idx="2">
-            <a:schemeClr val="accent1"/>
-          </a:effectRef>
-          <a:fontRef idx="minor">
-            <a:schemeClr val="lt1"/>
-          </a:fontRef>
-        </p:style>
-        <p:txBody>
-          <a:bodyPr rtlCol="0" anchor="ctr"/>
-          <a:lstStyle/>
-          <a:p/>
-        </p:txBody>
-      </p:sp>
-      <p:sp>
-        <p:nvSpPr>
-          <p:cNvPr id="18" name="TextBox 17"/>
-          <p:cNvSpPr txBox="1"/>
-          <p:nvPr/>
-        </p:nvSpPr>
-        <p:spPr>
-          <a:xfrm>
-            <a:off x="4429658" y="3947160"/>
-            <a:ext cx="1460449" cy="1432560"/>
-          </a:xfrm>
-          <a:prstGeom prst="rect">
-            <a:avLst/>
-          </a:prstGeom>
-          <a:noFill/>
-        </p:spPr>
-        <p:txBody>
-          <a:bodyPr wrap="square" anchor="t" lIns="0" rIns="0" tIns="0" bIns="0"/>
-          <a:lstStyle/>
-          <a:p>
-            <a:pPr algn="l"/>
-            <a:r>
-              <a:rPr sz="1700" b="0" i="0">
+              <a:t> word processing, spreadsheets, diagrams</a:t>
+            </a:r>
+          </a:p>
+          <a:p>
+            <a:pPr marL="274320" indent="-274320">
+              <a:spcAft>
+                <a:spcPts val="945"/>
+              </a:spcAft>
+              <a:buClr>
+                <a:srgbClr val="0645AD"/>
+              </a:buClr>
+              <a:buFont typeface="Arial"/>
+              <a:buChar char="•"/>
+            </a:pPr>
+            <a:r>
+              <a:rPr sz="2100" b="0">
                 <a:solidFill>
                   <a:srgbClr val="202122"/>
                 </a:solidFill>
                 <a:latin typeface="Calibri"/>
               </a:rPr>
-              <a:t>Set time, date, region and language.</a:t>
-            </a:r>
-          </a:p>
-        </p:txBody>
-      </p:sp>
-      <p:sp>
-        <p:nvSpPr>
-          <p:cNvPr id="19" name="Oval 18"/>
-          <p:cNvSpPr/>
-          <p:nvPr/>
-        </p:nvSpPr>
-        <p:spPr>
-          <a:xfrm>
-            <a:off x="6711772" y="2255520"/>
-            <a:ext cx="640080" cy="640080"/>
-          </a:xfrm>
-          <a:prstGeom prst="ellipse">
-            <a:avLst/>
-          </a:prstGeom>
-          <a:solidFill>
-            <a:srgbClr val="4EA1FF"/>
-          </a:solidFill>
-          <a:ln>
-            <a:noFill/>
-          </a:ln>
-          <a:effectLst/>
-        </p:spPr>
-        <p:style>
-          <a:lnRef idx="1">
-            <a:schemeClr val="accent1"/>
-          </a:lnRef>
-          <a:fillRef idx="3">
-            <a:schemeClr val="accent1"/>
-          </a:fillRef>
-          <a:effectRef idx="2">
-            <a:schemeClr val="accent1"/>
-          </a:effectRef>
-          <a:fontRef idx="minor">
-            <a:schemeClr val="lt1"/>
-          </a:fontRef>
-        </p:style>
-        <p:txBody>
-          <a:bodyPr rtlCol="0" anchor="ctr" lIns="0" rIns="0" tIns="0" bIns="0"/>
-          <a:lstStyle/>
-          <a:p>
-            <a:pPr algn="ctr"/>
-            <a:r>
-              <a:rPr sz="2000" b="1">
+              <a:t>Web browsers</a:t>
+            </a:r>
+          </a:p>
+          <a:p>
+            <a:pPr marL="274320" indent="-274320">
+              <a:spcAft>
+                <a:spcPts val="945"/>
+              </a:spcAft>
+              <a:buClr>
+                <a:srgbClr val="0645AD"/>
+              </a:buClr>
+              <a:buFont typeface="Arial"/>
+              <a:buChar char="•"/>
+            </a:pPr>
+            <a:r>
+              <a:rPr sz="2100" b="1">
                 <a:solidFill>
                   <a:srgbClr val="202122"/>
                 </a:solidFill>
                 <a:latin typeface="Calibri"/>
               </a:rPr>
-              <a:t>4</a:t>
-            </a:r>
-          </a:p>
-        </p:txBody>
-      </p:sp>
-      <p:sp>
-        <p:nvSpPr>
-          <p:cNvPr id="20" name="TextBox 19"/>
-          <p:cNvSpPr txBox="1"/>
-          <p:nvPr/>
-        </p:nvSpPr>
-        <p:spPr>
-          <a:xfrm>
-            <a:off x="6164427" y="3032760"/>
-            <a:ext cx="1734769" cy="731520"/>
-          </a:xfrm>
-          <a:prstGeom prst="rect">
-            <a:avLst/>
-          </a:prstGeom>
-          <a:noFill/>
-        </p:spPr>
-        <p:txBody>
-          <a:bodyPr wrap="square" anchor="t" lIns="0" rIns="0" tIns="0" bIns="0"/>
-          <a:lstStyle/>
-          <a:p>
-            <a:pPr algn="ctr"/>
-            <a:r>
-              <a:rPr sz="1700" b="1" i="0">
-                <a:solidFill>
-                  <a:srgbClr val="03306E"/>
-                </a:solidFill>
-                <a:latin typeface="Calibri"/>
-              </a:rPr>
-              <a:t>Drivers</a:t>
-            </a:r>
-          </a:p>
-        </p:txBody>
-      </p:sp>
-      <p:sp>
-        <p:nvSpPr>
-          <p:cNvPr id="21" name="Rounded Rectangle 20"/>
-          <p:cNvSpPr/>
-          <p:nvPr/>
-        </p:nvSpPr>
-        <p:spPr>
-          <a:xfrm>
-            <a:off x="6164427" y="3810000"/>
-            <a:ext cx="1734769" cy="1706880"/>
-          </a:xfrm>
-          <a:prstGeom prst="roundRect">
-            <a:avLst>
-              <a:gd name="adj" fmla="val 6000"/>
-            </a:avLst>
-          </a:prstGeom>
-          <a:solidFill>
-            <a:srgbClr val="EAF3FF"/>
-          </a:solidFill>
-          <a:ln>
-            <a:noFill/>
-          </a:ln>
-          <a:effectLst/>
-        </p:spPr>
-        <p:style>
-          <a:lnRef idx="1">
-            <a:schemeClr val="accent1"/>
-          </a:lnRef>
-          <a:fillRef idx="3">
-            <a:schemeClr val="accent1"/>
-          </a:fillRef>
-          <a:effectRef idx="2">
-            <a:schemeClr val="accent1"/>
-          </a:effectRef>
-          <a:fontRef idx="minor">
-            <a:schemeClr val="lt1"/>
-          </a:fontRef>
-        </p:style>
-        <p:txBody>
-          <a:bodyPr rtlCol="0" anchor="ctr"/>
-          <a:lstStyle/>
-          <a:p/>
-        </p:txBody>
-      </p:sp>
-      <p:sp>
-        <p:nvSpPr>
-          <p:cNvPr id="22" name="TextBox 21"/>
-          <p:cNvSpPr txBox="1"/>
-          <p:nvPr/>
-        </p:nvSpPr>
-        <p:spPr>
-          <a:xfrm>
-            <a:off x="6301587" y="3947160"/>
-            <a:ext cx="1460449" cy="1432560"/>
-          </a:xfrm>
-          <a:prstGeom prst="rect">
-            <a:avLst/>
-          </a:prstGeom>
-          <a:noFill/>
-        </p:spPr>
-        <p:txBody>
-          <a:bodyPr wrap="square" anchor="t" lIns="0" rIns="0" tIns="0" bIns="0"/>
-          <a:lstStyle/>
-          <a:p>
-            <a:pPr algn="l"/>
-            <a:r>
-              <a:rPr sz="1700" b="0" i="0">
+              <a:t>Collaboration:</a:t>
+            </a:r>
+            <a:r>
+              <a:rPr sz="2100" b="0">
                 <a:solidFill>
                   <a:srgbClr val="202122"/>
                 </a:solidFill>
                 <a:latin typeface="Calibri"/>
               </a:rPr>
-              <a:t>Install drivers.</a:t>
-            </a:r>
-          </a:p>
-        </p:txBody>
-      </p:sp>
-      <p:sp>
-        <p:nvSpPr>
-          <p:cNvPr id="23" name="Oval 22"/>
-          <p:cNvSpPr/>
-          <p:nvPr/>
-        </p:nvSpPr>
-        <p:spPr>
-          <a:xfrm>
-            <a:off x="8583701" y="2255520"/>
-            <a:ext cx="640080" cy="640080"/>
-          </a:xfrm>
-          <a:prstGeom prst="ellipse">
-            <a:avLst/>
-          </a:prstGeom>
-          <a:solidFill>
-            <a:srgbClr val="4EA1FF"/>
-          </a:solidFill>
-          <a:ln>
-            <a:noFill/>
-          </a:ln>
-          <a:effectLst/>
-        </p:spPr>
-        <p:style>
-          <a:lnRef idx="1">
-            <a:schemeClr val="accent1"/>
-          </a:lnRef>
-          <a:fillRef idx="3">
-            <a:schemeClr val="accent1"/>
-          </a:fillRef>
-          <a:effectRef idx="2">
-            <a:schemeClr val="accent1"/>
-          </a:effectRef>
-          <a:fontRef idx="minor">
-            <a:schemeClr val="lt1"/>
-          </a:fontRef>
-        </p:style>
-        <p:txBody>
-          <a:bodyPr rtlCol="0" anchor="ctr" lIns="0" rIns="0" tIns="0" bIns="0"/>
-          <a:lstStyle/>
-          <a:p>
-            <a:pPr algn="ctr"/>
-            <a:r>
-              <a:rPr sz="2000" b="1">
+              <a:t> email, conferencing, VoIP, chat</a:t>
+            </a:r>
+          </a:p>
+          <a:p>
+            <a:pPr marL="274320" indent="-274320">
+              <a:spcAft>
+                <a:spcPts val="945"/>
+              </a:spcAft>
+              <a:buClr>
+                <a:srgbClr val="0645AD"/>
+              </a:buClr>
+              <a:buFont typeface="Arial"/>
+              <a:buChar char="•"/>
+            </a:pPr>
+            <a:r>
+              <a:rPr sz="2100" b="1">
                 <a:solidFill>
                   <a:srgbClr val="202122"/>
                 </a:solidFill>
                 <a:latin typeface="Calibri"/>
               </a:rPr>
-              <a:t>5</a:t>
-            </a:r>
-          </a:p>
-        </p:txBody>
-      </p:sp>
-      <p:sp>
-        <p:nvSpPr>
-          <p:cNvPr id="24" name="TextBox 23"/>
-          <p:cNvSpPr txBox="1"/>
-          <p:nvPr/>
-        </p:nvSpPr>
-        <p:spPr>
-          <a:xfrm>
-            <a:off x="8036356" y="3032760"/>
-            <a:ext cx="1734769" cy="731520"/>
-          </a:xfrm>
-          <a:prstGeom prst="rect">
-            <a:avLst/>
-          </a:prstGeom>
-          <a:noFill/>
-        </p:spPr>
-        <p:txBody>
-          <a:bodyPr wrap="square" anchor="t" lIns="0" rIns="0" tIns="0" bIns="0"/>
-          <a:lstStyle/>
-          <a:p>
-            <a:pPr algn="ctr"/>
-            <a:r>
-              <a:rPr sz="1700" b="1" i="0">
-                <a:solidFill>
-                  <a:srgbClr val="03306E"/>
-                </a:solidFill>
-                <a:latin typeface="Calibri"/>
-              </a:rPr>
-              <a:t>Update</a:t>
-            </a:r>
-          </a:p>
-        </p:txBody>
-      </p:sp>
-      <p:sp>
-        <p:nvSpPr>
-          <p:cNvPr id="25" name="Rounded Rectangle 24"/>
-          <p:cNvSpPr/>
-          <p:nvPr/>
-        </p:nvSpPr>
-        <p:spPr>
-          <a:xfrm>
-            <a:off x="8036356" y="3810000"/>
-            <a:ext cx="1734769" cy="1706880"/>
-          </a:xfrm>
-          <a:prstGeom prst="roundRect">
-            <a:avLst>
-              <a:gd name="adj" fmla="val 6000"/>
-            </a:avLst>
-          </a:prstGeom>
-          <a:solidFill>
-            <a:srgbClr val="EAF3FF"/>
-          </a:solidFill>
-          <a:ln>
-            <a:noFill/>
-          </a:ln>
-          <a:effectLst/>
-        </p:spPr>
-        <p:style>
-          <a:lnRef idx="1">
-            <a:schemeClr val="accent1"/>
-          </a:lnRef>
-          <a:fillRef idx="3">
-            <a:schemeClr val="accent1"/>
-          </a:fillRef>
-          <a:effectRef idx="2">
-            <a:schemeClr val="accent1"/>
-          </a:effectRef>
-          <a:fontRef idx="minor">
-            <a:schemeClr val="lt1"/>
-          </a:fontRef>
-        </p:style>
-        <p:txBody>
-          <a:bodyPr rtlCol="0" anchor="ctr"/>
-          <a:lstStyle/>
-          <a:p/>
-        </p:txBody>
-      </p:sp>
-      <p:sp>
-        <p:nvSpPr>
-          <p:cNvPr id="26" name="TextBox 25"/>
-          <p:cNvSpPr txBox="1"/>
-          <p:nvPr/>
-        </p:nvSpPr>
-        <p:spPr>
-          <a:xfrm>
-            <a:off x="8173516" y="3947160"/>
-            <a:ext cx="1460449" cy="1432560"/>
-          </a:xfrm>
-          <a:prstGeom prst="rect">
-            <a:avLst/>
-          </a:prstGeom>
-          <a:noFill/>
-        </p:spPr>
-        <p:txBody>
-          <a:bodyPr wrap="square" anchor="t" lIns="0" rIns="0" tIns="0" bIns="0"/>
-          <a:lstStyle/>
-          <a:p>
-            <a:pPr algn="l"/>
-            <a:r>
-              <a:rPr sz="1700" b="0" i="0">
+              <a:t>Business:</a:t>
+            </a:r>
+            <a:r>
+              <a:rPr sz="2100" b="0">
                 <a:solidFill>
                   <a:srgbClr val="202122"/>
                 </a:solidFill>
                 <a:latin typeface="Calibri"/>
               </a:rPr>
-              <a:t>Apply updates, including over the network.</a:t>
-            </a:r>
-          </a:p>
-        </p:txBody>
-      </p:sp>
-      <p:sp>
-        <p:nvSpPr>
-          <p:cNvPr id="27" name="Oval 26"/>
-          <p:cNvSpPr/>
-          <p:nvPr/>
-        </p:nvSpPr>
-        <p:spPr>
-          <a:xfrm>
-            <a:off x="10455630" y="2255520"/>
-            <a:ext cx="640080" cy="640080"/>
-          </a:xfrm>
-          <a:prstGeom prst="ellipse">
-            <a:avLst/>
-          </a:prstGeom>
-          <a:solidFill>
-            <a:srgbClr val="4EA1FF"/>
-          </a:solidFill>
-          <a:ln>
-            <a:noFill/>
-          </a:ln>
-          <a:effectLst/>
-        </p:spPr>
-        <p:style>
-          <a:lnRef idx="1">
-            <a:schemeClr val="accent1"/>
-          </a:lnRef>
-          <a:fillRef idx="3">
-            <a:schemeClr val="accent1"/>
-          </a:fillRef>
-          <a:effectRef idx="2">
-            <a:schemeClr val="accent1"/>
-          </a:effectRef>
-          <a:fontRef idx="minor">
-            <a:schemeClr val="lt1"/>
-          </a:fontRef>
-        </p:style>
-        <p:txBody>
-          <a:bodyPr rtlCol="0" anchor="ctr" lIns="0" rIns="0" tIns="0" bIns="0"/>
-          <a:lstStyle/>
-          <a:p>
-            <a:pPr algn="ctr"/>
-            <a:r>
-              <a:rPr sz="2000" b="1">
+              <a:t> databases, CRM, ticketing, accounting</a:t>
+            </a:r>
+          </a:p>
+          <a:p>
+            <a:pPr marL="274320" indent="-274320">
+              <a:spcAft>
+                <a:spcPts val="945"/>
+              </a:spcAft>
+              <a:buClr>
+                <a:srgbClr val="0645AD"/>
+              </a:buClr>
+              <a:buFont typeface="Arial"/>
+              <a:buChar char="•"/>
+            </a:pPr>
+            <a:r>
+              <a:rPr sz="2100" b="1">
                 <a:solidFill>
                   <a:srgbClr val="202122"/>
                 </a:solidFill>
                 <a:latin typeface="Calibri"/>
               </a:rPr>
-              <a:t>6</a:t>
-            </a:r>
-          </a:p>
-        </p:txBody>
-      </p:sp>
-      <p:sp>
-        <p:nvSpPr>
-          <p:cNvPr id="28" name="TextBox 27"/>
-          <p:cNvSpPr txBox="1"/>
-          <p:nvPr/>
-        </p:nvSpPr>
-        <p:spPr>
-          <a:xfrm>
-            <a:off x="9908286" y="3032760"/>
-            <a:ext cx="1734769" cy="731520"/>
-          </a:xfrm>
-          <a:prstGeom prst="rect">
-            <a:avLst/>
-          </a:prstGeom>
-          <a:noFill/>
-        </p:spPr>
-        <p:txBody>
-          <a:bodyPr wrap="square" anchor="t" lIns="0" rIns="0" tIns="0" bIns="0"/>
-          <a:lstStyle/>
-          <a:p>
-            <a:pPr algn="ctr"/>
-            <a:r>
-              <a:rPr sz="1700" b="1" i="0">
-                <a:solidFill>
-                  <a:srgbClr val="03306E"/>
-                </a:solidFill>
-                <a:latin typeface="Calibri"/>
-              </a:rPr>
-              <a:t>Apps</a:t>
-            </a:r>
-          </a:p>
-        </p:txBody>
-      </p:sp>
-      <p:sp>
-        <p:nvSpPr>
-          <p:cNvPr id="29" name="Rounded Rectangle 28"/>
-          <p:cNvSpPr/>
-          <p:nvPr/>
-        </p:nvSpPr>
-        <p:spPr>
-          <a:xfrm>
-            <a:off x="9908286" y="3810000"/>
-            <a:ext cx="1734769" cy="1706880"/>
-          </a:xfrm>
-          <a:prstGeom prst="roundRect">
-            <a:avLst>
-              <a:gd name="adj" fmla="val 6000"/>
-            </a:avLst>
-          </a:prstGeom>
-          <a:solidFill>
-            <a:srgbClr val="EAF3FF"/>
-          </a:solidFill>
-          <a:ln>
-            <a:noFill/>
-          </a:ln>
-          <a:effectLst/>
-        </p:spPr>
-        <p:style>
-          <a:lnRef idx="1">
-            <a:schemeClr val="accent1"/>
-          </a:lnRef>
-          <a:fillRef idx="3">
-            <a:schemeClr val="accent1"/>
-          </a:fillRef>
-          <a:effectRef idx="2">
-            <a:schemeClr val="accent1"/>
-          </a:effectRef>
-          <a:fontRef idx="minor">
-            <a:schemeClr val="lt1"/>
-          </a:fontRef>
-        </p:style>
-        <p:txBody>
-          <a:bodyPr rtlCol="0" anchor="ctr"/>
-          <a:lstStyle/>
-          <a:p/>
-        </p:txBody>
-      </p:sp>
-      <p:sp>
-        <p:nvSpPr>
-          <p:cNvPr id="30" name="TextBox 29"/>
-          <p:cNvSpPr txBox="1"/>
-          <p:nvPr/>
-        </p:nvSpPr>
-        <p:spPr>
-          <a:xfrm>
-            <a:off x="10045446" y="3947160"/>
-            <a:ext cx="1460449" cy="1432560"/>
-          </a:xfrm>
-          <a:prstGeom prst="rect">
-            <a:avLst/>
-          </a:prstGeom>
-          <a:noFill/>
-        </p:spPr>
-        <p:txBody>
-          <a:bodyPr wrap="square" anchor="t" lIns="0" rIns="0" tIns="0" bIns="0"/>
-          <a:lstStyle/>
-          <a:p>
-            <a:pPr algn="l"/>
-            <a:r>
-              <a:rPr sz="1700" b="0" i="0">
+              <a:t>Development:</a:t>
+            </a:r>
+            <a:r>
+              <a:rPr sz="2100" b="0">
                 <a:solidFill>
                   <a:srgbClr val="202122"/>
                 </a:solidFill>
                 <a:latin typeface="Calibri"/>
               </a:rPr>
-              <a:t>Install productivity software; migrate user data if upgrading.</a:t>
+              <a:t> CAD, IDE</a:t>
             </a:r>
           </a:p>
         </p:txBody>
@@ -8652,7 +11813,7 @@
                 </a:solidFill>
                 <a:latin typeface="Cambria"/>
               </a:rPr>
-              <a:t>Check your understanding</a:t>
+              <a:t>Checking requirements: storage</a:t>
             </a:r>
           </a:p>
         </p:txBody>
@@ -8725,14 +11886,138 @@
       </p:sp>
       <p:sp>
         <p:nvSpPr>
-          <p:cNvPr id="6" name="Oval 5"/>
+          <p:cNvPr id="6" name="TextBox 5"/>
+          <p:cNvSpPr txBox="1"/>
+          <p:nvPr/>
+        </p:nvSpPr>
+        <p:spPr>
+          <a:xfrm>
+            <a:off x="548640" y="1554480"/>
+            <a:ext cx="6720840" cy="4617720"/>
+          </a:xfrm>
+          <a:prstGeom prst="rect">
+            <a:avLst/>
+          </a:prstGeom>
+          <a:noFill/>
+        </p:spPr>
+        <p:txBody>
+          <a:bodyPr wrap="square" lIns="0" rIns="0" tIns="0" bIns="0">
+            <a:spAutoFit/>
+          </a:bodyPr>
+          <a:lstStyle/>
+          <a:p>
+            <a:pPr>
+              <a:spcAft>
+                <a:spcPts val="1320"/>
+              </a:spcAft>
+            </a:pPr>
+            <a:r>
+              <a:rPr sz="2200" b="0">
+                <a:solidFill>
+                  <a:srgbClr val="202122"/>
+                </a:solidFill>
+                <a:latin typeface="Calibri"/>
+              </a:rPr>
+              <a:t>Before installing software or an OS, check the device meets the system requirements: storage, RAM, processor and OS compatibility.</a:t>
+            </a:r>
+          </a:p>
+          <a:p>
+            <a:pPr>
+              <a:spcAft>
+                <a:spcPts val="1320"/>
+              </a:spcAft>
+            </a:pPr>
+            <a:r>
+              <a:rPr sz="2200" b="0">
+                <a:solidFill>
+                  <a:srgbClr val="202122"/>
+                </a:solidFill>
+                <a:latin typeface="Calibri"/>
+              </a:rPr>
+              <a:t>Storage choice matters. Hard disk drives are cheaper and hold more, but have moving parts that can fail and generate heat. Solid state drives are much faster, have no moving parts and suit small devices, but cost more per gigabyte.</a:t>
+            </a:r>
+          </a:p>
+          <a:p>
+            <a:pPr>
+              <a:spcAft>
+                <a:spcPts val="1320"/>
+              </a:spcAft>
+            </a:pPr>
+            <a:r>
+              <a:rPr sz="2200" b="1">
+                <a:solidFill>
+                  <a:srgbClr val="202122"/>
+                </a:solidFill>
+                <a:latin typeface="Calibri"/>
+              </a:rPr>
+              <a:t>Also consider permissions:</a:t>
+            </a:r>
+            <a:r>
+              <a:rPr sz="2200" b="0">
+                <a:solidFill>
+                  <a:srgbClr val="202122"/>
+                </a:solidFill>
+                <a:latin typeface="Calibri"/>
+              </a:rPr>
+              <a:t> give users only the access they need (least privilege), and think about the security impact of what you install on the device, the network and the data.</a:t>
+            </a:r>
+          </a:p>
+        </p:txBody>
+      </p:sp>
+      <p:sp>
+        <p:nvSpPr>
+          <p:cNvPr id="7" name="Rounded Rectangle 6"/>
           <p:cNvSpPr/>
           <p:nvPr/>
         </p:nvSpPr>
         <p:spPr>
           <a:xfrm>
-            <a:off x="548640" y="1618488"/>
-            <a:ext cx="411480" cy="411480"/>
+            <a:off x="7772400" y="1554480"/>
+            <a:ext cx="3867912" cy="4526280"/>
+          </a:xfrm>
+          <a:prstGeom prst="roundRect">
+            <a:avLst>
+              <a:gd name="adj" fmla="val 8000"/>
+            </a:avLst>
+          </a:prstGeom>
+          <a:solidFill>
+            <a:srgbClr val="03306E"/>
+          </a:solidFill>
+          <a:ln>
+            <a:noFill/>
+          </a:ln>
+          <a:effectLst/>
+        </p:spPr>
+        <p:style>
+          <a:lnRef idx="1">
+            <a:schemeClr val="accent1"/>
+          </a:lnRef>
+          <a:fillRef idx="3">
+            <a:schemeClr val="accent1"/>
+          </a:fillRef>
+          <a:effectRef idx="2">
+            <a:schemeClr val="accent1"/>
+          </a:effectRef>
+          <a:fontRef idx="minor">
+            <a:schemeClr val="lt1"/>
+          </a:fontRef>
+        </p:style>
+        <p:txBody>
+          <a:bodyPr rtlCol="0" anchor="ctr"/>
+          <a:lstStyle/>
+          <a:p/>
+        </p:txBody>
+      </p:sp>
+      <p:sp>
+        <p:nvSpPr>
+          <p:cNvPr id="8" name="Oval 7"/>
+          <p:cNvSpPr/>
+          <p:nvPr/>
+        </p:nvSpPr>
+        <p:spPr>
+          <a:xfrm>
+            <a:off x="8046720" y="1828800"/>
+            <a:ext cx="548640" cy="548640"/>
           </a:xfrm>
           <a:prstGeom prst="ellipse">
             <a:avLst/>
@@ -8765,27 +12050,27 @@
           <a:p>
             <a:pPr algn="ctr"/>
             <a:r>
-              <a:rPr sz="1400" b="1">
+              <a:rPr sz="1300" b="1">
                 <a:solidFill>
                   <a:srgbClr val="202122"/>
                 </a:solidFill>
                 <a:latin typeface="Calibri"/>
               </a:rPr>
-              <a:t>1</a:t>
-            </a:r>
-          </a:p>
-        </p:txBody>
-      </p:sp>
-      <p:sp>
-        <p:nvSpPr>
-          <p:cNvPr id="7" name="TextBox 6"/>
-          <p:cNvSpPr txBox="1"/>
-          <p:nvPr/>
-        </p:nvSpPr>
-        <p:spPr>
-          <a:xfrm>
-            <a:off x="1234440" y="1600200"/>
-            <a:ext cx="10408615" cy="1030986"/>
+              <a:t>e.g.</a:t>
+            </a:r>
+          </a:p>
+        </p:txBody>
+      </p:sp>
+      <p:sp>
+        <p:nvSpPr>
+          <p:cNvPr id="9" name="TextBox 8"/>
+          <p:cNvSpPr txBox="1"/>
+          <p:nvPr/>
+        </p:nvSpPr>
+        <p:spPr>
+          <a:xfrm>
+            <a:off x="8046720" y="2560320"/>
+            <a:ext cx="3291840" cy="365760"/>
           </a:xfrm>
           <a:prstGeom prst="rect">
             <a:avLst/>
@@ -8798,80 +12083,27 @@
           <a:p>
             <a:pPr algn="l"/>
             <a:r>
-              <a:rPr sz="2200" b="0" i="0">
-                <a:solidFill>
-                  <a:srgbClr val="202122"/>
-                </a:solidFill>
-                <a:latin typeface="Calibri"/>
-              </a:rPr>
-              <a:t>What is the difference between a thick and a thin client?</a:t>
-            </a:r>
-          </a:p>
-        </p:txBody>
-      </p:sp>
-      <p:sp>
-        <p:nvSpPr>
-          <p:cNvPr id="8" name="Oval 7"/>
-          <p:cNvSpPr/>
-          <p:nvPr/>
-        </p:nvSpPr>
-        <p:spPr>
-          <a:xfrm>
-            <a:off x="548640" y="2814066"/>
-            <a:ext cx="411480" cy="411480"/>
-          </a:xfrm>
-          <a:prstGeom prst="ellipse">
-            <a:avLst/>
-          </a:prstGeom>
-          <a:solidFill>
-            <a:srgbClr val="4EA1FF"/>
-          </a:solidFill>
-          <a:ln>
-            <a:noFill/>
-          </a:ln>
-          <a:effectLst/>
-        </p:spPr>
-        <p:style>
-          <a:lnRef idx="1">
-            <a:schemeClr val="accent1"/>
-          </a:lnRef>
-          <a:fillRef idx="3">
-            <a:schemeClr val="accent1"/>
-          </a:fillRef>
-          <a:effectRef idx="2">
-            <a:schemeClr val="accent1"/>
-          </a:effectRef>
-          <a:fontRef idx="minor">
-            <a:schemeClr val="lt1"/>
-          </a:fontRef>
-        </p:style>
-        <p:txBody>
-          <a:bodyPr rtlCol="0" anchor="ctr" lIns="0" rIns="0" tIns="0" bIns="0"/>
-          <a:lstStyle/>
-          <a:p>
-            <a:pPr algn="ctr"/>
-            <a:r>
-              <a:rPr sz="1400" b="1">
-                <a:solidFill>
-                  <a:srgbClr val="202122"/>
-                </a:solidFill>
-                <a:latin typeface="Calibri"/>
-              </a:rPr>
-              <a:t>2</a:t>
-            </a:r>
-          </a:p>
-        </p:txBody>
-      </p:sp>
-      <p:sp>
-        <p:nvSpPr>
-          <p:cNvPr id="9" name="TextBox 8"/>
-          <p:cNvSpPr txBox="1"/>
-          <p:nvPr/>
-        </p:nvSpPr>
-        <p:spPr>
-          <a:xfrm>
-            <a:off x="1234440" y="2795778"/>
-            <a:ext cx="10408615" cy="1030986"/>
+              <a:rPr sz="1300" b="1" i="0">
+                <a:solidFill>
+                  <a:srgbClr val="A9C8F0"/>
+                </a:solidFill>
+                <a:latin typeface="Calibri"/>
+              </a:rPr>
+              <a:t>EXAMPLE</a:t>
+            </a:r>
+          </a:p>
+        </p:txBody>
+      </p:sp>
+      <p:sp>
+        <p:nvSpPr>
+          <p:cNvPr id="10" name="TextBox 9"/>
+          <p:cNvSpPr txBox="1"/>
+          <p:nvPr/>
+        </p:nvSpPr>
+        <p:spPr>
+          <a:xfrm>
+            <a:off x="8046720" y="2971800"/>
+            <a:ext cx="3291840" cy="2971800"/>
           </a:xfrm>
           <a:prstGeom prst="rect">
             <a:avLst/>
@@ -8884,185 +12116,13 @@
           <a:p>
             <a:pPr algn="l"/>
             <a:r>
-              <a:rPr sz="2200" b="0" i="0">
-                <a:solidFill>
-                  <a:srgbClr val="202122"/>
-                </a:solidFill>
-                <a:latin typeface="Calibri"/>
-              </a:rPr>
-              <a:t>Give two advantages of an SSD over an HDD.</a:t>
-            </a:r>
-          </a:p>
-        </p:txBody>
-      </p:sp>
-      <p:sp>
-        <p:nvSpPr>
-          <p:cNvPr id="10" name="Oval 9"/>
-          <p:cNvSpPr/>
-          <p:nvPr/>
-        </p:nvSpPr>
-        <p:spPr>
-          <a:xfrm>
-            <a:off x="548640" y="4009644"/>
-            <a:ext cx="411480" cy="411480"/>
-          </a:xfrm>
-          <a:prstGeom prst="ellipse">
-            <a:avLst/>
-          </a:prstGeom>
-          <a:solidFill>
-            <a:srgbClr val="4EA1FF"/>
-          </a:solidFill>
-          <a:ln>
-            <a:noFill/>
-          </a:ln>
-          <a:effectLst/>
-        </p:spPr>
-        <p:style>
-          <a:lnRef idx="1">
-            <a:schemeClr val="accent1"/>
-          </a:lnRef>
-          <a:fillRef idx="3">
-            <a:schemeClr val="accent1"/>
-          </a:fillRef>
-          <a:effectRef idx="2">
-            <a:schemeClr val="accent1"/>
-          </a:effectRef>
-          <a:fontRef idx="minor">
-            <a:schemeClr val="lt1"/>
-          </a:fontRef>
-        </p:style>
-        <p:txBody>
-          <a:bodyPr rtlCol="0" anchor="ctr" lIns="0" rIns="0" tIns="0" bIns="0"/>
-          <a:lstStyle/>
-          <a:p>
-            <a:pPr algn="ctr"/>
-            <a:r>
-              <a:rPr sz="1400" b="1">
-                <a:solidFill>
-                  <a:srgbClr val="202122"/>
-                </a:solidFill>
-                <a:latin typeface="Calibri"/>
-              </a:rPr>
-              <a:t>3</a:t>
-            </a:r>
-          </a:p>
-        </p:txBody>
-      </p:sp>
-      <p:sp>
-        <p:nvSpPr>
-          <p:cNvPr id="11" name="TextBox 10"/>
-          <p:cNvSpPr txBox="1"/>
-          <p:nvPr/>
-        </p:nvSpPr>
-        <p:spPr>
-          <a:xfrm>
-            <a:off x="1234440" y="3991356"/>
-            <a:ext cx="10408615" cy="1030986"/>
-          </a:xfrm>
-          <a:prstGeom prst="rect">
-            <a:avLst/>
-          </a:prstGeom>
-          <a:noFill/>
-        </p:spPr>
-        <p:txBody>
-          <a:bodyPr wrap="square" anchor="t" lIns="0" rIns="0" tIns="0" bIns="0"/>
-          <a:lstStyle/>
-          <a:p>
-            <a:pPr algn="l"/>
-            <a:r>
-              <a:rPr sz="2200" b="0" i="0">
-                <a:solidFill>
-                  <a:srgbClr val="202122"/>
-                </a:solidFill>
-                <a:latin typeface="Calibri"/>
-              </a:rPr>
-              <a:t>Name two collaboration applications.</a:t>
-            </a:r>
-          </a:p>
-        </p:txBody>
-      </p:sp>
-      <p:sp>
-        <p:nvSpPr>
-          <p:cNvPr id="12" name="Oval 11"/>
-          <p:cNvSpPr/>
-          <p:nvPr/>
-        </p:nvSpPr>
-        <p:spPr>
-          <a:xfrm>
-            <a:off x="548640" y="5205221"/>
-            <a:ext cx="411480" cy="411480"/>
-          </a:xfrm>
-          <a:prstGeom prst="ellipse">
-            <a:avLst/>
-          </a:prstGeom>
-          <a:solidFill>
-            <a:srgbClr val="4EA1FF"/>
-          </a:solidFill>
-          <a:ln>
-            <a:noFill/>
-          </a:ln>
-          <a:effectLst/>
-        </p:spPr>
-        <p:style>
-          <a:lnRef idx="1">
-            <a:schemeClr val="accent1"/>
-          </a:lnRef>
-          <a:fillRef idx="3">
-            <a:schemeClr val="accent1"/>
-          </a:fillRef>
-          <a:effectRef idx="2">
-            <a:schemeClr val="accent1"/>
-          </a:effectRef>
-          <a:fontRef idx="minor">
-            <a:schemeClr val="lt1"/>
-          </a:fontRef>
-        </p:style>
-        <p:txBody>
-          <a:bodyPr rtlCol="0" anchor="ctr" lIns="0" rIns="0" tIns="0" bIns="0"/>
-          <a:lstStyle/>
-          <a:p>
-            <a:pPr algn="ctr"/>
-            <a:r>
-              <a:rPr sz="1400" b="1">
-                <a:solidFill>
-                  <a:srgbClr val="202122"/>
-                </a:solidFill>
-                <a:latin typeface="Calibri"/>
-              </a:rPr>
-              <a:t>4</a:t>
-            </a:r>
-          </a:p>
-        </p:txBody>
-      </p:sp>
-      <p:sp>
-        <p:nvSpPr>
-          <p:cNvPr id="13" name="TextBox 12"/>
-          <p:cNvSpPr txBox="1"/>
-          <p:nvPr/>
-        </p:nvSpPr>
-        <p:spPr>
-          <a:xfrm>
-            <a:off x="1234440" y="5186933"/>
-            <a:ext cx="10408615" cy="1030986"/>
-          </a:xfrm>
-          <a:prstGeom prst="rect">
-            <a:avLst/>
-          </a:prstGeom>
-          <a:noFill/>
-        </p:spPr>
-        <p:txBody>
-          <a:bodyPr wrap="square" anchor="t" lIns="0" rIns="0" tIns="0" bIns="0"/>
-          <a:lstStyle/>
-          <a:p>
-            <a:pPr algn="l"/>
-            <a:r>
-              <a:rPr sz="2200" b="0" i="0">
-                <a:solidFill>
-                  <a:srgbClr val="202122"/>
-                </a:solidFill>
-                <a:latin typeface="Calibri"/>
-              </a:rPr>
-              <a:t>What should you check before installing software?</a:t>
+              <a:rPr sz="1900" b="0" i="0">
+                <a:solidFill>
+                  <a:srgbClr val="FFFFFF"/>
+                </a:solidFill>
+                <a:latin typeface="Cambria"/>
+              </a:rPr>
+              <a:t>A new design app needs 16 GB of RAM and 50 GB free. The laptop has 8 GB, so it needs an upgrade before installation.</a:t>
             </a:r>
           </a:p>
         </p:txBody>
@@ -9154,7 +12214,7 @@
                 </a:solidFill>
                 <a:latin typeface="Cambria"/>
               </a:rPr>
-              <a:t>Answers</a:t>
+              <a:t>Checking requirements: storage</a:t>
             </a:r>
           </a:p>
         </p:txBody>
@@ -9227,20 +12287,22 @@
       </p:sp>
       <p:sp>
         <p:nvSpPr>
-          <p:cNvPr id="6" name="Oval 5"/>
+          <p:cNvPr id="6" name="Rounded Rectangle 5"/>
           <p:cNvSpPr/>
           <p:nvPr/>
         </p:nvSpPr>
         <p:spPr>
           <a:xfrm>
-            <a:off x="548640" y="1618488"/>
-            <a:ext cx="411480" cy="411480"/>
-          </a:xfrm>
-          <a:prstGeom prst="ellipse">
-            <a:avLst/>
+            <a:off x="548640" y="1600200"/>
+            <a:ext cx="5364327" cy="640080"/>
+          </a:xfrm>
+          <a:prstGeom prst="roundRect">
+            <a:avLst>
+              <a:gd name="adj" fmla="val 15000"/>
+            </a:avLst>
           </a:prstGeom>
           <a:solidFill>
-            <a:srgbClr val="4EA1FF"/>
+            <a:srgbClr val="03306E"/>
           </a:solidFill>
           <a:ln>
             <a:noFill/>
@@ -9262,20 +12324,9 @@
           </a:fontRef>
         </p:style>
         <p:txBody>
-          <a:bodyPr rtlCol="0" anchor="ctr" lIns="0" rIns="0" tIns="0" bIns="0"/>
-          <a:lstStyle/>
-          <a:p>
-            <a:pPr algn="ctr"/>
-            <a:r>
-              <a:rPr sz="1400" b="1">
-                <a:solidFill>
-                  <a:srgbClr val="202122"/>
-                </a:solidFill>
-                <a:latin typeface="Calibri"/>
-              </a:rPr>
-              <a:t>1</a:t>
-            </a:r>
-          </a:p>
+          <a:bodyPr rtlCol="0" anchor="ctr"/>
+          <a:lstStyle/>
+          <a:p/>
         </p:txBody>
       </p:sp>
       <p:sp>
@@ -9286,58 +12337,49 @@
         </p:nvSpPr>
         <p:spPr>
           <a:xfrm>
-            <a:off x="1234440" y="1600200"/>
-            <a:ext cx="10408615" cy="1030986"/>
-          </a:xfrm>
-          <a:prstGeom prst="rect">
-            <a:avLst/>
-          </a:prstGeom>
-          <a:noFill/>
-        </p:spPr>
-        <p:txBody>
-          <a:bodyPr wrap="square" anchor="t" lIns="0" rIns="0" tIns="0" bIns="0"/>
+            <a:off x="777240" y="1600200"/>
+            <a:ext cx="4907127" cy="640080"/>
+          </a:xfrm>
+          <a:prstGeom prst="rect">
+            <a:avLst/>
+          </a:prstGeom>
+          <a:noFill/>
+        </p:spPr>
+        <p:txBody>
+          <a:bodyPr wrap="square" anchor="ctr" lIns="0" rIns="0" tIns="0" bIns="0"/>
           <a:lstStyle/>
           <a:p>
             <a:pPr algn="l"/>
             <a:r>
-              <a:rPr sz="1800" b="0" i="0">
-                <a:solidFill>
-                  <a:srgbClr val="54595D"/>
-                </a:solidFill>
-                <a:latin typeface="Calibri"/>
-              </a:rPr>
-              <a:t>What is the difference between a thick and a thin client?</a:t>
-            </a:r>
-          </a:p>
-          <a:p>
-            <a:r>
-              <a:rPr sz="1800" b="1">
-                <a:solidFill>
-                  <a:srgbClr val="03306E"/>
-                </a:solidFill>
-                <a:latin typeface="Calibri"/>
-              </a:rPr>
-              <a:t>A thick client processes locally; a thin client relies on a server.</a:t>
-            </a:r>
-          </a:p>
-        </p:txBody>
-      </p:sp>
-      <p:sp>
-        <p:nvSpPr>
-          <p:cNvPr id="8" name="Oval 7"/>
+              <a:rPr sz="2000" b="1" i="0">
+                <a:solidFill>
+                  <a:srgbClr val="FFFFFF"/>
+                </a:solidFill>
+                <a:latin typeface="Calibri"/>
+              </a:rPr>
+              <a:t>HDD</a:t>
+            </a:r>
+          </a:p>
+        </p:txBody>
+      </p:sp>
+      <p:sp>
+        <p:nvSpPr>
+          <p:cNvPr id="8" name="Rounded Rectangle 7"/>
           <p:cNvSpPr/>
           <p:nvPr/>
         </p:nvSpPr>
         <p:spPr>
           <a:xfrm>
-            <a:off x="548640" y="2814066"/>
-            <a:ext cx="411480" cy="411480"/>
-          </a:xfrm>
-          <a:prstGeom prst="ellipse">
-            <a:avLst/>
+            <a:off x="548640" y="2377440"/>
+            <a:ext cx="5364327" cy="3794760"/>
+          </a:xfrm>
+          <a:prstGeom prst="roundRect">
+            <a:avLst>
+              <a:gd name="adj" fmla="val 4000"/>
+            </a:avLst>
           </a:prstGeom>
           <a:solidFill>
-            <a:srgbClr val="4EA1FF"/>
+            <a:srgbClr val="EAF3FF"/>
           </a:solidFill>
           <a:ln>
             <a:noFill/>
@@ -9359,82 +12401,136 @@
           </a:fontRef>
         </p:style>
         <p:txBody>
-          <a:bodyPr rtlCol="0" anchor="ctr" lIns="0" rIns="0" tIns="0" bIns="0"/>
-          <a:lstStyle/>
-          <a:p>
-            <a:pPr algn="ctr"/>
-            <a:r>
-              <a:rPr sz="1400" b="1">
+          <a:bodyPr rtlCol="0" anchor="ctr"/>
+          <a:lstStyle/>
+          <a:p/>
+        </p:txBody>
+      </p:sp>
+      <p:sp>
+        <p:nvSpPr>
+          <p:cNvPr id="9" name="TextBox 8"/>
+          <p:cNvSpPr txBox="1"/>
+          <p:nvPr/>
+        </p:nvSpPr>
+        <p:spPr>
+          <a:xfrm>
+            <a:off x="822959" y="2606040"/>
+            <a:ext cx="4815687" cy="3337560"/>
+          </a:xfrm>
+          <a:prstGeom prst="rect">
+            <a:avLst/>
+          </a:prstGeom>
+          <a:noFill/>
+        </p:spPr>
+        <p:txBody>
+          <a:bodyPr wrap="square" lIns="0" rIns="0" tIns="0" bIns="0">
+            <a:spAutoFit/>
+          </a:bodyPr>
+          <a:lstStyle/>
+          <a:p>
+            <a:pPr marL="274320" indent="-274320">
+              <a:spcAft>
+                <a:spcPts val="990"/>
+              </a:spcAft>
+              <a:buClr>
+                <a:srgbClr val="0645AD"/>
+              </a:buClr>
+              <a:buFont typeface="Arial"/>
+              <a:buChar char="•"/>
+            </a:pPr>
+            <a:r>
+              <a:rPr sz="2200" b="0">
                 <a:solidFill>
                   <a:srgbClr val="202122"/>
                 </a:solidFill>
                 <a:latin typeface="Calibri"/>
               </a:rPr>
-              <a:t>2</a:t>
-            </a:r>
-          </a:p>
-        </p:txBody>
-      </p:sp>
-      <p:sp>
-        <p:nvSpPr>
-          <p:cNvPr id="9" name="TextBox 8"/>
-          <p:cNvSpPr txBox="1"/>
-          <p:nvPr/>
-        </p:nvSpPr>
-        <p:spPr>
-          <a:xfrm>
-            <a:off x="1234440" y="2795778"/>
-            <a:ext cx="10408615" cy="1030986"/>
-          </a:xfrm>
-          <a:prstGeom prst="rect">
-            <a:avLst/>
-          </a:prstGeom>
-          <a:noFill/>
-        </p:spPr>
-        <p:txBody>
-          <a:bodyPr wrap="square" anchor="t" lIns="0" rIns="0" tIns="0" bIns="0"/>
-          <a:lstStyle/>
-          <a:p>
-            <a:pPr algn="l"/>
-            <a:r>
-              <a:rPr sz="1800" b="0" i="0">
-                <a:solidFill>
-                  <a:srgbClr val="54595D"/>
-                </a:solidFill>
-                <a:latin typeface="Calibri"/>
-              </a:rPr>
-              <a:t>Give two advantages of an SSD over an HDD.</a:t>
-            </a:r>
-          </a:p>
-          <a:p>
-            <a:r>
-              <a:rPr sz="1800" b="1">
-                <a:solidFill>
-                  <a:srgbClr val="03306E"/>
-                </a:solidFill>
-                <a:latin typeface="Calibri"/>
-              </a:rPr>
-              <a:t>Faster; no moving parts.</a:t>
-            </a:r>
-          </a:p>
-        </p:txBody>
-      </p:sp>
-      <p:sp>
-        <p:nvSpPr>
-          <p:cNvPr id="10" name="Oval 9"/>
+              <a:t>Cheap per gigabyte</a:t>
+            </a:r>
+          </a:p>
+          <a:p>
+            <a:pPr marL="274320" indent="-274320">
+              <a:spcAft>
+                <a:spcPts val="990"/>
+              </a:spcAft>
+              <a:buClr>
+                <a:srgbClr val="0645AD"/>
+              </a:buClr>
+              <a:buFont typeface="Arial"/>
+              <a:buChar char="•"/>
+            </a:pPr>
+            <a:r>
+              <a:rPr sz="2200" b="0">
+                <a:solidFill>
+                  <a:srgbClr val="202122"/>
+                </a:solidFill>
+                <a:latin typeface="Calibri"/>
+              </a:rPr>
+              <a:t>Large capacity</a:t>
+            </a:r>
+          </a:p>
+          <a:p>
+            <a:pPr marL="274320" indent="-274320">
+              <a:spcAft>
+                <a:spcPts val="990"/>
+              </a:spcAft>
+              <a:buClr>
+                <a:srgbClr val="0645AD"/>
+              </a:buClr>
+              <a:buFont typeface="Arial"/>
+              <a:buChar char="•"/>
+            </a:pPr>
+            <a:r>
+              <a:rPr sz="2200" b="0">
+                <a:solidFill>
+                  <a:srgbClr val="202122"/>
+                </a:solidFill>
+                <a:latin typeface="Calibri"/>
+              </a:rPr>
+              <a:t>Moving parts can break</a:t>
+            </a:r>
+          </a:p>
+          <a:p>
+            <a:pPr marL="274320" indent="-274320">
+              <a:spcAft>
+                <a:spcPts val="990"/>
+              </a:spcAft>
+              <a:buClr>
+                <a:srgbClr val="0645AD"/>
+              </a:buClr>
+              <a:buFont typeface="Arial"/>
+              <a:buChar char="•"/>
+            </a:pPr>
+            <a:r>
+              <a:rPr sz="2200" b="0">
+                <a:solidFill>
+                  <a:srgbClr val="202122"/>
+                </a:solidFill>
+                <a:latin typeface="Calibri"/>
+              </a:rPr>
+              <a:t>Can overheat</a:t>
+            </a:r>
+          </a:p>
+        </p:txBody>
+      </p:sp>
+      <p:sp>
+        <p:nvSpPr>
+          <p:cNvPr id="10" name="Rounded Rectangle 9"/>
           <p:cNvSpPr/>
           <p:nvPr/>
         </p:nvSpPr>
         <p:spPr>
           <a:xfrm>
-            <a:off x="548640" y="4009644"/>
-            <a:ext cx="411480" cy="411480"/>
-          </a:xfrm>
-          <a:prstGeom prst="ellipse">
-            <a:avLst/>
+            <a:off x="6278727" y="1600200"/>
+            <a:ext cx="5364327" cy="640080"/>
+          </a:xfrm>
+          <a:prstGeom prst="roundRect">
+            <a:avLst>
+              <a:gd name="adj" fmla="val 15000"/>
+            </a:avLst>
           </a:prstGeom>
           <a:solidFill>
-            <a:srgbClr val="4EA1FF"/>
+            <a:srgbClr val="0645AD"/>
           </a:solidFill>
           <a:ln>
             <a:noFill/>
@@ -9456,20 +12552,9 @@
           </a:fontRef>
         </p:style>
         <p:txBody>
-          <a:bodyPr rtlCol="0" anchor="ctr" lIns="0" rIns="0" tIns="0" bIns="0"/>
-          <a:lstStyle/>
-          <a:p>
-            <a:pPr algn="ctr"/>
-            <a:r>
-              <a:rPr sz="1400" b="1">
-                <a:solidFill>
-                  <a:srgbClr val="202122"/>
-                </a:solidFill>
-                <a:latin typeface="Calibri"/>
-              </a:rPr>
-              <a:t>3</a:t>
-            </a:r>
-          </a:p>
+          <a:bodyPr rtlCol="0" anchor="ctr"/>
+          <a:lstStyle/>
+          <a:p/>
         </p:txBody>
       </p:sp>
       <p:sp>
@@ -9480,58 +12565,49 @@
         </p:nvSpPr>
         <p:spPr>
           <a:xfrm>
-            <a:off x="1234440" y="3991356"/>
-            <a:ext cx="10408615" cy="1030986"/>
-          </a:xfrm>
-          <a:prstGeom prst="rect">
-            <a:avLst/>
-          </a:prstGeom>
-          <a:noFill/>
-        </p:spPr>
-        <p:txBody>
-          <a:bodyPr wrap="square" anchor="t" lIns="0" rIns="0" tIns="0" bIns="0"/>
+            <a:off x="6507327" y="1600200"/>
+            <a:ext cx="4907127" cy="640080"/>
+          </a:xfrm>
+          <a:prstGeom prst="rect">
+            <a:avLst/>
+          </a:prstGeom>
+          <a:noFill/>
+        </p:spPr>
+        <p:txBody>
+          <a:bodyPr wrap="square" anchor="ctr" lIns="0" rIns="0" tIns="0" bIns="0"/>
           <a:lstStyle/>
           <a:p>
             <a:pPr algn="l"/>
             <a:r>
-              <a:rPr sz="1800" b="0" i="0">
-                <a:solidFill>
-                  <a:srgbClr val="54595D"/>
-                </a:solidFill>
-                <a:latin typeface="Calibri"/>
-              </a:rPr>
-              <a:t>Name two collaboration applications.</a:t>
-            </a:r>
-          </a:p>
-          <a:p>
-            <a:r>
-              <a:rPr sz="1800" b="1">
-                <a:solidFill>
-                  <a:srgbClr val="03306E"/>
-                </a:solidFill>
-                <a:latin typeface="Calibri"/>
-              </a:rPr>
-              <a:t>Any two of: email client, video conferencing, VoIP, instant messaging, document sharing.</a:t>
-            </a:r>
-          </a:p>
-        </p:txBody>
-      </p:sp>
-      <p:sp>
-        <p:nvSpPr>
-          <p:cNvPr id="12" name="Oval 11"/>
+              <a:rPr sz="2000" b="1" i="0">
+                <a:solidFill>
+                  <a:srgbClr val="FFFFFF"/>
+                </a:solidFill>
+                <a:latin typeface="Calibri"/>
+              </a:rPr>
+              <a:t>SSD</a:t>
+            </a:r>
+          </a:p>
+        </p:txBody>
+      </p:sp>
+      <p:sp>
+        <p:nvSpPr>
+          <p:cNvPr id="12" name="Rounded Rectangle 11"/>
           <p:cNvSpPr/>
           <p:nvPr/>
         </p:nvSpPr>
         <p:spPr>
           <a:xfrm>
-            <a:off x="548640" y="5205221"/>
-            <a:ext cx="411480" cy="411480"/>
-          </a:xfrm>
-          <a:prstGeom prst="ellipse">
-            <a:avLst/>
+            <a:off x="6278727" y="2377440"/>
+            <a:ext cx="5364327" cy="3794760"/>
+          </a:xfrm>
+          <a:prstGeom prst="roundRect">
+            <a:avLst>
+              <a:gd name="adj" fmla="val 4000"/>
+            </a:avLst>
           </a:prstGeom>
           <a:solidFill>
-            <a:srgbClr val="4EA1FF"/>
+            <a:srgbClr val="EAF3FF"/>
           </a:solidFill>
           <a:ln>
             <a:noFill/>
@@ -9553,62 +12629,114 @@
           </a:fontRef>
         </p:style>
         <p:txBody>
-          <a:bodyPr rtlCol="0" anchor="ctr" lIns="0" rIns="0" tIns="0" bIns="0"/>
-          <a:lstStyle/>
-          <a:p>
-            <a:pPr algn="ctr"/>
-            <a:r>
-              <a:rPr sz="1400" b="1">
+          <a:bodyPr rtlCol="0" anchor="ctr"/>
+          <a:lstStyle/>
+          <a:p/>
+        </p:txBody>
+      </p:sp>
+      <p:sp>
+        <p:nvSpPr>
+          <p:cNvPr id="13" name="TextBox 12"/>
+          <p:cNvSpPr txBox="1"/>
+          <p:nvPr/>
+        </p:nvSpPr>
+        <p:spPr>
+          <a:xfrm>
+            <a:off x="6553047" y="2606040"/>
+            <a:ext cx="4815687" cy="3337560"/>
+          </a:xfrm>
+          <a:prstGeom prst="rect">
+            <a:avLst/>
+          </a:prstGeom>
+          <a:noFill/>
+        </p:spPr>
+        <p:txBody>
+          <a:bodyPr wrap="square" lIns="0" rIns="0" tIns="0" bIns="0">
+            <a:spAutoFit/>
+          </a:bodyPr>
+          <a:lstStyle/>
+          <a:p>
+            <a:pPr marL="274320" indent="-274320">
+              <a:spcAft>
+                <a:spcPts val="990"/>
+              </a:spcAft>
+              <a:buClr>
+                <a:srgbClr val="0645AD"/>
+              </a:buClr>
+              <a:buFont typeface="Arial"/>
+              <a:buChar char="•"/>
+            </a:pPr>
+            <a:r>
+              <a:rPr sz="2200" b="0">
                 <a:solidFill>
                   <a:srgbClr val="202122"/>
                 </a:solidFill>
                 <a:latin typeface="Calibri"/>
               </a:rPr>
-              <a:t>4</a:t>
-            </a:r>
-          </a:p>
-        </p:txBody>
-      </p:sp>
-      <p:sp>
-        <p:nvSpPr>
-          <p:cNvPr id="13" name="TextBox 12"/>
-          <p:cNvSpPr txBox="1"/>
-          <p:nvPr/>
-        </p:nvSpPr>
-        <p:spPr>
-          <a:xfrm>
-            <a:off x="1234440" y="5186933"/>
-            <a:ext cx="10408615" cy="1030986"/>
-          </a:xfrm>
-          <a:prstGeom prst="rect">
-            <a:avLst/>
-          </a:prstGeom>
-          <a:noFill/>
-        </p:spPr>
-        <p:txBody>
-          <a:bodyPr wrap="square" anchor="t" lIns="0" rIns="0" tIns="0" bIns="0"/>
-          <a:lstStyle/>
-          <a:p>
-            <a:pPr algn="l"/>
-            <a:r>
-              <a:rPr sz="1800" b="0" i="0">
-                <a:solidFill>
-                  <a:srgbClr val="54595D"/>
-                </a:solidFill>
-                <a:latin typeface="Calibri"/>
-              </a:rPr>
-              <a:t>What should you check before installing software?</a:t>
-            </a:r>
-          </a:p>
-          <a:p>
-            <a:r>
-              <a:rPr sz="1800" b="1">
-                <a:solidFill>
-                  <a:srgbClr val="03306E"/>
-                </a:solidFill>
-                <a:latin typeface="Calibri"/>
-              </a:rPr>
-              <a:t>System requirements: storage, RAM, processor, OS compatibility.</a:t>
+              <a:t>Much faster</a:t>
+            </a:r>
+          </a:p>
+          <a:p>
+            <a:pPr marL="274320" indent="-274320">
+              <a:spcAft>
+                <a:spcPts val="990"/>
+              </a:spcAft>
+              <a:buClr>
+                <a:srgbClr val="0645AD"/>
+              </a:buClr>
+              <a:buFont typeface="Arial"/>
+              <a:buChar char="•"/>
+            </a:pPr>
+            <a:r>
+              <a:rPr sz="2200" b="0">
+                <a:solidFill>
+                  <a:srgbClr val="202122"/>
+                </a:solidFill>
+                <a:latin typeface="Calibri"/>
+              </a:rPr>
+              <a:t>No moving parts</a:t>
+            </a:r>
+          </a:p>
+          <a:p>
+            <a:pPr marL="274320" indent="-274320">
+              <a:spcAft>
+                <a:spcPts val="990"/>
+              </a:spcAft>
+              <a:buClr>
+                <a:srgbClr val="0645AD"/>
+              </a:buClr>
+              <a:buFont typeface="Arial"/>
+              <a:buChar char="•"/>
+            </a:pPr>
+            <a:r>
+              <a:rPr sz="2200" b="0">
+                <a:solidFill>
+                  <a:srgbClr val="202122"/>
+                </a:solidFill>
+                <a:latin typeface="Calibri"/>
+              </a:rPr>
+              <a:t>Costs more per gigabyte</a:t>
+            </a:r>
+          </a:p>
+          <a:p>
+            <a:pPr marL="274320" indent="-274320">
+              <a:spcAft>
+                <a:spcPts val="990"/>
+              </a:spcAft>
+              <a:buClr>
+                <a:srgbClr val="0645AD"/>
+              </a:buClr>
+              <a:buFont typeface="Arial"/>
+              <a:buChar char="•"/>
+            </a:pPr>
+            <a:r>
+              <a:rPr sz="2200" b="0">
+                <a:solidFill>
+                  <a:srgbClr val="202122"/>
+                </a:solidFill>
+                <a:latin typeface="Calibri"/>
+              </a:rPr>
+              <a:t>Smaller, suits compact devices</a:t>
             </a:r>
           </a:p>
         </p:txBody>
@@ -9700,7 +12828,7 @@
                 </a:solidFill>
                 <a:latin typeface="Cambria"/>
               </a:rPr>
-              <a:t>Activity: Install and configure</a:t>
+              <a:t>Quick check: Checking requirements: storage</a:t>
             </a:r>
           </a:p>
         </p:txBody>
@@ -9773,19 +12901,17 @@
       </p:sp>
       <p:sp>
         <p:nvSpPr>
-          <p:cNvPr id="6" name="Rounded Rectangle 5"/>
+          <p:cNvPr id="6" name="Oval 5"/>
           <p:cNvSpPr/>
           <p:nvPr/>
         </p:nvSpPr>
         <p:spPr>
           <a:xfrm>
-            <a:off x="548640" y="1508760"/>
-            <a:ext cx="2011680" cy="457200"/>
-          </a:xfrm>
-          <a:prstGeom prst="roundRect">
-            <a:avLst>
-              <a:gd name="adj" fmla="val 50000"/>
-            </a:avLst>
+            <a:off x="548640" y="1691640"/>
+            <a:ext cx="502920" cy="502920"/>
+          </a:xfrm>
+          <a:prstGeom prst="ellipse">
+            <a:avLst/>
           </a:prstGeom>
           <a:solidFill>
             <a:srgbClr val="4EA1FF"/>
@@ -9810,9 +12936,20 @@
           </a:fontRef>
         </p:style>
         <p:txBody>
-          <a:bodyPr rtlCol="0" anchor="ctr"/>
-          <a:lstStyle/>
-          <a:p/>
+          <a:bodyPr rtlCol="0" anchor="ctr" lIns="0" rIns="0" tIns="0" bIns="0"/>
+          <a:lstStyle/>
+          <a:p>
+            <a:pPr algn="ctr"/>
+            <a:r>
+              <a:rPr sz="1600" b="1">
+                <a:solidFill>
+                  <a:srgbClr val="202122"/>
+                </a:solidFill>
+                <a:latin typeface="Calibri"/>
+              </a:rPr>
+              <a:t>1</a:t>
+            </a:r>
+          </a:p>
         </p:txBody>
       </p:sp>
       <p:sp>
@@ -9823,80 +12960,47 @@
         </p:nvSpPr>
         <p:spPr>
           <a:xfrm>
-            <a:off x="548640" y="1508760"/>
-            <a:ext cx="2011680" cy="457200"/>
-          </a:xfrm>
-          <a:prstGeom prst="rect">
-            <a:avLst/>
-          </a:prstGeom>
-          <a:noFill/>
-        </p:spPr>
-        <p:txBody>
-          <a:bodyPr wrap="square" anchor="ctr" lIns="0" rIns="0" tIns="0" bIns="0"/>
-          <a:lstStyle/>
-          <a:p>
-            <a:pPr algn="ctr"/>
-            <a:r>
-              <a:rPr sz="1400" b="1" i="0">
+            <a:off x="1371600" y="1645920"/>
+            <a:ext cx="10271455" cy="1188720"/>
+          </a:xfrm>
+          <a:prstGeom prst="rect">
+            <a:avLst/>
+          </a:prstGeom>
+          <a:noFill/>
+        </p:spPr>
+        <p:txBody>
+          <a:bodyPr wrap="square" anchor="t" lIns="0" rIns="0" tIns="0" bIns="0"/>
+          <a:lstStyle/>
+          <a:p>
+            <a:pPr algn="l"/>
+            <a:r>
+              <a:rPr sz="2400" b="0" i="0">
                 <a:solidFill>
                   <a:srgbClr val="202122"/>
                 </a:solidFill>
                 <a:latin typeface="Calibri"/>
               </a:rPr>
-              <a:t>45 minutes</a:t>
-            </a:r>
-          </a:p>
-        </p:txBody>
-      </p:sp>
-      <p:sp>
-        <p:nvSpPr>
-          <p:cNvPr id="8" name="TextBox 7"/>
-          <p:cNvSpPr txBox="1"/>
-          <p:nvPr/>
-        </p:nvSpPr>
-        <p:spPr>
-          <a:xfrm>
-            <a:off x="2743200" y="1508760"/>
-            <a:ext cx="4754880" cy="457200"/>
-          </a:xfrm>
-          <a:prstGeom prst="rect">
-            <a:avLst/>
-          </a:prstGeom>
-          <a:noFill/>
-        </p:spPr>
-        <p:txBody>
-          <a:bodyPr wrap="square" anchor="ctr" lIns="0" rIns="0" tIns="0" bIns="0"/>
-          <a:lstStyle/>
-          <a:p>
-            <a:pPr algn="l"/>
-            <a:r>
-              <a:rPr sz="1400" b="0" i="1">
-                <a:solidFill>
-                  <a:srgbClr val="54595D"/>
-                </a:solidFill>
-                <a:latin typeface="Calibri"/>
-              </a:rPr>
-              <a:t>Individual, on a VM</a:t>
-            </a:r>
-          </a:p>
-        </p:txBody>
-      </p:sp>
-      <p:sp>
-        <p:nvSpPr>
-          <p:cNvPr id="9" name="Oval 8"/>
+              <a:t>Name three system requirements to check.</a:t>
+            </a:r>
+          </a:p>
+        </p:txBody>
+      </p:sp>
+      <p:sp>
+        <p:nvSpPr>
+          <p:cNvPr id="8" name="Oval 7"/>
           <p:cNvSpPr/>
           <p:nvPr/>
         </p:nvSpPr>
         <p:spPr>
           <a:xfrm>
-            <a:off x="548640" y="2482596"/>
-            <a:ext cx="384048" cy="384048"/>
+            <a:off x="548640" y="3108960"/>
+            <a:ext cx="502920" cy="502920"/>
           </a:xfrm>
           <a:prstGeom prst="ellipse">
             <a:avLst/>
           </a:prstGeom>
           <a:solidFill>
-            <a:srgbClr val="0645AD"/>
+            <a:srgbClr val="4EA1FF"/>
           </a:solidFill>
           <a:ln>
             <a:noFill/>
@@ -9923,66 +13027,66 @@
           <a:p>
             <a:pPr algn="ctr"/>
             <a:r>
-              <a:rPr sz="1300" b="1">
-                <a:solidFill>
-                  <a:srgbClr val="FFFFFF"/>
-                </a:solidFill>
-                <a:latin typeface="Calibri"/>
-              </a:rPr>
-              <a:t>1</a:t>
-            </a:r>
-          </a:p>
-        </p:txBody>
-      </p:sp>
-      <p:sp>
-        <p:nvSpPr>
-          <p:cNvPr id="10" name="TextBox 9"/>
-          <p:cNvSpPr txBox="1"/>
-          <p:nvPr/>
-        </p:nvSpPr>
-        <p:spPr>
-          <a:xfrm>
-            <a:off x="1143000" y="2240280"/>
-            <a:ext cx="5943600" cy="868680"/>
-          </a:xfrm>
-          <a:prstGeom prst="rect">
-            <a:avLst/>
-          </a:prstGeom>
-          <a:noFill/>
-        </p:spPr>
-        <p:txBody>
-          <a:bodyPr wrap="square" anchor="ctr" lIns="0" rIns="0" tIns="0" bIns="0"/>
+              <a:rPr sz="1600" b="1">
+                <a:solidFill>
+                  <a:srgbClr val="202122"/>
+                </a:solidFill>
+                <a:latin typeface="Calibri"/>
+              </a:rPr>
+              <a:t>2</a:t>
+            </a:r>
+          </a:p>
+        </p:txBody>
+      </p:sp>
+      <p:sp>
+        <p:nvSpPr>
+          <p:cNvPr id="9" name="TextBox 8"/>
+          <p:cNvSpPr txBox="1"/>
+          <p:nvPr/>
+        </p:nvSpPr>
+        <p:spPr>
+          <a:xfrm>
+            <a:off x="1371600" y="3063240"/>
+            <a:ext cx="10271455" cy="1188720"/>
+          </a:xfrm>
+          <a:prstGeom prst="rect">
+            <a:avLst/>
+          </a:prstGeom>
+          <a:noFill/>
+        </p:spPr>
+        <p:txBody>
+          <a:bodyPr wrap="square" anchor="t" lIns="0" rIns="0" tIns="0" bIns="0"/>
           <a:lstStyle/>
           <a:p>
             <a:pPr algn="l"/>
             <a:r>
-              <a:rPr sz="1700" b="0" i="0">
+              <a:rPr sz="2400" b="0" i="0">
                 <a:solidFill>
                   <a:srgbClr val="202122"/>
                 </a:solidFill>
                 <a:latin typeface="Calibri"/>
               </a:rPr>
-              <a:t>Check the VM meets the system requirements for the given OS.</a:t>
-            </a:r>
-          </a:p>
-        </p:txBody>
-      </p:sp>
-      <p:sp>
-        <p:nvSpPr>
-          <p:cNvPr id="11" name="Oval 10"/>
+              <a:t>Give one advantage of an SSD.</a:t>
+            </a:r>
+          </a:p>
+        </p:txBody>
+      </p:sp>
+      <p:sp>
+        <p:nvSpPr>
+          <p:cNvPr id="10" name="Oval 9"/>
           <p:cNvSpPr/>
           <p:nvPr/>
         </p:nvSpPr>
         <p:spPr>
           <a:xfrm>
-            <a:off x="548640" y="3461004"/>
-            <a:ext cx="384048" cy="384048"/>
+            <a:off x="548640" y="4526280"/>
+            <a:ext cx="502920" cy="502920"/>
           </a:xfrm>
           <a:prstGeom prst="ellipse">
             <a:avLst/>
           </a:prstGeom>
           <a:solidFill>
-            <a:srgbClr val="0645AD"/>
+            <a:srgbClr val="4EA1FF"/>
           </a:solidFill>
           <a:ln>
             <a:noFill/>
@@ -10009,13 +13113,46 @@
           <a:p>
             <a:pPr algn="ctr"/>
             <a:r>
-              <a:rPr sz="1300" b="1">
-                <a:solidFill>
-                  <a:srgbClr val="FFFFFF"/>
-                </a:solidFill>
-                <a:latin typeface="Calibri"/>
-              </a:rPr>
-              <a:t>2</a:t>
+              <a:rPr sz="1600" b="1">
+                <a:solidFill>
+                  <a:srgbClr val="202122"/>
+                </a:solidFill>
+                <a:latin typeface="Calibri"/>
+              </a:rPr>
+              <a:t>3</a:t>
+            </a:r>
+          </a:p>
+        </p:txBody>
+      </p:sp>
+      <p:sp>
+        <p:nvSpPr>
+          <p:cNvPr id="11" name="TextBox 10"/>
+          <p:cNvSpPr txBox="1"/>
+          <p:nvPr/>
+        </p:nvSpPr>
+        <p:spPr>
+          <a:xfrm>
+            <a:off x="1371600" y="4480560"/>
+            <a:ext cx="10271455" cy="1188720"/>
+          </a:xfrm>
+          <a:prstGeom prst="rect">
+            <a:avLst/>
+          </a:prstGeom>
+          <a:noFill/>
+        </p:spPr>
+        <p:txBody>
+          <a:bodyPr wrap="square" anchor="t" lIns="0" rIns="0" tIns="0" bIns="0"/>
+          <a:lstStyle/>
+          <a:p>
+            <a:pPr algn="l"/>
+            <a:r>
+              <a:rPr sz="2400" b="0" i="0">
+                <a:solidFill>
+                  <a:srgbClr val="202122"/>
+                </a:solidFill>
+                <a:latin typeface="Calibri"/>
+              </a:rPr>
+              <a:t>What is least privilege?</a:t>
             </a:r>
           </a:p>
         </p:txBody>
@@ -10028,362 +13165,27 @@
         </p:nvSpPr>
         <p:spPr>
           <a:xfrm>
-            <a:off x="1143000" y="3218688"/>
-            <a:ext cx="5943600" cy="868680"/>
-          </a:xfrm>
-          <a:prstGeom prst="rect">
-            <a:avLst/>
-          </a:prstGeom>
-          <a:noFill/>
-        </p:spPr>
-        <p:txBody>
-          <a:bodyPr wrap="square" anchor="ctr" lIns="0" rIns="0" tIns="0" bIns="0"/>
+            <a:off x="548640" y="5852160"/>
+            <a:ext cx="11094415" cy="365760"/>
+          </a:xfrm>
+          <a:prstGeom prst="rect">
+            <a:avLst/>
+          </a:prstGeom>
+          <a:noFill/>
+        </p:spPr>
+        <p:txBody>
+          <a:bodyPr wrap="square" anchor="t" lIns="0" rIns="0" tIns="0" bIns="0"/>
           <a:lstStyle/>
           <a:p>
             <a:pPr algn="l"/>
             <a:r>
-              <a:rPr sz="1700" b="0" i="0">
-                <a:solidFill>
-                  <a:srgbClr val="202122"/>
-                </a:solidFill>
-                <a:latin typeface="Calibri"/>
-              </a:rPr>
-              <a:t>Install the OS with a sensible partition layout.</a:t>
-            </a:r>
-          </a:p>
-        </p:txBody>
-      </p:sp>
-      <p:sp>
-        <p:nvSpPr>
-          <p:cNvPr id="13" name="Oval 12"/>
-          <p:cNvSpPr/>
-          <p:nvPr/>
-        </p:nvSpPr>
-        <p:spPr>
-          <a:xfrm>
-            <a:off x="548640" y="4439412"/>
-            <a:ext cx="384048" cy="384048"/>
-          </a:xfrm>
-          <a:prstGeom prst="ellipse">
-            <a:avLst/>
-          </a:prstGeom>
-          <a:solidFill>
-            <a:srgbClr val="0645AD"/>
-          </a:solidFill>
-          <a:ln>
-            <a:noFill/>
-          </a:ln>
-          <a:effectLst/>
-        </p:spPr>
-        <p:style>
-          <a:lnRef idx="1">
-            <a:schemeClr val="accent1"/>
-          </a:lnRef>
-          <a:fillRef idx="3">
-            <a:schemeClr val="accent1"/>
-          </a:fillRef>
-          <a:effectRef idx="2">
-            <a:schemeClr val="accent1"/>
-          </a:effectRef>
-          <a:fontRef idx="minor">
-            <a:schemeClr val="lt1"/>
-          </a:fontRef>
-        </p:style>
-        <p:txBody>
-          <a:bodyPr rtlCol="0" anchor="ctr" lIns="0" rIns="0" tIns="0" bIns="0"/>
-          <a:lstStyle/>
-          <a:p>
-            <a:pPr algn="ctr"/>
-            <a:r>
-              <a:rPr sz="1300" b="1">
-                <a:solidFill>
-                  <a:srgbClr val="FFFFFF"/>
-                </a:solidFill>
-                <a:latin typeface="Calibri"/>
-              </a:rPr>
-              <a:t>3</a:t>
-            </a:r>
-          </a:p>
-        </p:txBody>
-      </p:sp>
-      <p:sp>
-        <p:nvSpPr>
-          <p:cNvPr id="14" name="TextBox 13"/>
-          <p:cNvSpPr txBox="1"/>
-          <p:nvPr/>
-        </p:nvSpPr>
-        <p:spPr>
-          <a:xfrm>
-            <a:off x="1143000" y="4197096"/>
-            <a:ext cx="5943600" cy="868680"/>
-          </a:xfrm>
-          <a:prstGeom prst="rect">
-            <a:avLst/>
-          </a:prstGeom>
-          <a:noFill/>
-        </p:spPr>
-        <p:txBody>
-          <a:bodyPr wrap="square" anchor="ctr" lIns="0" rIns="0" tIns="0" bIns="0"/>
-          <a:lstStyle/>
-          <a:p>
-            <a:pPr algn="l"/>
-            <a:r>
-              <a:rPr sz="1700" b="0" i="0">
-                <a:solidFill>
-                  <a:srgbClr val="202122"/>
-                </a:solidFill>
-                <a:latin typeface="Calibri"/>
-              </a:rPr>
-              <a:t>Set region, language and time, then apply updates.</a:t>
-            </a:r>
-          </a:p>
-        </p:txBody>
-      </p:sp>
-      <p:sp>
-        <p:nvSpPr>
-          <p:cNvPr id="15" name="Oval 14"/>
-          <p:cNvSpPr/>
-          <p:nvPr/>
-        </p:nvSpPr>
-        <p:spPr>
-          <a:xfrm>
-            <a:off x="548640" y="5417820"/>
-            <a:ext cx="384048" cy="384048"/>
-          </a:xfrm>
-          <a:prstGeom prst="ellipse">
-            <a:avLst/>
-          </a:prstGeom>
-          <a:solidFill>
-            <a:srgbClr val="0645AD"/>
-          </a:solidFill>
-          <a:ln>
-            <a:noFill/>
-          </a:ln>
-          <a:effectLst/>
-        </p:spPr>
-        <p:style>
-          <a:lnRef idx="1">
-            <a:schemeClr val="accent1"/>
-          </a:lnRef>
-          <a:fillRef idx="3">
-            <a:schemeClr val="accent1"/>
-          </a:fillRef>
-          <a:effectRef idx="2">
-            <a:schemeClr val="accent1"/>
-          </a:effectRef>
-          <a:fontRef idx="minor">
-            <a:schemeClr val="lt1"/>
-          </a:fontRef>
-        </p:style>
-        <p:txBody>
-          <a:bodyPr rtlCol="0" anchor="ctr" lIns="0" rIns="0" tIns="0" bIns="0"/>
-          <a:lstStyle/>
-          <a:p>
-            <a:pPr algn="ctr"/>
-            <a:r>
-              <a:rPr sz="1300" b="1">
-                <a:solidFill>
-                  <a:srgbClr val="FFFFFF"/>
-                </a:solidFill>
-                <a:latin typeface="Calibri"/>
-              </a:rPr>
-              <a:t>4</a:t>
-            </a:r>
-          </a:p>
-        </p:txBody>
-      </p:sp>
-      <p:sp>
-        <p:nvSpPr>
-          <p:cNvPr id="16" name="TextBox 15"/>
-          <p:cNvSpPr txBox="1"/>
-          <p:nvPr/>
-        </p:nvSpPr>
-        <p:spPr>
-          <a:xfrm>
-            <a:off x="1143000" y="5175504"/>
-            <a:ext cx="5943600" cy="868680"/>
-          </a:xfrm>
-          <a:prstGeom prst="rect">
-            <a:avLst/>
-          </a:prstGeom>
-          <a:noFill/>
-        </p:spPr>
-        <p:txBody>
-          <a:bodyPr wrap="square" anchor="ctr" lIns="0" rIns="0" tIns="0" bIns="0"/>
-          <a:lstStyle/>
-          <a:p>
-            <a:pPr algn="l"/>
-            <a:r>
-              <a:rPr sz="1700" b="0" i="0">
-                <a:solidFill>
-                  <a:srgbClr val="202122"/>
-                </a:solidFill>
-                <a:latin typeface="Calibri"/>
-              </a:rPr>
-              <a:t>Install a productivity suite and record every setting you chose.</a:t>
-            </a:r>
-          </a:p>
-        </p:txBody>
-      </p:sp>
-      <p:sp>
-        <p:nvSpPr>
-          <p:cNvPr id="17" name="Rounded Rectangle 16"/>
-          <p:cNvSpPr/>
-          <p:nvPr/>
-        </p:nvSpPr>
-        <p:spPr>
-          <a:xfrm>
-            <a:off x="7772400" y="1508760"/>
-            <a:ext cx="3867912" cy="4572000"/>
-          </a:xfrm>
-          <a:prstGeom prst="roundRect">
-            <a:avLst>
-              <a:gd name="adj" fmla="val 8000"/>
-            </a:avLst>
-          </a:prstGeom>
-          <a:solidFill>
-            <a:srgbClr val="EAF3FF"/>
-          </a:solidFill>
-          <a:ln>
-            <a:noFill/>
-          </a:ln>
-          <a:effectLst/>
-        </p:spPr>
-        <p:style>
-          <a:lnRef idx="1">
-            <a:schemeClr val="accent1"/>
-          </a:lnRef>
-          <a:fillRef idx="3">
-            <a:schemeClr val="accent1"/>
-          </a:fillRef>
-          <a:effectRef idx="2">
-            <a:schemeClr val="accent1"/>
-          </a:effectRef>
-          <a:fontRef idx="minor">
-            <a:schemeClr val="lt1"/>
-          </a:fontRef>
-        </p:style>
-        <p:txBody>
-          <a:bodyPr rtlCol="0" anchor="ctr"/>
-          <a:lstStyle/>
-          <a:p/>
-        </p:txBody>
-      </p:sp>
-      <p:sp>
-        <p:nvSpPr>
-          <p:cNvPr id="18" name="TextBox 17"/>
-          <p:cNvSpPr txBox="1"/>
-          <p:nvPr/>
-        </p:nvSpPr>
-        <p:spPr>
-          <a:xfrm>
-            <a:off x="8046720" y="1737360"/>
-            <a:ext cx="3291840" cy="365760"/>
-          </a:xfrm>
-          <a:prstGeom prst="rect">
-            <a:avLst/>
-          </a:prstGeom>
-          <a:noFill/>
-        </p:spPr>
-        <p:txBody>
-          <a:bodyPr wrap="square" anchor="t" lIns="0" rIns="0" tIns="0" bIns="0"/>
-          <a:lstStyle/>
-          <a:p>
-            <a:pPr algn="l"/>
-            <a:r>
-              <a:rPr sz="1300" b="1" i="0">
-                <a:solidFill>
-                  <a:srgbClr val="0645AD"/>
-                </a:solidFill>
-                <a:latin typeface="Calibri"/>
-              </a:rPr>
-              <a:t>SUCCESS CRITERIA</a:t>
-            </a:r>
-          </a:p>
-        </p:txBody>
-      </p:sp>
-      <p:sp>
-        <p:nvSpPr>
-          <p:cNvPr id="19" name="TextBox 18"/>
-          <p:cNvSpPr txBox="1"/>
-          <p:nvPr/>
-        </p:nvSpPr>
-        <p:spPr>
-          <a:xfrm>
-            <a:off x="8046720" y="2240280"/>
-            <a:ext cx="3337560" cy="3657600"/>
-          </a:xfrm>
-          <a:prstGeom prst="rect">
-            <a:avLst/>
-          </a:prstGeom>
-          <a:noFill/>
-        </p:spPr>
-        <p:txBody>
-          <a:bodyPr wrap="square" lIns="0" rIns="0" tIns="0" bIns="0">
-            <a:spAutoFit/>
-          </a:bodyPr>
-          <a:lstStyle/>
-          <a:p>
-            <a:pPr marL="274320" indent="-274320">
-              <a:spcAft>
-                <a:spcPts val="810"/>
-              </a:spcAft>
-              <a:buClr>
-                <a:srgbClr val="0645AD"/>
-              </a:buClr>
-              <a:buFont typeface="Arial"/>
-              <a:buChar char="•"/>
-            </a:pPr>
-            <a:r>
-              <a:rPr sz="1800" b="0">
-                <a:solidFill>
-                  <a:srgbClr val="202122"/>
-                </a:solidFill>
-                <a:latin typeface="Calibri"/>
-              </a:rPr>
-              <a:t>Requirements checked and recorded</a:t>
-            </a:r>
-          </a:p>
-          <a:p>
-            <a:pPr marL="274320" indent="-274320">
-              <a:spcAft>
-                <a:spcPts val="810"/>
-              </a:spcAft>
-              <a:buClr>
-                <a:srgbClr val="0645AD"/>
-              </a:buClr>
-              <a:buFont typeface="Arial"/>
-              <a:buChar char="•"/>
-            </a:pPr>
-            <a:r>
-              <a:rPr sz="1800" b="0">
-                <a:solidFill>
-                  <a:srgbClr val="202122"/>
-                </a:solidFill>
-                <a:latin typeface="Calibri"/>
-              </a:rPr>
-              <a:t>OS fully updated</a:t>
-            </a:r>
-          </a:p>
-          <a:p>
-            <a:pPr marL="274320" indent="-274320">
-              <a:spcAft>
-                <a:spcPts val="810"/>
-              </a:spcAft>
-              <a:buClr>
-                <a:srgbClr val="0645AD"/>
-              </a:buClr>
-              <a:buFont typeface="Arial"/>
-              <a:buChar char="•"/>
-            </a:pPr>
-            <a:r>
-              <a:rPr sz="1800" b="0">
-                <a:solidFill>
-                  <a:srgbClr val="202122"/>
-                </a:solidFill>
-                <a:latin typeface="Calibri"/>
-              </a:rPr>
-              <a:t>Clear installation log for a colleague to follow</a:t>
+              <a:rPr sz="1300" b="0" i="1">
+                <a:solidFill>
+                  <a:srgbClr val="54595D"/>
+                </a:solidFill>
+                <a:latin typeface="Calibri"/>
+              </a:rPr>
+              <a:t>Answer on mini whiteboards or in your book. Answers are in the speaker notes.</a:t>
             </a:r>
           </a:p>
         </p:txBody>
